--- a/leadership-ppt/leadership-plan.pptx
+++ b/leadership-ppt/leadership-plan.pptx
@@ -839,7 +839,7 @@
           <a:p>
             <a:r>
               <a:rPr lang="en-US" dirty="0"/>
-              <a:t>안녕하세요, ○조입니다. 저희는 현대카드 정태영 부회장을 대상으로 리더십 사례분석을 진행하려고 합니다. 오늘은 그 계획을 과제 항목 다섯 가지 순서로 말씀드리겠습니다.</a:t>
+              <a:t>안녕하세요, ○조입니다. 저희 조는 현대카드 정태영 부회장을 분석 대상으로 정했습니다. 오늘은 보고서를 어떻게 쓸지, 그 계획을 말씀드리겠습니다.</a:t>
             </a:r>
             <a:endParaRPr lang="en-US" dirty="0"/>
           </a:p>
@@ -927,7 +927,7 @@
           <a:p>
             <a:r>
               <a:rPr lang="en-US" dirty="0"/>
-              <a:t>자료는 네 가지 경로로 모읍니다. 재무와 지분 같은 수치는 DART 공시를 기준으로 하고, 리더의 생각은 인터뷰와 SNS로 확인합니다. AI는 요약과 초안, 예상 질문 정리에 적극 활용하되, 수치와 인용문은 반드시 원문으로 다시 확인하겠습니다.</a:t>
+              <a:t>자료는 네 군데서 모읍니다. 매출이나 지분 같은 숫자는 DART 공시를 기준으로 하고, 회사가 직접 낸 IR 자료와 뉴스룸으로 시기별 발표를 확인합니다. 리더가 왜 그런 결정을 했는지는 인터뷰와 본인 SNS에서 찾고, 논문은 앞선 연구가 현대카드를 어떤 틀로 분석했는지 참고하려고 합니다.</a:t>
             </a:r>
             <a:endParaRPr lang="en-US" dirty="0"/>
           </a:p>
@@ -1015,7 +1015,7 @@
           <a:p>
             <a:r>
               <a:rPr lang="en-US" dirty="0"/>
-              <a:t>사례분석은 23년을 네 시기로 나눠 진행합니다. 각 시기마다 상황, 리더의 행동, 성과, 한계를 같은 순서로 보는데, 그중 핵심은 리더의 행동입니다. 예를 들어 위기 시기에는 현대카드M 출시와 윤리 원칙, GE와의 제휴를 분석합니다.</a:t>
+              <a:t>보고서 본론은 이 표대로 갑니다. 네 시기마다 어떤 상황이었는지, 리더가 뭘 했는지, 결과가 어땠는지, 아쉬운 점은 뭐였는지를 같은 순서로 봅니다. 순서를 똑같이 맞춰야 시기끼리 비교가 되기 때문입니다. 그중에서도 가운데 빨간색, 리더의 행동이 저희 질문과 바로 이어지는 부분이라 가장 자세히 다룰 예정입니다.</a:t>
             </a:r>
             <a:endParaRPr lang="en-US" dirty="0"/>
           </a:p>
@@ -1103,7 +1103,7 @@
           <a:p>
             <a:r>
               <a:rPr lang="en-US" dirty="0"/>
-              <a:t>핵심 질문에는 4장의 두 이론으로 답합니다. 리더의 행동 변화는 House의 경로-목표이론으로, 조직 상황의 변화는 Fiedler의 상황 모델로 봅니다. 여기에 특성이론, 행동이론, 갈등관리, 권력과 협상 이론을 더해 리더의 개인 특성과 영향력의 원천까지 보완하겠습니다.</a:t>
+              <a:t>이론은 수업 4장에서 배운 두 가지가 중심입니다. 리더의 행동이 바뀌었는지는 House의 경로-목표이론으로, 상황이 바뀌었는지는 Fiedler의 상황 모델로 봅니다. 여기에 2장 특성이론, 3장 행동이론, 5장 갈등관리, 6장 권력과 협상을 보조로 써서, 리더 개인의 성향이나 영향력이 어디서 나오는지도 함께 보겠습니다.</a:t>
             </a:r>
             <a:endParaRPr lang="en-US" dirty="0"/>
           </a:p>
@@ -1191,7 +1191,7 @@
           <a:p>
             <a:r>
               <a:rPr lang="en-US" dirty="0"/>
-              <a:t>네 명이 시기를 하나씩 맡아 자료조사와 분석을 하고, PPT 작성과 발표는 담당자를 따로 정했습니다. 발표자는 두 명이며, 수치와 인용은 서로 교차로 확인하겠습니다.</a:t>
+              <a:t>자료를 찾아보면서 미리 세워 본 가설입니다. 위기 때는 리더가 직접 방향을 정하는 지시적 리더십이, 흑자가 난 뒤에는 직원에게 맡기는 참여적이고 후원적인 모습이 나왔을 것 같습니다. 구조조정 때는 다시 지시적으로 돌아가고, 디지털 전환기에는 높은 목표를 던지는 성취지향적 리더십이 보일 거라고 예상합니다. 오른쪽은 같은 시기에 상황이 어떻게 바뀌었는지를 Fiedler의 상황변수로 본 것입니다. 이 가설이 맞는지는 보고서에서 자료로 확인하겠습니다.</a:t>
             </a:r>
             <a:endParaRPr lang="en-US" dirty="0"/>
           </a:p>
@@ -1279,7 +1279,7 @@
           <a:p>
             <a:r>
               <a:rPr lang="en-US" dirty="0"/>
-              <a:t>오늘 계획 발표 이후 피드백을 반영해 바로 자료 수집을 시작합니다. 2주차부터 시기별 분석, 3주차부터 이론 연계를 진행하고, 11월 26일 최종보고서를 제출한 뒤 11월 30일에 최종 발표를 하겠습니다.</a:t>
+              <a:t>평가할 때는 잘한 점만 늘어놓지 않으려고 합니다. 점유율 2위, 브랜드 차별화, AI 수출 같은 성과가 있지만, 창사 첫 희망퇴직이나 애플페이 수수료 논란, 그리고 리더 한 사람에게 너무 기대는 구조라는 지적도 있습니다. 이걸 다 놓고 결론에서는 처음 질문으로 돌아가, 스스로 바뀐 리더였는지 판을 바꾼 리더였는지 저희 판단을 내리겠습니다.</a:t>
             </a:r>
             <a:endParaRPr lang="en-US" dirty="0"/>
           </a:p>
@@ -1367,7 +1367,7 @@
           <a:p>
             <a:r>
               <a:rPr lang="en-US" dirty="0"/>
-              <a:t/>
+              <a:t>참고한 자료입니다. 따로 설명하지 않고 넘어가셔도 됩니다.</a:t>
             </a:r>
             <a:endParaRPr lang="en-US" dirty="0"/>
           </a:p>
@@ -1455,7 +1455,7 @@
           <a:p>
             <a:r>
               <a:rPr lang="en-US" dirty="0"/>
-              <a:t>이상으로 발표를 마치겠습니다. 질문 주시면 답변드리겠습니다.</a:t>
+              <a:t>이상으로 저희 조의 계획 발표를 마치겠습니다. 질문 주시면 답변드리겠습니다.</a:t>
             </a:r>
             <a:endParaRPr lang="en-US" dirty="0"/>
           </a:p>
@@ -1543,7 +1543,7 @@
           <a:p>
             <a:r>
               <a:rPr lang="en-US" dirty="0"/>
-              <a:t>발표는 과제에서 요청한 다섯 항목 순서대로 진행합니다. 3번 보고서 작성 방법에서 저희 분석 틀을 가장 자세히 말씀드리겠습니다.</a:t>
+              <a:t>순서는 과제에서 주신 항목 그대로입니다. 리더를 왜 골랐는지, 어떤 사람이고 어떤 회사를 이끄는지 먼저 말씀드리고, 마지막에 보고서를 어떤 틀로 쓸지 가장 자세히 설명드리겠습니다.</a:t>
             </a:r>
             <a:endParaRPr lang="en-US" dirty="0"/>
           </a:p>
@@ -1631,7 +1631,7 @@
           <a:p>
             <a:r>
               <a:rPr lang="en-US" dirty="0"/>
-              <a:t>저희 보고서는 이 질문 하나를 중심으로 진행합니다. 리더가 스스로 행동을 바꿨다면 House의 경로-목표이론으로, 리더가 조직의 상황 자체를 바꿨다면 Fiedler의 상황 모델로 설명하고, 두 관점을 비교하려고 합니다.</a:t>
+              <a:t>보고서 전체를 이 질문 하나로 끌고 가려고 합니다. 정 부회장이 상황에 맞춰 자기 행동을 바꿨다면 House의 경로-목표이론으로 설명이 되고, 반대로 제휴나 원칙 같은 걸로 상황 자체를 바꿨다면 Fiedler의 상황 모델로 설명이 됩니다. 두 이론 중 어느 쪽이 더 잘 맞는지 비교하는 게 보고서의 목표입니다.</a:t>
             </a:r>
             <a:endParaRPr lang="en-US" dirty="0"/>
           </a:p>
@@ -1719,7 +1719,7 @@
           <a:p>
             <a:r>
               <a:rPr lang="en-US" dirty="0"/>
-              <a:t>정태영 부회장은 현대차그룹 계열사에서 기획과 해외 사업을 맡다가, 카드대란이 한창이던 2003년 적자 상태의 현대카드를 맡았습니다. 이후 23년 동안 위기, 성장, 구조조정, 디지털 전환이라는 성격이 다른 네 시기를 지나왔고, 아래 회색 띠가 저희가 사례를 나눠 볼 네 시기입니다.</a:t>
+              <a:t>정 부회장은 현대차그룹 계열사에서 기획과 해외 사업을 하다가, 카드대란이 한창이던 2003년에 적자 상태인 현대카드를 맡았습니다. 첫해에만 6천억 원대 적자가 났는데, 현대카드M을 내놓으면서 반전의 계기를 만들었습니다. 그 뒤로 프리미엄 카드와 문화 마케팅, 디지털 선언, 희망퇴직, 애플페이, AI 수출까지 이어집니다. 아래 회색 띠처럼 저희는 이 23년을 네 시기로 나눠서 분석할 계획입니다.</a:t>
             </a:r>
             <a:endParaRPr lang="en-US" dirty="0"/>
           </a:p>
@@ -1807,7 +1807,7 @@
           <a:p>
             <a:r>
               <a:rPr lang="en-US" dirty="0"/>
-              <a:t>선정 이유는 세 가지입니다. 첫째, 성격이 다른 네 국면을 한 사람이 이끌어 상황별 비교가 가능합니다. 둘째, 본인이 SNS와 인터뷰로 직접 설명한 자료가 많습니다. 셋째, 성과와 논란이 함께 있어 성공 사례로만이 아니라 균형 있게 평가할 수 있습니다.</a:t>
+              <a:t>정 부회장을 고른 이유는 세 가지입니다. 가장 큰 이유는 성격이 전혀 다른 네 시기를 한 사람이 이끌었다는 점입니다. 리더가 같으니까 상황만 바뀌었을 때 리더십이 어떻게 달라지는지 비교하기 좋습니다. 또 본인이 SNS나 인터뷰로 직접 설명한 자료가 많고, 성과만큼 논란도 있어서 칭찬만 하는 보고서가 되지 않을 거라고 봤습니다.</a:t>
             </a:r>
             <a:endParaRPr lang="en-US" dirty="0"/>
           </a:p>
@@ -1895,7 +1895,7 @@
           <a:p>
             <a:r>
               <a:rPr lang="en-US" dirty="0"/>
-              <a:t>정태영 부회장은 1960년생으로 서울대 불문과와 MIT 경영대학원을 나왔습니다. 정몽구 명예회장의 사위라는 점에서 전문경영인이면서 동시에 오너 일가라는 독특한 위치에 있고, 이 점은 6장 권력 이론과 연결해 볼 계획입니다.</a:t>
+              <a:t>정 부회장은 1960년생이고, 서울대 불문과를 나와 MIT에서 MBA를 했습니다. 여기서 눈여겨볼 건 정몽구 명예회장의 사위라는 점입니다. 월급 받는 전문경영인이면서 동시에 오너 일가이기도 해서, 이 사람의 영향력이 어디서 나오는지는 6장 권력 부분에서 따로 보려고 합니다.</a:t>
             </a:r>
             <a:endParaRPr lang="en-US" dirty="0"/>
           </a:p>
@@ -1983,7 +1983,7 @@
           <a:p>
             <a:r>
               <a:rPr lang="en-US" dirty="0"/>
-              <a:t>현대카드는 1984년 설립된 다이너스클럽코리아를 현대차그룹이 인수해 2001년 이름을 바꾼 비상장 카드사입니다. 2026년 6월 기준 회원은 약 1,311만 명입니다. 사업은 자체 카드, 제휴사 이름을 단 PLCC, 카드대출, 그리고 최근 데이터와 AI 사업으로 나뉩니다.</a:t>
+              <a:t>현대카드는 다이너스클럽코리아를 현대차그룹이 인수해서 2001년에 이름을 바꾼 회사입니다. 상장은 안 되어 있고, 올해 6월 기준 회원이 1,311만 명 정도 됩니다. 사업은 크게 네 가지인데, 자체 카드, 코스트코나 대한항공처럼 제휴사 이름을 단 PLCC, 카드대출, 그리고 최근에 키우고 있는 데이터와 AI 사업입니다.</a:t>
             </a:r>
             <a:endParaRPr lang="en-US" dirty="0"/>
           </a:p>
@@ -2071,7 +2071,7 @@
           <a:p>
             <a:r>
               <a:rPr lang="en-US" dirty="0"/>
-              <a:t>2025년 영업수익은 4조 78억 원, 순이익은 3,503억 원으로 전년보다 10.7% 늘었습니다. 신용카드 이용실적 점유율은 19.3%로 신한카드에 이어 업계 2위입니다. 올해 상반기 실적은 기간이 달라 차트와 따로 표시했습니다.</a:t>
+              <a:t>작년 영업수익은 4조 78억 원이고, 순이익은 3,503억 원으로 1년 전보다 10.7% 늘었습니다. 카드 이용실적 점유율은 19.3%로, 신한카드 바로 다음인 업계 2위입니다. 2003년에 적자 회사였다는 걸 생각하면 꽤 큰 변화입니다. 올해 상반기 숫자는 기간이 달라서 아래에 따로 적었습니다.</a:t>
             </a:r>
             <a:endParaRPr lang="en-US" dirty="0"/>
           </a:p>
@@ -2159,7 +2159,7 @@
           <a:p>
             <a:r>
               <a:rPr lang="en-US" dirty="0"/>
-              <a:t>최대주주는 현대자동차, 2대 주주는 현대커머셜입니다. 정 부회장은 현대카드 지분을 직접 갖고 있지 않지만, 부부가 대주주인 현대커머셜을 통해 간접적으로 영향력을 갖습니다. 지분이 아닌 직위와 관계에서 나오는 권력이라는 점을 6장 권력 이론으로 분석하겠습니다.</a:t>
+              <a:t>주주를 보면 현대자동차가 1대 주주, 현대커머셜이 2대 주주입니다. 재미있는 건 정 부회장 본인은 현대카드 주식이 한 주도 없다는 점입니다. 대신 부부가 대주주인 현대커머셜이 현대카드 지분의 34.62%를 갖고 있어서, 간접적으로 영향력을 가집니다. 지분보다는 직위와 관계에서 나오는 힘이라서, 이 부분도 권력 이론으로 연결해 볼 생각입니다.</a:t>
             </a:r>
             <a:endParaRPr lang="en-US" dirty="0"/>
           </a:p>
@@ -2908,7 +2908,7 @@
                   <a:schemeClr val="bg1"/>
                 </a:solidFill>
               </a:rPr>
-              <a:t>자신을 바꾼 리더인가,</a:t>
+              <a:t>스스로 바뀐 리더인가,</a:t>
             </a:r>
             <a:endParaRPr lang="en-US" sz="4400" dirty="0"/>
           </a:p>
@@ -2925,7 +2925,7 @@
                   <a:schemeClr val="bg1"/>
                 </a:solidFill>
               </a:rPr>
-              <a:t>상황을 바꾼 리더인가</a:t>
+              <a:t>판을 바꾼 리더인가</a:t>
             </a:r>
             <a:endParaRPr lang="en-US" sz="4400" dirty="0"/>
           </a:p>
@@ -3229,7 +3229,7 @@
                   <a:schemeClr val="tx1"/>
                 </a:solidFill>
               </a:rPr>
-              <a:t>공시로 수치를, 인터뷰로 리더의 생각을 확인</a:t>
+              <a:t>숫자는 공시로, 리더의 생각은 인터뷰로 확인</a:t>
             </a:r>
             <a:endParaRPr lang="en-US" sz="2800" dirty="0"/>
           </a:p>
@@ -3237,14 +3237,14 @@
       </p:sp>
       <p:sp>
         <p:nvSpPr>
-          <p:cNvPr id="4" name="t155"/>
+          <p:cNvPr id="4" name="t147"/>
           <p:cNvSpPr txBox="1"/>
           <p:nvPr/>
         </p:nvSpPr>
         <p:spPr>
           <a:xfrm>
             <a:off x="685800" y="1783080"/>
-            <a:ext cx="1645920" cy="987552"/>
+            <a:ext cx="1920240" cy="411480"/>
           </a:xfrm>
           <a:prstGeom prst="rect">
             <a:avLst/>
@@ -3260,27 +3260,161 @@
               <a:buNone/>
             </a:pPr>
             <a:r>
-              <a:rPr lang="en-US" sz="1600" b="1" dirty="0">
+              <a:rPr lang="en-US" sz="1300" b="1" dirty="0">
+                <a:solidFill>
+                  <a:schemeClr val="tx2"/>
+                </a:solidFill>
+              </a:rPr>
+              <a:t>자료</a:t>
+            </a:r>
+            <a:endParaRPr lang="en-US" sz="1300" dirty="0"/>
+          </a:p>
+        </p:txBody>
+      </p:sp>
+      <p:sp>
+        <p:nvSpPr>
+          <p:cNvPr id="5" name="t148"/>
+          <p:cNvSpPr txBox="1"/>
+          <p:nvPr/>
+        </p:nvSpPr>
+        <p:spPr>
+          <a:xfrm>
+            <a:off x="2788920" y="1783080"/>
+            <a:ext cx="4297680" cy="411480"/>
+          </a:xfrm>
+          <a:prstGeom prst="rect">
+            <a:avLst/>
+          </a:prstGeom>
+          <a:noFill/>
+          <a:ln/>
+        </p:spPr>
+        <p:txBody>
+          <a:bodyPr wrap="square" lIns="0" tIns="0" rIns="0" bIns="0" rtlCol="0" anchor="ctr"/>
+          <a:lstStyle/>
+          <a:p>
+            <a:pPr indent="0" marL="0">
+              <a:buNone/>
+            </a:pPr>
+            <a:r>
+              <a:rPr lang="en-US" sz="1300" b="1" dirty="0">
+                <a:solidFill>
+                  <a:schemeClr val="tx2"/>
+                </a:solidFill>
+              </a:rPr>
+              <a:t>어디서 찾나</a:t>
+            </a:r>
+            <a:endParaRPr lang="en-US" sz="1300" dirty="0"/>
+          </a:p>
+        </p:txBody>
+      </p:sp>
+      <p:sp>
+        <p:nvSpPr>
+          <p:cNvPr id="6" name="t149"/>
+          <p:cNvSpPr txBox="1"/>
+          <p:nvPr/>
+        </p:nvSpPr>
+        <p:spPr>
+          <a:xfrm>
+            <a:off x="7269480" y="1783080"/>
+            <a:ext cx="4922215" cy="411480"/>
+          </a:xfrm>
+          <a:prstGeom prst="rect">
+            <a:avLst/>
+          </a:prstGeom>
+          <a:noFill/>
+          <a:ln/>
+        </p:spPr>
+        <p:txBody>
+          <a:bodyPr wrap="square" lIns="0" tIns="0" rIns="0" bIns="0" rtlCol="0" anchor="ctr"/>
+          <a:lstStyle/>
+          <a:p>
+            <a:pPr indent="0" marL="0">
+              <a:buNone/>
+            </a:pPr>
+            <a:r>
+              <a:rPr lang="en-US" sz="1300" b="1" dirty="0">
+                <a:solidFill>
+                  <a:schemeClr val="tx2"/>
+                </a:solidFill>
+              </a:rPr>
+              <a:t>무엇을 확인하나</a:t>
+            </a:r>
+            <a:endParaRPr lang="en-US" sz="1300" dirty="0"/>
+          </a:p>
+        </p:txBody>
+      </p:sp>
+      <p:sp>
+        <p:nvSpPr>
+          <p:cNvPr id="7" name="l150"/>
+          <p:cNvSpPr/>
+          <p:nvPr/>
+        </p:nvSpPr>
+        <p:spPr>
+          <a:xfrm>
+            <a:off x="685800" y="2240280"/>
+            <a:ext cx="10820095" cy="0"/>
+          </a:xfrm>
+          <a:prstGeom prst="line">
+            <a:avLst/>
+          </a:prstGeom>
+          <a:noFill/>
+          <a:ln w="15875">
+            <a:solidFill>
+              <a:srgbClr val="141414"/>
+            </a:solidFill>
+            <a:prstDash val="solid"/>
+          </a:ln>
+        </p:spPr>
+      </p:sp>
+      <p:sp>
+        <p:nvSpPr>
+          <p:cNvPr id="8" name="t151"/>
+          <p:cNvSpPr txBox="1"/>
+          <p:nvPr/>
+        </p:nvSpPr>
+        <p:spPr>
+          <a:xfrm>
+            <a:off x="685800" y="2240280"/>
+            <a:ext cx="1920240" cy="960120"/>
+          </a:xfrm>
+          <a:prstGeom prst="rect">
+            <a:avLst/>
+          </a:prstGeom>
+          <a:noFill/>
+          <a:ln/>
+        </p:spPr>
+        <p:txBody>
+          <a:bodyPr wrap="square" lIns="0" tIns="0" rIns="0" bIns="0" rtlCol="0" anchor="ctr"/>
+          <a:lstStyle/>
+          <a:p>
+            <a:pPr indent="0" marL="0">
+              <a:lnSpc>
+                <a:spcPct val="115000"/>
+              </a:lnSpc>
+              <a:buNone/>
+            </a:pPr>
+            <a:r>
+              <a:rPr lang="en-US" sz="1700" b="1" dirty="0">
                 <a:solidFill>
                   <a:schemeClr val="tx1"/>
                 </a:solidFill>
               </a:rPr>
               <a:t>공시</a:t>
             </a:r>
-            <a:endParaRPr lang="en-US" sz="1600" dirty="0"/>
-          </a:p>
-        </p:txBody>
-      </p:sp>
-      <p:sp>
-        <p:nvSpPr>
-          <p:cNvPr id="5" name="t156"/>
-          <p:cNvSpPr txBox="1"/>
-          <p:nvPr/>
-        </p:nvSpPr>
-        <p:spPr>
-          <a:xfrm>
-            <a:off x="2423160" y="1783080"/>
-            <a:ext cx="4663440" cy="987552"/>
+            <a:endParaRPr lang="en-US" sz="1700" dirty="0"/>
+          </a:p>
+        </p:txBody>
+      </p:sp>
+      <p:sp>
+        <p:nvSpPr>
+          <p:cNvPr id="9" name="t152"/>
+          <p:cNvSpPr txBox="1"/>
+          <p:nvPr/>
+        </p:nvSpPr>
+        <p:spPr>
+          <a:xfrm>
+            <a:off x="2788920" y="2240280"/>
+            <a:ext cx="4297680" cy="960120"/>
           </a:xfrm>
           <a:prstGeom prst="rect">
             <a:avLst/>
@@ -3293,9 +3427,9 @@
           <a:lstStyle/>
           <a:p>
             <a:pPr indent="0" marL="0">
-              <a:spcAft>
-                <a:spcPts val="300"/>
-              </a:spcAft>
+              <a:lnSpc>
+                <a:spcPct val="115000"/>
+              </a:lnSpc>
               <a:buNone/>
             </a:pPr>
             <a:r>
@@ -3304,39 +3438,95 @@
                   <a:schemeClr val="tx1"/>
                 </a:solidFill>
               </a:rPr>
-              <a:t>금융감독원 DART 사업 · 반기보고서</a:t>
+              <a:t>금융감독원 DART</a:t>
             </a:r>
             <a:endParaRPr lang="en-US" sz="1500" dirty="0"/>
           </a:p>
           <a:p>
             <a:pPr indent="0" marL="0">
-              <a:spcAft>
-                <a:spcPts val="300"/>
-              </a:spcAft>
-              <a:buNone/>
-            </a:pPr>
-            <a:r>
-              <a:rPr lang="en-US" sz="1300" dirty="0">
+              <a:lnSpc>
+                <a:spcPct val="115000"/>
+              </a:lnSpc>
+              <a:buNone/>
+            </a:pPr>
+            <a:r>
+              <a:rPr lang="en-US" sz="1500" dirty="0">
+                <a:solidFill>
+                  <a:schemeClr val="tx1"/>
+                </a:solidFill>
+              </a:rPr>
+              <a:t>사업보고서 · 반기보고서</a:t>
+            </a:r>
+            <a:endParaRPr lang="en-US" sz="1500" dirty="0"/>
+          </a:p>
+        </p:txBody>
+      </p:sp>
+      <p:sp>
+        <p:nvSpPr>
+          <p:cNvPr id="10" name="t153"/>
+          <p:cNvSpPr txBox="1"/>
+          <p:nvPr/>
+        </p:nvSpPr>
+        <p:spPr>
+          <a:xfrm>
+            <a:off x="7269480" y="2240280"/>
+            <a:ext cx="4922215" cy="960120"/>
+          </a:xfrm>
+          <a:prstGeom prst="rect">
+            <a:avLst/>
+          </a:prstGeom>
+          <a:noFill/>
+          <a:ln/>
+        </p:spPr>
+        <p:txBody>
+          <a:bodyPr wrap="square" lIns="0" tIns="0" rIns="0" bIns="0" rtlCol="0" anchor="ctr"/>
+          <a:lstStyle/>
+          <a:p>
+            <a:pPr indent="0" marL="0">
+              <a:lnSpc>
+                <a:spcPct val="115000"/>
+              </a:lnSpc>
+              <a:buNone/>
+            </a:pPr>
+            <a:r>
+              <a:rPr lang="en-US" sz="1500" dirty="0">
                 <a:solidFill>
                   <a:schemeClr val="tx2"/>
                 </a:solidFill>
               </a:rPr>
-              <a:t>재무, 주주, 임원 정보</a:t>
+              <a:t>매출과 이익, 주주 구성,</a:t>
             </a:r>
             <a:endParaRPr lang="en-US" sz="1500" dirty="0"/>
           </a:p>
-        </p:txBody>
-      </p:sp>
-      <p:sp>
-        <p:nvSpPr>
-          <p:cNvPr id="6" name="l157"/>
+          <a:p>
+            <a:pPr indent="0" marL="0">
+              <a:lnSpc>
+                <a:spcPct val="115000"/>
+              </a:lnSpc>
+              <a:buNone/>
+            </a:pPr>
+            <a:r>
+              <a:rPr lang="en-US" sz="1500" dirty="0">
+                <a:solidFill>
+                  <a:schemeClr val="tx2"/>
+                </a:solidFill>
+              </a:rPr>
+              <a:t>임원 현황</a:t>
+            </a:r>
+            <a:endParaRPr lang="en-US" sz="1500" dirty="0"/>
+          </a:p>
+        </p:txBody>
+      </p:sp>
+      <p:sp>
+        <p:nvSpPr>
+          <p:cNvPr id="11" name="l154"/>
           <p:cNvSpPr/>
           <p:nvPr/>
         </p:nvSpPr>
         <p:spPr>
           <a:xfrm>
-            <a:off x="685800" y="2770632"/>
-            <a:ext cx="6400800" cy="0"/>
+            <a:off x="685800" y="3200400"/>
+            <a:ext cx="10820095" cy="0"/>
           </a:xfrm>
           <a:prstGeom prst="line">
             <a:avLst/>
@@ -3352,14 +3542,14 @@
       </p:sp>
       <p:sp>
         <p:nvSpPr>
-          <p:cNvPr id="7" name="t158"/>
-          <p:cNvSpPr txBox="1"/>
-          <p:nvPr/>
-        </p:nvSpPr>
-        <p:spPr>
-          <a:xfrm>
-            <a:off x="685800" y="2770632"/>
-            <a:ext cx="1645920" cy="987552"/>
+          <p:cNvPr id="12" name="t155"/>
+          <p:cNvSpPr txBox="1"/>
+          <p:nvPr/>
+        </p:nvSpPr>
+        <p:spPr>
+          <a:xfrm>
+            <a:off x="685800" y="3200400"/>
+            <a:ext cx="1920240" cy="960120"/>
           </a:xfrm>
           <a:prstGeom prst="rect">
             <a:avLst/>
@@ -3372,30 +3562,33 @@
           <a:lstStyle/>
           <a:p>
             <a:pPr indent="0" marL="0">
-              <a:buNone/>
-            </a:pPr>
-            <a:r>
-              <a:rPr lang="en-US" sz="1600" b="1" dirty="0">
+              <a:lnSpc>
+                <a:spcPct val="115000"/>
+              </a:lnSpc>
+              <a:buNone/>
+            </a:pPr>
+            <a:r>
+              <a:rPr lang="en-US" sz="1700" b="1" dirty="0">
                 <a:solidFill>
                   <a:schemeClr val="tx1"/>
                 </a:solidFill>
               </a:rPr>
               <a:t>회사 자료</a:t>
             </a:r>
-            <a:endParaRPr lang="en-US" sz="1600" dirty="0"/>
-          </a:p>
-        </p:txBody>
-      </p:sp>
-      <p:sp>
-        <p:nvSpPr>
-          <p:cNvPr id="8" name="t159"/>
-          <p:cNvSpPr txBox="1"/>
-          <p:nvPr/>
-        </p:nvSpPr>
-        <p:spPr>
-          <a:xfrm>
-            <a:off x="2423160" y="2770632"/>
-            <a:ext cx="4663440" cy="987552"/>
+            <a:endParaRPr lang="en-US" sz="1700" dirty="0"/>
+          </a:p>
+        </p:txBody>
+      </p:sp>
+      <p:sp>
+        <p:nvSpPr>
+          <p:cNvPr id="13" name="t156"/>
+          <p:cNvSpPr txBox="1"/>
+          <p:nvPr/>
+        </p:nvSpPr>
+        <p:spPr>
+          <a:xfrm>
+            <a:off x="2788920" y="3200400"/>
+            <a:ext cx="4297680" cy="960120"/>
           </a:xfrm>
           <a:prstGeom prst="rect">
             <a:avLst/>
@@ -3408,9 +3601,9 @@
           <a:lstStyle/>
           <a:p>
             <a:pPr indent="0" marL="0">
-              <a:spcAft>
-                <a:spcPts val="300"/>
-              </a:spcAft>
+              <a:lnSpc>
+                <a:spcPct val="115000"/>
+              </a:lnSpc>
               <a:buNone/>
             </a:pPr>
             <a:r>
@@ -3419,24 +3612,63 @@
                   <a:schemeClr val="tx1"/>
                 </a:solidFill>
               </a:rPr>
-              <a:t>현대카드 IR 자료, 뉴스룸</a:t>
+              <a:t>현대카드 IR 자료,</a:t>
             </a:r>
             <a:endParaRPr lang="en-US" sz="1500" dirty="0"/>
           </a:p>
           <a:p>
             <a:pPr indent="0" marL="0">
-              <a:spcAft>
-                <a:spcPts val="300"/>
-              </a:spcAft>
-              <a:buNone/>
-            </a:pPr>
-            <a:r>
-              <a:rPr lang="en-US" sz="1300" dirty="0">
+              <a:lnSpc>
+                <a:spcPct val="115000"/>
+              </a:lnSpc>
+              <a:buNone/>
+            </a:pPr>
+            <a:r>
+              <a:rPr lang="en-US" sz="1500" dirty="0">
+                <a:solidFill>
+                  <a:schemeClr val="tx1"/>
+                </a:solidFill>
+              </a:rPr>
+              <a:t>현대카드 · 현대커머셜 뉴스룸</a:t>
+            </a:r>
+            <a:endParaRPr lang="en-US" sz="1500" dirty="0"/>
+          </a:p>
+        </p:txBody>
+      </p:sp>
+      <p:sp>
+        <p:nvSpPr>
+          <p:cNvPr id="14" name="t157"/>
+          <p:cNvSpPr txBox="1"/>
+          <p:nvPr/>
+        </p:nvSpPr>
+        <p:spPr>
+          <a:xfrm>
+            <a:off x="7269480" y="3200400"/>
+            <a:ext cx="4922215" cy="960120"/>
+          </a:xfrm>
+          <a:prstGeom prst="rect">
+            <a:avLst/>
+          </a:prstGeom>
+          <a:noFill/>
+          <a:ln/>
+        </p:spPr>
+        <p:txBody>
+          <a:bodyPr wrap="square" lIns="0" tIns="0" rIns="0" bIns="0" rtlCol="0" anchor="ctr"/>
+          <a:lstStyle/>
+          <a:p>
+            <a:pPr indent="0" marL="0">
+              <a:lnSpc>
+                <a:spcPct val="115000"/>
+              </a:lnSpc>
+              <a:buNone/>
+            </a:pPr>
+            <a:r>
+              <a:rPr lang="en-US" sz="1500" dirty="0">
                 <a:solidFill>
                   <a:schemeClr val="tx2"/>
                 </a:solidFill>
               </a:rPr>
-              <a:t>실적 발표, 사업 전략</a:t>
+              <a:t>사업 전략, 시기별 주요 발표</a:t>
             </a:r>
             <a:endParaRPr lang="en-US" sz="1500" dirty="0"/>
           </a:p>
@@ -3444,14 +3676,14 @@
       </p:sp>
       <p:sp>
         <p:nvSpPr>
-          <p:cNvPr id="9" name="l160"/>
+          <p:cNvPr id="15" name="l158"/>
           <p:cNvSpPr/>
           <p:nvPr/>
         </p:nvSpPr>
         <p:spPr>
           <a:xfrm>
-            <a:off x="685800" y="3758184"/>
-            <a:ext cx="6400800" cy="0"/>
+            <a:off x="685800" y="4160520"/>
+            <a:ext cx="10820095" cy="0"/>
           </a:xfrm>
           <a:prstGeom prst="line">
             <a:avLst/>
@@ -3467,14 +3699,14 @@
       </p:sp>
       <p:sp>
         <p:nvSpPr>
-          <p:cNvPr id="10" name="t161"/>
-          <p:cNvSpPr txBox="1"/>
-          <p:nvPr/>
-        </p:nvSpPr>
-        <p:spPr>
-          <a:xfrm>
-            <a:off x="685800" y="3758184"/>
-            <a:ext cx="1645920" cy="987552"/>
+          <p:cNvPr id="16" name="t159"/>
+          <p:cNvSpPr txBox="1"/>
+          <p:nvPr/>
+        </p:nvSpPr>
+        <p:spPr>
+          <a:xfrm>
+            <a:off x="685800" y="4160520"/>
+            <a:ext cx="1920240" cy="960120"/>
           </a:xfrm>
           <a:prstGeom prst="rect">
             <a:avLst/>
@@ -3487,30 +3719,33 @@
           <a:lstStyle/>
           <a:p>
             <a:pPr indent="0" marL="0">
-              <a:buNone/>
-            </a:pPr>
-            <a:r>
-              <a:rPr lang="en-US" sz="1600" b="1" dirty="0">
+              <a:lnSpc>
+                <a:spcPct val="115000"/>
+              </a:lnSpc>
+              <a:buNone/>
+            </a:pPr>
+            <a:r>
+              <a:rPr lang="en-US" sz="1700" b="1" dirty="0">
                 <a:solidFill>
                   <a:schemeClr val="tx1"/>
                 </a:solidFill>
               </a:rPr>
               <a:t>언론 · 인터뷰</a:t>
             </a:r>
-            <a:endParaRPr lang="en-US" sz="1600" dirty="0"/>
-          </a:p>
-        </p:txBody>
-      </p:sp>
-      <p:sp>
-        <p:nvSpPr>
-          <p:cNvPr id="11" name="t162"/>
-          <p:cNvSpPr txBox="1"/>
-          <p:nvPr/>
-        </p:nvSpPr>
-        <p:spPr>
-          <a:xfrm>
-            <a:off x="2423160" y="3758184"/>
-            <a:ext cx="4663440" cy="987552"/>
+            <a:endParaRPr lang="en-US" sz="1700" dirty="0"/>
+          </a:p>
+        </p:txBody>
+      </p:sp>
+      <p:sp>
+        <p:nvSpPr>
+          <p:cNvPr id="17" name="t160"/>
+          <p:cNvSpPr txBox="1"/>
+          <p:nvPr/>
+        </p:nvSpPr>
+        <p:spPr>
+          <a:xfrm>
+            <a:off x="2788920" y="4160520"/>
+            <a:ext cx="4297680" cy="960120"/>
           </a:xfrm>
           <a:prstGeom prst="rect">
             <a:avLst/>
@@ -3523,9 +3758,9 @@
           <a:lstStyle/>
           <a:p>
             <a:pPr indent="0" marL="0">
-              <a:spcAft>
-                <a:spcPts val="300"/>
-              </a:spcAft>
+              <a:lnSpc>
+                <a:spcPct val="115000"/>
+              </a:lnSpc>
               <a:buNone/>
             </a:pPr>
             <a:r>
@@ -3534,39 +3769,95 @@
                   <a:schemeClr val="tx1"/>
                 </a:solidFill>
               </a:rPr>
-              <a:t>경제지 기사, 맥킨지 인터뷰(2025), 정 부회장 SNS</a:t>
+              <a:t>경제지 기사, 맥킨지 인터뷰(2025),</a:t>
             </a:r>
             <a:endParaRPr lang="en-US" sz="1500" dirty="0"/>
           </a:p>
           <a:p>
             <a:pPr indent="0" marL="0">
-              <a:spcAft>
-                <a:spcPts val="300"/>
-              </a:spcAft>
-              <a:buNone/>
-            </a:pPr>
-            <a:r>
-              <a:rPr lang="en-US" sz="1300" dirty="0">
+              <a:lnSpc>
+                <a:spcPct val="115000"/>
+              </a:lnSpc>
+              <a:buNone/>
+            </a:pPr>
+            <a:r>
+              <a:rPr lang="en-US" sz="1500" dirty="0">
+                <a:solidFill>
+                  <a:schemeClr val="tx1"/>
+                </a:solidFill>
+              </a:rPr>
+              <a:t>정 부회장 SNS</a:t>
+            </a:r>
+            <a:endParaRPr lang="en-US" sz="1500" dirty="0"/>
+          </a:p>
+        </p:txBody>
+      </p:sp>
+      <p:sp>
+        <p:nvSpPr>
+          <p:cNvPr id="18" name="t161"/>
+          <p:cNvSpPr txBox="1"/>
+          <p:nvPr/>
+        </p:nvSpPr>
+        <p:spPr>
+          <a:xfrm>
+            <a:off x="7269480" y="4160520"/>
+            <a:ext cx="4922215" cy="960120"/>
+          </a:xfrm>
+          <a:prstGeom prst="rect">
+            <a:avLst/>
+          </a:prstGeom>
+          <a:noFill/>
+          <a:ln/>
+        </p:spPr>
+        <p:txBody>
+          <a:bodyPr wrap="square" lIns="0" tIns="0" rIns="0" bIns="0" rtlCol="0" anchor="ctr"/>
+          <a:lstStyle/>
+          <a:p>
+            <a:pPr indent="0" marL="0">
+              <a:lnSpc>
+                <a:spcPct val="115000"/>
+              </a:lnSpc>
+              <a:buNone/>
+            </a:pPr>
+            <a:r>
+              <a:rPr lang="en-US" sz="1500" dirty="0">
                 <a:solidFill>
                   <a:schemeClr val="tx2"/>
                 </a:solidFill>
               </a:rPr>
-              <a:t>리더 본인의 설명</a:t>
+              <a:t>리더 본인이 설명한</a:t>
             </a:r>
             <a:endParaRPr lang="en-US" sz="1500" dirty="0"/>
           </a:p>
-        </p:txBody>
-      </p:sp>
-      <p:sp>
-        <p:nvSpPr>
-          <p:cNvPr id="12" name="l163"/>
+          <a:p>
+            <a:pPr indent="0" marL="0">
+              <a:lnSpc>
+                <a:spcPct val="115000"/>
+              </a:lnSpc>
+              <a:buNone/>
+            </a:pPr>
+            <a:r>
+              <a:rPr lang="en-US" sz="1500" dirty="0">
+                <a:solidFill>
+                  <a:schemeClr val="tx2"/>
+                </a:solidFill>
+              </a:rPr>
+              <a:t>판단 이유와 경영 방침</a:t>
+            </a:r>
+            <a:endParaRPr lang="en-US" sz="1500" dirty="0"/>
+          </a:p>
+        </p:txBody>
+      </p:sp>
+      <p:sp>
+        <p:nvSpPr>
+          <p:cNvPr id="19" name="l162"/>
           <p:cNvSpPr/>
           <p:nvPr/>
         </p:nvSpPr>
         <p:spPr>
           <a:xfrm>
-            <a:off x="685800" y="4745736"/>
-            <a:ext cx="6400800" cy="0"/>
+            <a:off x="685800" y="5120640"/>
+            <a:ext cx="10820095" cy="0"/>
           </a:xfrm>
           <a:prstGeom prst="line">
             <a:avLst/>
@@ -3582,14 +3873,14 @@
       </p:sp>
       <p:sp>
         <p:nvSpPr>
-          <p:cNvPr id="13" name="t164"/>
-          <p:cNvSpPr txBox="1"/>
-          <p:nvPr/>
-        </p:nvSpPr>
-        <p:spPr>
-          <a:xfrm>
-            <a:off x="685800" y="4745736"/>
-            <a:ext cx="1645920" cy="987552"/>
+          <p:cNvPr id="20" name="t163"/>
+          <p:cNvSpPr txBox="1"/>
+          <p:nvPr/>
+        </p:nvSpPr>
+        <p:spPr>
+          <a:xfrm>
+            <a:off x="685800" y="5120640"/>
+            <a:ext cx="1920240" cy="960120"/>
           </a:xfrm>
           <a:prstGeom prst="rect">
             <a:avLst/>
@@ -3602,30 +3893,33 @@
           <a:lstStyle/>
           <a:p>
             <a:pPr indent="0" marL="0">
-              <a:buNone/>
-            </a:pPr>
-            <a:r>
-              <a:rPr lang="en-US" sz="1600" b="1" dirty="0">
+              <a:lnSpc>
+                <a:spcPct val="115000"/>
+              </a:lnSpc>
+              <a:buNone/>
+            </a:pPr>
+            <a:r>
+              <a:rPr lang="en-US" sz="1700" b="1" dirty="0">
                 <a:solidFill>
                   <a:schemeClr val="tx1"/>
                 </a:solidFill>
               </a:rPr>
               <a:t>논문 · 서적</a:t>
             </a:r>
-            <a:endParaRPr lang="en-US" sz="1600" dirty="0"/>
-          </a:p>
-        </p:txBody>
-      </p:sp>
-      <p:sp>
-        <p:nvSpPr>
-          <p:cNvPr id="14" name="t165"/>
-          <p:cNvSpPr txBox="1"/>
-          <p:nvPr/>
-        </p:nvSpPr>
-        <p:spPr>
-          <a:xfrm>
-            <a:off x="2423160" y="4745736"/>
-            <a:ext cx="4663440" cy="987552"/>
+            <a:endParaRPr lang="en-US" sz="1700" dirty="0"/>
+          </a:p>
+        </p:txBody>
+      </p:sp>
+      <p:sp>
+        <p:nvSpPr>
+          <p:cNvPr id="21" name="t164"/>
+          <p:cNvSpPr txBox="1"/>
+          <p:nvPr/>
+        </p:nvSpPr>
+        <p:spPr>
+          <a:xfrm>
+            <a:off x="2788920" y="5120640"/>
+            <a:ext cx="4297680" cy="960120"/>
           </a:xfrm>
           <a:prstGeom prst="rect">
             <a:avLst/>
@@ -3638,9 +3932,9 @@
           <a:lstStyle/>
           <a:p>
             <a:pPr indent="0" marL="0">
-              <a:spcAft>
-                <a:spcPts val="300"/>
-              </a:spcAft>
+              <a:lnSpc>
+                <a:spcPct val="115000"/>
+              </a:lnSpc>
               <a:buNone/>
             </a:pPr>
             <a:r>
@@ -3649,304 +3943,111 @@
                   <a:schemeClr val="tx1"/>
                 </a:solidFill>
               </a:rPr>
-              <a:t>RISS · DBpia 현대카드 사례 연구</a:t>
+              <a:t>RISS · DBpia의</a:t>
             </a:r>
             <a:endParaRPr lang="en-US" sz="1500" dirty="0"/>
           </a:p>
           <a:p>
             <a:pPr indent="0" marL="0">
-              <a:spcAft>
-                <a:spcPts val="300"/>
-              </a:spcAft>
-              <a:buNone/>
-            </a:pPr>
-            <a:r>
-              <a:rPr lang="en-US" sz="1300" dirty="0">
+              <a:lnSpc>
+                <a:spcPct val="115000"/>
+              </a:lnSpc>
+              <a:buNone/>
+            </a:pPr>
+            <a:r>
+              <a:rPr lang="en-US" sz="1500" dirty="0">
+                <a:solidFill>
+                  <a:schemeClr val="tx1"/>
+                </a:solidFill>
+              </a:rPr>
+              <a:t>현대카드 사례 연구</a:t>
+            </a:r>
+            <a:endParaRPr lang="en-US" sz="1500" dirty="0"/>
+          </a:p>
+        </p:txBody>
+      </p:sp>
+      <p:sp>
+        <p:nvSpPr>
+          <p:cNvPr id="22" name="t165"/>
+          <p:cNvSpPr txBox="1"/>
+          <p:nvPr/>
+        </p:nvSpPr>
+        <p:spPr>
+          <a:xfrm>
+            <a:off x="7269480" y="5120640"/>
+            <a:ext cx="4922215" cy="960120"/>
+          </a:xfrm>
+          <a:prstGeom prst="rect">
+            <a:avLst/>
+          </a:prstGeom>
+          <a:noFill/>
+          <a:ln/>
+        </p:spPr>
+        <p:txBody>
+          <a:bodyPr wrap="square" lIns="0" tIns="0" rIns="0" bIns="0" rtlCol="0" anchor="ctr"/>
+          <a:lstStyle/>
+          <a:p>
+            <a:pPr indent="0" marL="0">
+              <a:lnSpc>
+                <a:spcPct val="115000"/>
+              </a:lnSpc>
+              <a:buNone/>
+            </a:pPr>
+            <a:r>
+              <a:rPr lang="en-US" sz="1500" dirty="0">
                 <a:solidFill>
                   <a:schemeClr val="tx2"/>
                 </a:solidFill>
               </a:rPr>
-              <a:t>선행 분석과 이론 적용 사례</a:t>
+              <a:t>앞선 연구가 쓴 분석 틀,</a:t>
             </a:r>
             <a:endParaRPr lang="en-US" sz="1500" dirty="0"/>
           </a:p>
-        </p:txBody>
-      </p:sp>
-      <p:sp>
-        <p:nvSpPr>
-          <p:cNvPr id="15" name="r166"/>
+          <a:p>
+            <a:pPr indent="0" marL="0">
+              <a:lnSpc>
+                <a:spcPct val="115000"/>
+              </a:lnSpc>
+              <a:buNone/>
+            </a:pPr>
+            <a:r>
+              <a:rPr lang="en-US" sz="1500" dirty="0">
+                <a:solidFill>
+                  <a:schemeClr val="tx2"/>
+                </a:solidFill>
+              </a:rPr>
+              <a:t>이론 적용 방식</a:t>
+            </a:r>
+            <a:endParaRPr lang="en-US" sz="1500" dirty="0"/>
+          </a:p>
+        </p:txBody>
+      </p:sp>
+      <p:sp>
+        <p:nvSpPr>
+          <p:cNvPr id="23" name="l166"/>
           <p:cNvSpPr/>
           <p:nvPr/>
         </p:nvSpPr>
         <p:spPr>
           <a:xfrm>
-            <a:off x="7635240" y="1783080"/>
-            <a:ext cx="3870655" cy="3950208"/>
-          </a:xfrm>
-          <a:prstGeom prst="rect">
-            <a:avLst/>
-          </a:prstGeom>
-          <a:solidFill>
-            <a:schemeClr val="bg2"/>
-          </a:solidFill>
-          <a:ln/>
-        </p:spPr>
-      </p:sp>
-      <p:sp>
-        <p:nvSpPr>
-          <p:cNvPr id="16" name="t167"/>
-          <p:cNvSpPr txBox="1"/>
-          <p:nvPr/>
-        </p:nvSpPr>
-        <p:spPr>
-          <a:xfrm>
-            <a:off x="8001000" y="2103120"/>
-            <a:ext cx="3139135" cy="365760"/>
-          </a:xfrm>
-          <a:prstGeom prst="rect">
-            <a:avLst/>
-          </a:prstGeom>
-          <a:noFill/>
-          <a:ln/>
-        </p:spPr>
-        <p:txBody>
-          <a:bodyPr wrap="square" lIns="0" tIns="0" rIns="0" bIns="0" rtlCol="0" anchor="ctr"/>
-          <a:lstStyle/>
-          <a:p>
-            <a:pPr indent="0" marL="0">
-              <a:buNone/>
-            </a:pPr>
-            <a:r>
-              <a:rPr lang="en-US" sz="1800" b="1" dirty="0">
-                <a:solidFill>
-                  <a:schemeClr val="tx1"/>
-                </a:solidFill>
-              </a:rPr>
-              <a:t>AI 활용 원칙</a:t>
-            </a:r>
-            <a:endParaRPr lang="en-US" sz="1800" dirty="0"/>
-          </a:p>
-        </p:txBody>
-      </p:sp>
-      <p:sp>
-        <p:nvSpPr>
-          <p:cNvPr id="17" name="t168"/>
-          <p:cNvSpPr txBox="1"/>
-          <p:nvPr/>
-        </p:nvSpPr>
-        <p:spPr>
-          <a:xfrm>
-            <a:off x="8001000" y="2743200"/>
-            <a:ext cx="365760" cy="365760"/>
-          </a:xfrm>
-          <a:prstGeom prst="rect">
-            <a:avLst/>
-          </a:prstGeom>
-          <a:noFill/>
-          <a:ln/>
-        </p:spPr>
-        <p:txBody>
-          <a:bodyPr wrap="square" lIns="0" tIns="0" rIns="0" bIns="0" rtlCol="0" anchor="ctr"/>
-          <a:lstStyle/>
-          <a:p>
-            <a:pPr indent="0" marL="0">
-              <a:buNone/>
-            </a:pPr>
-            <a:r>
-              <a:rPr lang="en-US" sz="1800" b="1" dirty="0">
-                <a:solidFill>
-                  <a:schemeClr val="tx2"/>
-                </a:solidFill>
-              </a:rPr>
-              <a:t>1</a:t>
-            </a:r>
-            <a:endParaRPr lang="en-US" sz="1800" dirty="0"/>
-          </a:p>
-        </p:txBody>
-      </p:sp>
-      <p:sp>
-        <p:nvSpPr>
-          <p:cNvPr id="18" name="t169"/>
-          <p:cNvSpPr txBox="1"/>
-          <p:nvPr/>
-        </p:nvSpPr>
-        <p:spPr>
-          <a:xfrm>
-            <a:off x="8412480" y="2743200"/>
-            <a:ext cx="2727655" cy="640080"/>
-          </a:xfrm>
-          <a:prstGeom prst="rect">
-            <a:avLst/>
-          </a:prstGeom>
-          <a:noFill/>
-          <a:ln/>
-        </p:spPr>
-        <p:txBody>
-          <a:bodyPr wrap="square" lIns="0" tIns="0" rIns="0" bIns="0" rtlCol="0" anchor="t"/>
-          <a:lstStyle/>
-          <a:p>
-            <a:pPr indent="0" marL="0">
-              <a:buNone/>
-            </a:pPr>
-            <a:r>
-              <a:rPr lang="en-US" sz="1600" dirty="0">
-                <a:solidFill>
-                  <a:schemeClr val="tx1"/>
-                </a:solidFill>
-              </a:rPr>
-              <a:t>자료 요약 · 이론 연결 초안</a:t>
-            </a:r>
-            <a:endParaRPr lang="en-US" sz="1600" dirty="0"/>
-          </a:p>
-        </p:txBody>
-      </p:sp>
-      <p:sp>
-        <p:nvSpPr>
-          <p:cNvPr id="19" name="t170"/>
-          <p:cNvSpPr txBox="1"/>
-          <p:nvPr/>
-        </p:nvSpPr>
-        <p:spPr>
-          <a:xfrm>
-            <a:off x="8001000" y="3611880"/>
-            <a:ext cx="365760" cy="365760"/>
-          </a:xfrm>
-          <a:prstGeom prst="rect">
-            <a:avLst/>
-          </a:prstGeom>
-          <a:noFill/>
-          <a:ln/>
-        </p:spPr>
-        <p:txBody>
-          <a:bodyPr wrap="square" lIns="0" tIns="0" rIns="0" bIns="0" rtlCol="0" anchor="ctr"/>
-          <a:lstStyle/>
-          <a:p>
-            <a:pPr indent="0" marL="0">
-              <a:buNone/>
-            </a:pPr>
-            <a:r>
-              <a:rPr lang="en-US" sz="1800" b="1" dirty="0">
-                <a:solidFill>
-                  <a:schemeClr val="tx2"/>
-                </a:solidFill>
-              </a:rPr>
-              <a:t>2</a:t>
-            </a:r>
-            <a:endParaRPr lang="en-US" sz="1800" dirty="0"/>
-          </a:p>
-        </p:txBody>
-      </p:sp>
-      <p:sp>
-        <p:nvSpPr>
-          <p:cNvPr id="20" name="t171"/>
-          <p:cNvSpPr txBox="1"/>
-          <p:nvPr/>
-        </p:nvSpPr>
-        <p:spPr>
-          <a:xfrm>
-            <a:off x="8412480" y="3611880"/>
-            <a:ext cx="2727655" cy="640080"/>
-          </a:xfrm>
-          <a:prstGeom prst="rect">
-            <a:avLst/>
-          </a:prstGeom>
-          <a:noFill/>
-          <a:ln/>
-        </p:spPr>
-        <p:txBody>
-          <a:bodyPr wrap="square" lIns="0" tIns="0" rIns="0" bIns="0" rtlCol="0" anchor="t"/>
-          <a:lstStyle/>
-          <a:p>
-            <a:pPr indent="0" marL="0">
-              <a:buNone/>
-            </a:pPr>
-            <a:r>
-              <a:rPr lang="en-US" sz="1600" dirty="0">
-                <a:solidFill>
-                  <a:schemeClr val="tx1"/>
-                </a:solidFill>
-              </a:rPr>
-              <a:t>예상 질문 정리</a:t>
-            </a:r>
-            <a:endParaRPr lang="en-US" sz="1600" dirty="0"/>
-          </a:p>
-        </p:txBody>
-      </p:sp>
-      <p:sp>
-        <p:nvSpPr>
-          <p:cNvPr id="21" name="t172"/>
-          <p:cNvSpPr txBox="1"/>
-          <p:nvPr/>
-        </p:nvSpPr>
-        <p:spPr>
-          <a:xfrm>
-            <a:off x="8001000" y="4480560"/>
-            <a:ext cx="365760" cy="365760"/>
-          </a:xfrm>
-          <a:prstGeom prst="rect">
-            <a:avLst/>
-          </a:prstGeom>
-          <a:noFill/>
-          <a:ln/>
-        </p:spPr>
-        <p:txBody>
-          <a:bodyPr wrap="square" lIns="0" tIns="0" rIns="0" bIns="0" rtlCol="0" anchor="ctr"/>
-          <a:lstStyle/>
-          <a:p>
-            <a:pPr indent="0" marL="0">
-              <a:buNone/>
-            </a:pPr>
-            <a:r>
-              <a:rPr lang="en-US" sz="1800" b="1" dirty="0">
-                <a:solidFill>
-                  <a:schemeClr val="accent1"/>
-                </a:solidFill>
-              </a:rPr>
-              <a:t>3</a:t>
-            </a:r>
-            <a:endParaRPr lang="en-US" sz="1800" dirty="0"/>
-          </a:p>
-        </p:txBody>
-      </p:sp>
-      <p:sp>
-        <p:nvSpPr>
-          <p:cNvPr id="22" name="t173"/>
-          <p:cNvSpPr txBox="1"/>
-          <p:nvPr/>
-        </p:nvSpPr>
-        <p:spPr>
-          <a:xfrm>
-            <a:off x="8412480" y="4480560"/>
-            <a:ext cx="2727655" cy="640080"/>
-          </a:xfrm>
-          <a:prstGeom prst="rect">
-            <a:avLst/>
-          </a:prstGeom>
-          <a:noFill/>
-          <a:ln/>
-        </p:spPr>
-        <p:txBody>
-          <a:bodyPr wrap="square" lIns="0" tIns="0" rIns="0" bIns="0" rtlCol="0" anchor="t"/>
-          <a:lstStyle/>
-          <a:p>
-            <a:pPr indent="0" marL="0">
-              <a:buNone/>
-            </a:pPr>
-            <a:r>
-              <a:rPr lang="en-US" sz="1600" b="1" dirty="0">
-                <a:solidFill>
-                  <a:schemeClr val="accent1"/>
-                </a:solidFill>
-              </a:rPr>
-              <a:t>수치 · 인용은 원문 재확인</a:t>
-            </a:r>
-            <a:endParaRPr lang="en-US" sz="1600" dirty="0"/>
-          </a:p>
-        </p:txBody>
-      </p:sp>
-      <p:sp>
-        <p:nvSpPr>
-          <p:cNvPr id="24" name="Text 0"/>
+            <a:off x="685800" y="6080760"/>
+            <a:ext cx="10820095" cy="0"/>
+          </a:xfrm>
+          <a:prstGeom prst="line">
+            <a:avLst/>
+          </a:prstGeom>
+          <a:noFill/>
+          <a:ln w="9525">
+            <a:solidFill>
+              <a:srgbClr val="D9D9D9"/>
+            </a:solidFill>
+            <a:prstDash val="solid"/>
+          </a:ln>
+        </p:spPr>
+      </p:sp>
+      <p:sp>
+        <p:nvSpPr>
+          <p:cNvPr id="25" name="Text 0"/>
           <p:cNvSpPr/>
           <p:nvPr>
             <p:ph idx="102" type="body" hasCustomPrompt="1"/>
@@ -4114,7 +4215,7 @@
                   <a:schemeClr val="tx1"/>
                 </a:solidFill>
               </a:rPr>
-              <a:t>23년을 네 시기로 나누고, 같은 순서로 분석</a:t>
+              <a:t>23년을 네 시기로 나누고, 시기마다 같은 순서로 분석</a:t>
             </a:r>
             <a:endParaRPr lang="en-US" sz="2800" dirty="0"/>
           </a:p>
@@ -4122,7 +4223,7 @@
       </p:sp>
       <p:sp>
         <p:nvSpPr>
-          <p:cNvPr id="4" name="t174"/>
+          <p:cNvPr id="4" name="t167"/>
           <p:cNvSpPr txBox="1"/>
           <p:nvPr/>
         </p:nvSpPr>
@@ -4158,7 +4259,7 @@
       </p:sp>
       <p:sp>
         <p:nvSpPr>
-          <p:cNvPr id="5" name="rr175"/>
+          <p:cNvPr id="5" name="rr168"/>
           <p:cNvSpPr/>
           <p:nvPr/>
         </p:nvSpPr>
@@ -4180,7 +4281,7 @@
       </p:sp>
       <p:sp>
         <p:nvSpPr>
-          <p:cNvPr id="6" name="t176"/>
+          <p:cNvPr id="6" name="t169"/>
           <p:cNvSpPr txBox="1"/>
           <p:nvPr/>
         </p:nvSpPr>
@@ -4216,7 +4317,7 @@
       </p:sp>
       <p:sp>
         <p:nvSpPr>
-          <p:cNvPr id="7" name="t177"/>
+          <p:cNvPr id="7" name="t170"/>
           <p:cNvSpPr txBox="1"/>
           <p:nvPr/>
         </p:nvSpPr>
@@ -4252,7 +4353,7 @@
       </p:sp>
       <p:sp>
         <p:nvSpPr>
-          <p:cNvPr id="8" name="rr178"/>
+          <p:cNvPr id="8" name="rr171"/>
           <p:cNvSpPr/>
           <p:nvPr/>
         </p:nvSpPr>
@@ -4274,7 +4375,7 @@
       </p:sp>
       <p:sp>
         <p:nvSpPr>
-          <p:cNvPr id="9" name="t179"/>
+          <p:cNvPr id="9" name="t172"/>
           <p:cNvSpPr txBox="1"/>
           <p:nvPr/>
         </p:nvSpPr>
@@ -4310,7 +4411,7 @@
       </p:sp>
       <p:sp>
         <p:nvSpPr>
-          <p:cNvPr id="10" name="t180"/>
+          <p:cNvPr id="10" name="t173"/>
           <p:cNvSpPr txBox="1"/>
           <p:nvPr/>
         </p:nvSpPr>
@@ -4346,7 +4447,7 @@
       </p:sp>
       <p:sp>
         <p:nvSpPr>
-          <p:cNvPr id="11" name="rr181"/>
+          <p:cNvPr id="11" name="rr174"/>
           <p:cNvSpPr/>
           <p:nvPr/>
         </p:nvSpPr>
@@ -4368,7 +4469,7 @@
       </p:sp>
       <p:sp>
         <p:nvSpPr>
-          <p:cNvPr id="12" name="t182"/>
+          <p:cNvPr id="12" name="t175"/>
           <p:cNvSpPr txBox="1"/>
           <p:nvPr/>
         </p:nvSpPr>
@@ -4404,7 +4505,7 @@
       </p:sp>
       <p:sp>
         <p:nvSpPr>
-          <p:cNvPr id="13" name="t183"/>
+          <p:cNvPr id="13" name="t176"/>
           <p:cNvSpPr txBox="1"/>
           <p:nvPr/>
         </p:nvSpPr>
@@ -4440,7 +4541,7 @@
       </p:sp>
       <p:sp>
         <p:nvSpPr>
-          <p:cNvPr id="14" name="rr184"/>
+          <p:cNvPr id="14" name="rr177"/>
           <p:cNvSpPr/>
           <p:nvPr/>
         </p:nvSpPr>
@@ -4462,7 +4563,7 @@
       </p:sp>
       <p:sp>
         <p:nvSpPr>
-          <p:cNvPr id="15" name="t185"/>
+          <p:cNvPr id="15" name="t178"/>
           <p:cNvSpPr txBox="1"/>
           <p:nvPr/>
         </p:nvSpPr>
@@ -4498,7 +4599,7 @@
       </p:sp>
       <p:sp>
         <p:nvSpPr>
-          <p:cNvPr id="16" name="l186"/>
+          <p:cNvPr id="16" name="l179"/>
           <p:cNvSpPr/>
           <p:nvPr/>
         </p:nvSpPr>
@@ -4521,7 +4622,7 @@
       </p:sp>
       <p:sp>
         <p:nvSpPr>
-          <p:cNvPr id="17" name="t187"/>
+          <p:cNvPr id="17" name="t180"/>
           <p:cNvSpPr txBox="1"/>
           <p:nvPr/>
         </p:nvSpPr>
@@ -4557,7 +4658,7 @@
       </p:sp>
       <p:sp>
         <p:nvSpPr>
-          <p:cNvPr id="18" name="t188"/>
+          <p:cNvPr id="18" name="t181"/>
           <p:cNvSpPr txBox="1"/>
           <p:nvPr/>
         </p:nvSpPr>
@@ -4593,7 +4694,7 @@
       </p:sp>
       <p:sp>
         <p:nvSpPr>
-          <p:cNvPr id="19" name="t189"/>
+          <p:cNvPr id="19" name="t182"/>
           <p:cNvSpPr txBox="1"/>
           <p:nvPr/>
         </p:nvSpPr>
@@ -4629,7 +4730,7 @@
       </p:sp>
       <p:sp>
         <p:nvSpPr>
-          <p:cNvPr id="20" name="l190"/>
+          <p:cNvPr id="20" name="l183"/>
           <p:cNvSpPr/>
           <p:nvPr/>
         </p:nvSpPr>
@@ -4652,7 +4753,7 @@
       </p:sp>
       <p:sp>
         <p:nvSpPr>
-          <p:cNvPr id="21" name="l191"/>
+          <p:cNvPr id="21" name="l184"/>
           <p:cNvSpPr/>
           <p:nvPr/>
         </p:nvSpPr>
@@ -4675,7 +4776,7 @@
       </p:sp>
       <p:sp>
         <p:nvSpPr>
-          <p:cNvPr id="22" name="t192"/>
+          <p:cNvPr id="22" name="t185"/>
           <p:cNvSpPr txBox="1"/>
           <p:nvPr/>
         </p:nvSpPr>
@@ -4731,7 +4832,7 @@
       </p:sp>
       <p:sp>
         <p:nvSpPr>
-          <p:cNvPr id="23" name="t193"/>
+          <p:cNvPr id="23" name="t186"/>
           <p:cNvSpPr txBox="1"/>
           <p:nvPr/>
         </p:nvSpPr>
@@ -4767,7 +4868,7 @@
       </p:sp>
       <p:sp>
         <p:nvSpPr>
-          <p:cNvPr id="24" name="t194"/>
+          <p:cNvPr id="24" name="t187"/>
           <p:cNvSpPr txBox="1"/>
           <p:nvPr/>
         </p:nvSpPr>
@@ -4840,7 +4941,7 @@
       </p:sp>
       <p:sp>
         <p:nvSpPr>
-          <p:cNvPr id="25" name="t195"/>
+          <p:cNvPr id="25" name="t188"/>
           <p:cNvSpPr txBox="1"/>
           <p:nvPr/>
         </p:nvSpPr>
@@ -4896,7 +4997,7 @@
       </p:sp>
       <p:sp>
         <p:nvSpPr>
-          <p:cNvPr id="26" name="t196"/>
+          <p:cNvPr id="26" name="t189"/>
           <p:cNvSpPr txBox="1"/>
           <p:nvPr/>
         </p:nvSpPr>
@@ -4932,7 +5033,7 @@
       </p:sp>
       <p:sp>
         <p:nvSpPr>
-          <p:cNvPr id="27" name="t197"/>
+          <p:cNvPr id="27" name="t190"/>
           <p:cNvSpPr txBox="1"/>
           <p:nvPr/>
         </p:nvSpPr>
@@ -4980,7 +5081,7 @@
                   <a:schemeClr val="tx1"/>
                 </a:solidFill>
               </a:rPr>
-              <a:t>자율적 조직문화</a:t>
+              <a:t>자율적인 조직문화</a:t>
             </a:r>
             <a:endParaRPr lang="en-US" sz="1400" dirty="0"/>
           </a:p>
@@ -5005,7 +5106,7 @@
       </p:sp>
       <p:sp>
         <p:nvSpPr>
-          <p:cNvPr id="28" name="t198"/>
+          <p:cNvPr id="28" name="t191"/>
           <p:cNvSpPr txBox="1"/>
           <p:nvPr/>
         </p:nvSpPr>
@@ -5061,7 +5162,7 @@
       </p:sp>
       <p:sp>
         <p:nvSpPr>
-          <p:cNvPr id="29" name="t199"/>
+          <p:cNvPr id="29" name="t192"/>
           <p:cNvSpPr txBox="1"/>
           <p:nvPr/>
         </p:nvSpPr>
@@ -5097,7 +5198,7 @@
       </p:sp>
       <p:sp>
         <p:nvSpPr>
-          <p:cNvPr id="30" name="t200"/>
+          <p:cNvPr id="30" name="t193"/>
           <p:cNvSpPr txBox="1"/>
           <p:nvPr/>
         </p:nvSpPr>
@@ -5170,7 +5271,7 @@
       </p:sp>
       <p:sp>
         <p:nvSpPr>
-          <p:cNvPr id="31" name="t201"/>
+          <p:cNvPr id="31" name="t194"/>
           <p:cNvSpPr txBox="1"/>
           <p:nvPr/>
         </p:nvSpPr>
@@ -5226,7 +5327,7 @@
       </p:sp>
       <p:sp>
         <p:nvSpPr>
-          <p:cNvPr id="32" name="t202"/>
+          <p:cNvPr id="32" name="t195"/>
           <p:cNvSpPr txBox="1"/>
           <p:nvPr/>
         </p:nvSpPr>
@@ -5262,7 +5363,7 @@
       </p:sp>
       <p:sp>
         <p:nvSpPr>
-          <p:cNvPr id="33" name="t203"/>
+          <p:cNvPr id="33" name="t196"/>
           <p:cNvSpPr txBox="1"/>
           <p:nvPr/>
         </p:nvSpPr>
@@ -5335,7 +5436,7 @@
       </p:sp>
       <p:sp>
         <p:nvSpPr>
-          <p:cNvPr id="34" name="l204"/>
+          <p:cNvPr id="34" name="l197"/>
           <p:cNvSpPr/>
           <p:nvPr/>
         </p:nvSpPr>
@@ -5526,7 +5627,7 @@
                   <a:schemeClr val="tx1"/>
                 </a:solidFill>
               </a:rPr>
-              <a:t>두 이론으로 핵심 질문에 답하고, 네 이론으로 보완</a:t>
+              <a:t>4장의 두 이론이 중심, 나머지 네 이론은 보조</a:t>
             </a:r>
             <a:endParaRPr lang="en-US" sz="2800" dirty="0"/>
           </a:p>
@@ -5572,7 +5673,7 @@
       </p:sp>
       <p:sp>
         <p:nvSpPr>
-          <p:cNvPr id="5" name="r205"/>
+          <p:cNvPr id="5" name="r198"/>
           <p:cNvSpPr/>
           <p:nvPr/>
         </p:nvSpPr>
@@ -5592,7 +5693,7 @@
       </p:sp>
       <p:sp>
         <p:nvSpPr>
-          <p:cNvPr id="6" name="t206"/>
+          <p:cNvPr id="6" name="t199"/>
           <p:cNvSpPr txBox="1"/>
           <p:nvPr/>
         </p:nvSpPr>
@@ -5628,7 +5729,7 @@
       </p:sp>
       <p:sp>
         <p:nvSpPr>
-          <p:cNvPr id="7" name="t207"/>
+          <p:cNvPr id="7" name="t200"/>
           <p:cNvSpPr txBox="1"/>
           <p:nvPr/>
         </p:nvSpPr>
@@ -5675,7 +5776,7 @@
       </p:sp>
       <p:sp>
         <p:nvSpPr>
-          <p:cNvPr id="8" name="t208"/>
+          <p:cNvPr id="8" name="t201"/>
           <p:cNvSpPr txBox="1"/>
           <p:nvPr/>
         </p:nvSpPr>
@@ -5723,7 +5824,7 @@
                   <a:schemeClr val="tx1"/>
                 </a:solidFill>
               </a:rPr>
-              <a:t>성취지향적 리더십을 보였는가</a:t>
+              <a:t>성취지향적 리더십을 보였을까</a:t>
             </a:r>
             <a:endParaRPr lang="en-US" sz="1500" dirty="0"/>
           </a:p>
@@ -5731,7 +5832,7 @@
       </p:sp>
       <p:sp>
         <p:nvSpPr>
-          <p:cNvPr id="9" name="r209"/>
+          <p:cNvPr id="9" name="r202"/>
           <p:cNvSpPr/>
           <p:nvPr/>
         </p:nvSpPr>
@@ -5751,7 +5852,7 @@
       </p:sp>
       <p:sp>
         <p:nvSpPr>
-          <p:cNvPr id="10" name="t210"/>
+          <p:cNvPr id="10" name="t203"/>
           <p:cNvSpPr txBox="1"/>
           <p:nvPr/>
         </p:nvSpPr>
@@ -5787,7 +5888,7 @@
       </p:sp>
       <p:sp>
         <p:nvSpPr>
-          <p:cNvPr id="11" name="t211"/>
+          <p:cNvPr id="11" name="t204"/>
           <p:cNvSpPr txBox="1"/>
           <p:nvPr/>
         </p:nvSpPr>
@@ -5834,7 +5935,7 @@
       </p:sp>
       <p:sp>
         <p:nvSpPr>
-          <p:cNvPr id="12" name="t212"/>
+          <p:cNvPr id="12" name="t205"/>
           <p:cNvSpPr txBox="1"/>
           <p:nvPr/>
         </p:nvSpPr>
@@ -5882,7 +5983,7 @@
                   <a:schemeClr val="tx1"/>
                 </a:solidFill>
               </a:rPr>
-              <a:t>과업구조 · 직위권력을 바꾸었는가</a:t>
+              <a:t>과업구조와 직위권력을 바꿨을까</a:t>
             </a:r>
             <a:endParaRPr lang="en-US" sz="1500" dirty="0"/>
           </a:p>
@@ -5890,7 +5991,7 @@
       </p:sp>
       <p:sp>
         <p:nvSpPr>
-          <p:cNvPr id="13" name="l213"/>
+          <p:cNvPr id="13" name="l206"/>
           <p:cNvSpPr/>
           <p:nvPr/>
         </p:nvSpPr>
@@ -5913,7 +6014,7 @@
       </p:sp>
       <p:sp>
         <p:nvSpPr>
-          <p:cNvPr id="14" name="t214"/>
+          <p:cNvPr id="14" name="t207"/>
           <p:cNvSpPr txBox="1"/>
           <p:nvPr/>
         </p:nvSpPr>
@@ -5960,7 +6061,7 @@
       </p:sp>
       <p:sp>
         <p:nvSpPr>
-          <p:cNvPr id="15" name="t215"/>
+          <p:cNvPr id="15" name="t208"/>
           <p:cNvSpPr txBox="1"/>
           <p:nvPr/>
         </p:nvSpPr>
@@ -5991,79 +6092,10 @@
                   <a:schemeClr val="tx2"/>
                 </a:solidFill>
               </a:rPr>
-              <a:t>경험에 대한 개방성과 위험 감수 성향이 결정에 드러났나</a:t>
+              <a:t>개방성과 위험 감수 성향이</a:t>
             </a:r>
             <a:endParaRPr lang="en-US" sz="1400" dirty="0"/>
           </a:p>
-        </p:txBody>
-      </p:sp>
-      <p:sp>
-        <p:nvSpPr>
-          <p:cNvPr id="16" name="t216"/>
-          <p:cNvSpPr txBox="1"/>
-          <p:nvPr/>
-        </p:nvSpPr>
-        <p:spPr>
-          <a:xfrm>
-            <a:off x="3390824" y="4297680"/>
-            <a:ext cx="2430704" cy="365760"/>
-          </a:xfrm>
-          <a:prstGeom prst="rect">
-            <a:avLst/>
-          </a:prstGeom>
-          <a:noFill/>
-          <a:ln/>
-        </p:spPr>
-        <p:txBody>
-          <a:bodyPr wrap="square" lIns="0" tIns="0" rIns="0" bIns="0" rtlCol="0" anchor="ctr"/>
-          <a:lstStyle/>
-          <a:p>
-            <a:pPr indent="0" marL="0">
-              <a:buNone/>
-            </a:pPr>
-            <a:r>
-              <a:rPr lang="en-US" sz="1700" b="1" dirty="0">
-                <a:solidFill>
-                  <a:schemeClr val="tx1"/>
-                </a:solidFill>
-              </a:rPr>
-              <a:t>행동이론</a:t>
-            </a:r>
-            <a:pPr indent="0" marL="0">
-              <a:buNone/>
-            </a:pPr>
-            <a:r>
-              <a:rPr lang="en-US" sz="1300" dirty="0">
-                <a:solidFill>
-                  <a:schemeClr val="tx2"/>
-                </a:solidFill>
-              </a:rPr>
-              <a:t>  3장</a:t>
-            </a:r>
-            <a:endParaRPr lang="en-US" sz="1700" dirty="0"/>
-          </a:p>
-        </p:txBody>
-      </p:sp>
-      <p:sp>
-        <p:nvSpPr>
-          <p:cNvPr id="17" name="t217"/>
-          <p:cNvSpPr txBox="1"/>
-          <p:nvPr/>
-        </p:nvSpPr>
-        <p:spPr>
-          <a:xfrm>
-            <a:off x="3390824" y="4754880"/>
-            <a:ext cx="2384984" cy="1097280"/>
-          </a:xfrm>
-          <a:prstGeom prst="rect">
-            <a:avLst/>
-          </a:prstGeom>
-          <a:noFill/>
-          <a:ln/>
-        </p:spPr>
-        <p:txBody>
-          <a:bodyPr wrap="square" lIns="0" tIns="0" rIns="0" bIns="0" rtlCol="0" anchor="t"/>
-          <a:lstStyle/>
           <a:p>
             <a:pPr indent="0" marL="0">
               <a:lnSpc>
@@ -6077,7 +6109,7 @@
                   <a:schemeClr val="tx2"/>
                 </a:solidFill>
               </a:rPr>
-              <a:t>구조주도(원칙 · 디자인 관리)와 배려가 함께 나타났나</a:t>
+              <a:t>결정에 드러났나</a:t>
             </a:r>
             <a:endParaRPr lang="en-US" sz="1400" dirty="0"/>
           </a:p>
@@ -6085,13 +6117,13 @@
       </p:sp>
       <p:sp>
         <p:nvSpPr>
-          <p:cNvPr id="18" name="t218"/>
-          <p:cNvSpPr txBox="1"/>
-          <p:nvPr/>
-        </p:nvSpPr>
-        <p:spPr>
-          <a:xfrm>
-            <a:off x="6095848" y="4297680"/>
+          <p:cNvPr id="16" name="t209"/>
+          <p:cNvSpPr txBox="1"/>
+          <p:nvPr/>
+        </p:nvSpPr>
+        <p:spPr>
+          <a:xfrm>
+            <a:off x="3390824" y="4297680"/>
             <a:ext cx="2430704" cy="365760"/>
           </a:xfrm>
           <a:prstGeom prst="rect">
@@ -6113,7 +6145,7 @@
                   <a:schemeClr val="tx1"/>
                 </a:solidFill>
               </a:rPr>
-              <a:t>갈등관리</a:t>
+              <a:t>행동이론</a:t>
             </a:r>
             <a:pPr indent="0" marL="0">
               <a:buNone/>
@@ -6124,7 +6156,7 @@
                   <a:schemeClr val="tx2"/>
                 </a:solidFill>
               </a:rPr>
-              <a:t>  5장</a:t>
+              <a:t>  3장</a:t>
             </a:r>
             <a:endParaRPr lang="en-US" sz="1700" dirty="0"/>
           </a:p>
@@ -6132,13 +6164,13 @@
       </p:sp>
       <p:sp>
         <p:nvSpPr>
-          <p:cNvPr id="19" name="t219"/>
-          <p:cNvSpPr txBox="1"/>
-          <p:nvPr/>
-        </p:nvSpPr>
-        <p:spPr>
-          <a:xfrm>
-            <a:off x="6095848" y="4754880"/>
+          <p:cNvPr id="17" name="t210"/>
+          <p:cNvSpPr txBox="1"/>
+          <p:nvPr/>
+        </p:nvSpPr>
+        <p:spPr>
+          <a:xfrm>
+            <a:off x="3390824" y="4754880"/>
             <a:ext cx="2384984" cy="1097280"/>
           </a:xfrm>
           <a:prstGeom prst="rect">
@@ -6163,79 +6195,10 @@
                   <a:schemeClr val="tx2"/>
                 </a:solidFill>
               </a:rPr>
-              <a:t>희망퇴직과 노조 면담에서 어떤 스타일로 대응했나</a:t>
+              <a:t>구조주도(원칙 · 디자인)와</a:t>
             </a:r>
             <a:endParaRPr lang="en-US" sz="1400" dirty="0"/>
           </a:p>
-        </p:txBody>
-      </p:sp>
-      <p:sp>
-        <p:nvSpPr>
-          <p:cNvPr id="20" name="t220"/>
-          <p:cNvSpPr txBox="1"/>
-          <p:nvPr/>
-        </p:nvSpPr>
-        <p:spPr>
-          <a:xfrm>
-            <a:off x="8800871" y="4297680"/>
-            <a:ext cx="2430704" cy="365760"/>
-          </a:xfrm>
-          <a:prstGeom prst="rect">
-            <a:avLst/>
-          </a:prstGeom>
-          <a:noFill/>
-          <a:ln/>
-        </p:spPr>
-        <p:txBody>
-          <a:bodyPr wrap="square" lIns="0" tIns="0" rIns="0" bIns="0" rtlCol="0" anchor="ctr"/>
-          <a:lstStyle/>
-          <a:p>
-            <a:pPr indent="0" marL="0">
-              <a:buNone/>
-            </a:pPr>
-            <a:r>
-              <a:rPr lang="en-US" sz="1700" b="1" dirty="0">
-                <a:solidFill>
-                  <a:schemeClr val="tx1"/>
-                </a:solidFill>
-              </a:rPr>
-              <a:t>권력 · 협상</a:t>
-            </a:r>
-            <a:pPr indent="0" marL="0">
-              <a:buNone/>
-            </a:pPr>
-            <a:r>
-              <a:rPr lang="en-US" sz="1300" dirty="0">
-                <a:solidFill>
-                  <a:schemeClr val="tx2"/>
-                </a:solidFill>
-              </a:rPr>
-              <a:t>  6장</a:t>
-            </a:r>
-            <a:endParaRPr lang="en-US" sz="1700" dirty="0"/>
-          </a:p>
-        </p:txBody>
-      </p:sp>
-      <p:sp>
-        <p:nvSpPr>
-          <p:cNvPr id="21" name="t221"/>
-          <p:cNvSpPr txBox="1"/>
-          <p:nvPr/>
-        </p:nvSpPr>
-        <p:spPr>
-          <a:xfrm>
-            <a:off x="8800871" y="4754880"/>
-            <a:ext cx="2384984" cy="1097280"/>
-          </a:xfrm>
-          <a:prstGeom prst="rect">
-            <a:avLst/>
-          </a:prstGeom>
-          <a:noFill/>
-          <a:ln/>
-        </p:spPr>
-        <p:txBody>
-          <a:bodyPr wrap="square" lIns="0" tIns="0" rIns="0" bIns="0" rtlCol="0" anchor="t"/>
-          <a:lstStyle/>
           <a:p>
             <a:pPr indent="0" marL="0">
               <a:lnSpc>
@@ -6249,7 +6212,213 @@
                   <a:schemeClr val="tx2"/>
                 </a:solidFill>
               </a:rPr>
-              <a:t>직위 · 관계에서 나온 권력과 애플페이 협상</a:t>
+              <a:t>배려가 함께 보였나</a:t>
+            </a:r>
+            <a:endParaRPr lang="en-US" sz="1400" dirty="0"/>
+          </a:p>
+        </p:txBody>
+      </p:sp>
+      <p:sp>
+        <p:nvSpPr>
+          <p:cNvPr id="18" name="t211"/>
+          <p:cNvSpPr txBox="1"/>
+          <p:nvPr/>
+        </p:nvSpPr>
+        <p:spPr>
+          <a:xfrm>
+            <a:off x="6095848" y="4297680"/>
+            <a:ext cx="2430704" cy="365760"/>
+          </a:xfrm>
+          <a:prstGeom prst="rect">
+            <a:avLst/>
+          </a:prstGeom>
+          <a:noFill/>
+          <a:ln/>
+        </p:spPr>
+        <p:txBody>
+          <a:bodyPr wrap="square" lIns="0" tIns="0" rIns="0" bIns="0" rtlCol="0" anchor="ctr"/>
+          <a:lstStyle/>
+          <a:p>
+            <a:pPr indent="0" marL="0">
+              <a:buNone/>
+            </a:pPr>
+            <a:r>
+              <a:rPr lang="en-US" sz="1700" b="1" dirty="0">
+                <a:solidFill>
+                  <a:schemeClr val="tx1"/>
+                </a:solidFill>
+              </a:rPr>
+              <a:t>갈등관리</a:t>
+            </a:r>
+            <a:pPr indent="0" marL="0">
+              <a:buNone/>
+            </a:pPr>
+            <a:r>
+              <a:rPr lang="en-US" sz="1300" dirty="0">
+                <a:solidFill>
+                  <a:schemeClr val="tx2"/>
+                </a:solidFill>
+              </a:rPr>
+              <a:t>  5장</a:t>
+            </a:r>
+            <a:endParaRPr lang="en-US" sz="1700" dirty="0"/>
+          </a:p>
+        </p:txBody>
+      </p:sp>
+      <p:sp>
+        <p:nvSpPr>
+          <p:cNvPr id="19" name="t212"/>
+          <p:cNvSpPr txBox="1"/>
+          <p:nvPr/>
+        </p:nvSpPr>
+        <p:spPr>
+          <a:xfrm>
+            <a:off x="6095848" y="4754880"/>
+            <a:ext cx="2384984" cy="1097280"/>
+          </a:xfrm>
+          <a:prstGeom prst="rect">
+            <a:avLst/>
+          </a:prstGeom>
+          <a:noFill/>
+          <a:ln/>
+        </p:spPr>
+        <p:txBody>
+          <a:bodyPr wrap="square" lIns="0" tIns="0" rIns="0" bIns="0" rtlCol="0" anchor="t"/>
+          <a:lstStyle/>
+          <a:p>
+            <a:pPr indent="0" marL="0">
+              <a:lnSpc>
+                <a:spcPct val="125000"/>
+              </a:lnSpc>
+              <a:buNone/>
+            </a:pPr>
+            <a:r>
+              <a:rPr lang="en-US" sz="1400" dirty="0">
+                <a:solidFill>
+                  <a:schemeClr val="tx2"/>
+                </a:solidFill>
+              </a:rPr>
+              <a:t>희망퇴직과 노조 면담 때</a:t>
+            </a:r>
+            <a:endParaRPr lang="en-US" sz="1400" dirty="0"/>
+          </a:p>
+          <a:p>
+            <a:pPr indent="0" marL="0">
+              <a:lnSpc>
+                <a:spcPct val="125000"/>
+              </a:lnSpc>
+              <a:buNone/>
+            </a:pPr>
+            <a:r>
+              <a:rPr lang="en-US" sz="1400" dirty="0">
+                <a:solidFill>
+                  <a:schemeClr val="tx2"/>
+                </a:solidFill>
+              </a:rPr>
+              <a:t>어떤 방식으로 대응했나</a:t>
+            </a:r>
+            <a:endParaRPr lang="en-US" sz="1400" dirty="0"/>
+          </a:p>
+        </p:txBody>
+      </p:sp>
+      <p:sp>
+        <p:nvSpPr>
+          <p:cNvPr id="20" name="t213"/>
+          <p:cNvSpPr txBox="1"/>
+          <p:nvPr/>
+        </p:nvSpPr>
+        <p:spPr>
+          <a:xfrm>
+            <a:off x="8800871" y="4297680"/>
+            <a:ext cx="2430704" cy="365760"/>
+          </a:xfrm>
+          <a:prstGeom prst="rect">
+            <a:avLst/>
+          </a:prstGeom>
+          <a:noFill/>
+          <a:ln/>
+        </p:spPr>
+        <p:txBody>
+          <a:bodyPr wrap="square" lIns="0" tIns="0" rIns="0" bIns="0" rtlCol="0" anchor="ctr"/>
+          <a:lstStyle/>
+          <a:p>
+            <a:pPr indent="0" marL="0">
+              <a:buNone/>
+            </a:pPr>
+            <a:r>
+              <a:rPr lang="en-US" sz="1700" b="1" dirty="0">
+                <a:solidFill>
+                  <a:schemeClr val="tx1"/>
+                </a:solidFill>
+              </a:rPr>
+              <a:t>권력 · 협상</a:t>
+            </a:r>
+            <a:pPr indent="0" marL="0">
+              <a:buNone/>
+            </a:pPr>
+            <a:r>
+              <a:rPr lang="en-US" sz="1300" dirty="0">
+                <a:solidFill>
+                  <a:schemeClr val="tx2"/>
+                </a:solidFill>
+              </a:rPr>
+              <a:t>  6장</a:t>
+            </a:r>
+            <a:endParaRPr lang="en-US" sz="1700" dirty="0"/>
+          </a:p>
+        </p:txBody>
+      </p:sp>
+      <p:sp>
+        <p:nvSpPr>
+          <p:cNvPr id="21" name="t214"/>
+          <p:cNvSpPr txBox="1"/>
+          <p:nvPr/>
+        </p:nvSpPr>
+        <p:spPr>
+          <a:xfrm>
+            <a:off x="8800871" y="4754880"/>
+            <a:ext cx="2384984" cy="1097280"/>
+          </a:xfrm>
+          <a:prstGeom prst="rect">
+            <a:avLst/>
+          </a:prstGeom>
+          <a:noFill/>
+          <a:ln/>
+        </p:spPr>
+        <p:txBody>
+          <a:bodyPr wrap="square" lIns="0" tIns="0" rIns="0" bIns="0" rtlCol="0" anchor="t"/>
+          <a:lstStyle/>
+          <a:p>
+            <a:pPr indent="0" marL="0">
+              <a:lnSpc>
+                <a:spcPct val="125000"/>
+              </a:lnSpc>
+              <a:buNone/>
+            </a:pPr>
+            <a:r>
+              <a:rPr lang="en-US" sz="1400" dirty="0">
+                <a:solidFill>
+                  <a:schemeClr val="tx2"/>
+                </a:solidFill>
+              </a:rPr>
+              <a:t>직위와 관계에서 나온 힘,</a:t>
+            </a:r>
+            <a:endParaRPr lang="en-US" sz="1400" dirty="0"/>
+          </a:p>
+          <a:p>
+            <a:pPr indent="0" marL="0">
+              <a:lnSpc>
+                <a:spcPct val="125000"/>
+              </a:lnSpc>
+              <a:buNone/>
+            </a:pPr>
+            <a:r>
+              <a:rPr lang="en-US" sz="1400" dirty="0">
+                <a:solidFill>
+                  <a:schemeClr val="tx2"/>
+                </a:solidFill>
+              </a:rPr>
+              <a:t>애플페이 협상</a:t>
             </a:r>
             <a:endParaRPr lang="en-US" sz="1400" dirty="0"/>
           </a:p>
@@ -6357,7 +6526,7 @@
                   <a:schemeClr val="tx2"/>
                 </a:solidFill>
               </a:rPr>
-              <a:t>04  조원 현황 및 역할 배분</a:t>
+              <a:t>03  팀플 보고서 작성 방법 · 시기별 예상</a:t>
             </a:r>
             <a:endParaRPr lang="en-US" sz="1200" dirty="0"/>
           </a:p>
@@ -6395,7 +6564,7 @@
                   <a:schemeClr val="tx1"/>
                 </a:solidFill>
               </a:rPr>
-              <a:t>시기를 나눠 맡고, PPT와 발표는 담당자를 정함</a:t>
+              <a:t>시기마다 이런 모습이 나올 것으로 예상</a:t>
             </a:r>
             <a:endParaRPr lang="en-US" sz="2800" dirty="0"/>
           </a:p>
@@ -6403,14 +6572,88 @@
       </p:sp>
       <p:sp>
         <p:nvSpPr>
-          <p:cNvPr id="4" name="t222"/>
+          <p:cNvPr id="4" name="Text 0"/>
+          <p:cNvSpPr/>
+          <p:nvPr>
+            <p:ph idx="102" type="body" hasCustomPrompt="1"/>
+          </p:nvPr>
+        </p:nvSpPr>
+        <p:spPr>
+          <a:xfrm>
+            <a:off x="685800" y="6336792"/>
+            <a:ext cx="9692640" cy="256032"/>
+          </a:xfrm>
+          <a:prstGeom prst="rect">
+            <a:avLst/>
+          </a:prstGeom>
+          <a:noFill/>
+          <a:ln/>
+        </p:spPr>
+        <p:txBody>
+          <a:bodyPr wrap="square" lIns="0" tIns="0" rIns="0" bIns="0" rtlCol="0" anchor="ctr"/>
+          <a:lstStyle/>
+          <a:p>
+            <a:pPr indent="0" marL="0">
+              <a:buNone/>
+            </a:pPr>
+            <a:r>
+              <a:rPr lang="en-US" sz="1000" dirty="0">
+                <a:solidFill>
+                  <a:schemeClr val="tx2"/>
+                </a:solidFill>
+              </a:rPr>
+              <a:t>리더 행동 유형: House 경로-목표이론의 지시적 · 후원적 · 참여적 · 성취지향적 리더십 · 상황변수: Fiedler의 리더-부하 관계 · 과업구조 · 직위권력</a:t>
+            </a:r>
+            <a:endParaRPr lang="en-US" sz="1000" dirty="0"/>
+          </a:p>
+        </p:txBody>
+      </p:sp>
+      <p:sp>
+        <p:nvSpPr>
+          <p:cNvPr id="5" name="t215"/>
+          <p:cNvSpPr txBox="1"/>
+          <p:nvPr/>
+        </p:nvSpPr>
+        <p:spPr>
+          <a:xfrm>
+            <a:off x="6933895" y="457200"/>
+            <a:ext cx="4572000" cy="274320"/>
+          </a:xfrm>
+          <a:prstGeom prst="rect">
+            <a:avLst/>
+          </a:prstGeom>
+          <a:noFill/>
+          <a:ln/>
+        </p:spPr>
+        <p:txBody>
+          <a:bodyPr wrap="square" lIns="0" tIns="0" rIns="0" bIns="0" rtlCol="0" anchor="ctr"/>
+          <a:lstStyle/>
+          <a:p>
+            <a:pPr algn="r" indent="0" marL="0">
+              <a:buNone/>
+            </a:pPr>
+            <a:r>
+              <a:rPr lang="en-US" sz="1200" b="1" dirty="0">
+                <a:solidFill>
+                  <a:schemeClr val="accent1"/>
+                </a:solidFill>
+              </a:rPr>
+              <a:t>보고서에서 맞는지 확인할 가설</a:t>
+            </a:r>
+            <a:endParaRPr lang="en-US" sz="1200" dirty="0"/>
+          </a:p>
+        </p:txBody>
+      </p:sp>
+      <p:sp>
+        <p:nvSpPr>
+          <p:cNvPr id="6" name="t216"/>
           <p:cNvSpPr txBox="1"/>
           <p:nvPr/>
         </p:nvSpPr>
         <p:spPr>
           <a:xfrm>
             <a:off x="685800" y="1783080"/>
-            <a:ext cx="1554480" cy="502920"/>
+            <a:ext cx="2331720" cy="411480"/>
           </a:xfrm>
           <a:prstGeom prst="rect">
             <a:avLst/>
@@ -6431,7 +6674,7 @@
                   <a:schemeClr val="tx2"/>
                 </a:solidFill>
               </a:rPr>
-              <a:t>조원</a:t>
+              <a:t>시기</a:t>
             </a:r>
             <a:endParaRPr lang="en-US" sz="1300" dirty="0"/>
           </a:p>
@@ -6439,14 +6682,14 @@
       </p:sp>
       <p:sp>
         <p:nvSpPr>
-          <p:cNvPr id="5" name="t223"/>
-          <p:cNvSpPr txBox="1"/>
-          <p:nvPr/>
-        </p:nvSpPr>
-        <p:spPr>
-          <a:xfrm>
-            <a:off x="2240280" y="1783080"/>
-            <a:ext cx="2743200" cy="502920"/>
+          <p:cNvPr id="7" name="t217"/>
+          <p:cNvSpPr txBox="1"/>
+          <p:nvPr/>
+        </p:nvSpPr>
+        <p:spPr>
+          <a:xfrm>
+            <a:off x="3200400" y="1783080"/>
+            <a:ext cx="4114800" cy="411480"/>
           </a:xfrm>
           <a:prstGeom prst="rect">
             <a:avLst/>
@@ -6467,7 +6710,7 @@
                   <a:schemeClr val="tx2"/>
                 </a:solidFill>
               </a:rPr>
-              <a:t>담당 시기</a:t>
+              <a:t>리더 행동  ·  경로-목표이론</a:t>
             </a:r>
             <a:endParaRPr lang="en-US" sz="1300" dirty="0"/>
           </a:p>
@@ -6475,14 +6718,14 @@
       </p:sp>
       <p:sp>
         <p:nvSpPr>
-          <p:cNvPr id="6" name="t224"/>
-          <p:cNvSpPr txBox="1"/>
-          <p:nvPr/>
-        </p:nvSpPr>
-        <p:spPr>
-          <a:xfrm>
-            <a:off x="4983480" y="1783080"/>
-            <a:ext cx="1630604" cy="502920"/>
+          <p:cNvPr id="8" name="t218"/>
+          <p:cNvSpPr txBox="1"/>
+          <p:nvPr/>
+        </p:nvSpPr>
+        <p:spPr>
+          <a:xfrm>
+            <a:off x="7498080" y="1783080"/>
+            <a:ext cx="4693615" cy="411480"/>
           </a:xfrm>
           <a:prstGeom prst="rect">
             <a:avLst/>
@@ -6494,7 +6737,7 @@
           <a:bodyPr wrap="square" lIns="0" tIns="0" rIns="0" bIns="0" rtlCol="0" anchor="ctr"/>
           <a:lstStyle/>
           <a:p>
-            <a:pPr algn="ctr" indent="0" marL="0">
+            <a:pPr indent="0" marL="0">
               <a:buNone/>
             </a:pPr>
             <a:r>
@@ -6503,7 +6746,7 @@
                   <a:schemeClr val="tx2"/>
                 </a:solidFill>
               </a:rPr>
-              <a:t>자료조사</a:t>
+              <a:t>상황 변화  ·  Fiedler 상황 모델</a:t>
             </a:r>
             <a:endParaRPr lang="en-US" sz="1300" dirty="0"/>
           </a:p>
@@ -6511,121 +6754,13 @@
       </p:sp>
       <p:sp>
         <p:nvSpPr>
-          <p:cNvPr id="7" name="t225"/>
-          <p:cNvSpPr txBox="1"/>
-          <p:nvPr/>
-        </p:nvSpPr>
-        <p:spPr>
-          <a:xfrm>
-            <a:off x="6614084" y="1783080"/>
-            <a:ext cx="1630604" cy="502920"/>
-          </a:xfrm>
-          <a:prstGeom prst="rect">
-            <a:avLst/>
-          </a:prstGeom>
-          <a:noFill/>
-          <a:ln/>
-        </p:spPr>
-        <p:txBody>
-          <a:bodyPr wrap="square" lIns="0" tIns="0" rIns="0" bIns="0" rtlCol="0" anchor="ctr"/>
-          <a:lstStyle/>
-          <a:p>
-            <a:pPr algn="ctr" indent="0" marL="0">
-              <a:buNone/>
-            </a:pPr>
-            <a:r>
-              <a:rPr lang="en-US" sz="1300" b="1" dirty="0">
-                <a:solidFill>
-                  <a:schemeClr val="tx2"/>
-                </a:solidFill>
-              </a:rPr>
-              <a:t>자료분석</a:t>
-            </a:r>
-            <a:endParaRPr lang="en-US" sz="1300" dirty="0"/>
-          </a:p>
-        </p:txBody>
-      </p:sp>
-      <p:sp>
-        <p:nvSpPr>
-          <p:cNvPr id="8" name="t226"/>
-          <p:cNvSpPr txBox="1"/>
-          <p:nvPr/>
-        </p:nvSpPr>
-        <p:spPr>
-          <a:xfrm>
-            <a:off x="8244688" y="1783080"/>
-            <a:ext cx="1630604" cy="502920"/>
-          </a:xfrm>
-          <a:prstGeom prst="rect">
-            <a:avLst/>
-          </a:prstGeom>
-          <a:noFill/>
-          <a:ln/>
-        </p:spPr>
-        <p:txBody>
-          <a:bodyPr wrap="square" lIns="0" tIns="0" rIns="0" bIns="0" rtlCol="0" anchor="ctr"/>
-          <a:lstStyle/>
-          <a:p>
-            <a:pPr algn="ctr" indent="0" marL="0">
-              <a:buNone/>
-            </a:pPr>
-            <a:r>
-              <a:rPr lang="en-US" sz="1300" b="1" dirty="0">
-                <a:solidFill>
-                  <a:schemeClr val="tx2"/>
-                </a:solidFill>
-              </a:rPr>
-              <a:t>PPT 작성</a:t>
-            </a:r>
-            <a:endParaRPr lang="en-US" sz="1300" dirty="0"/>
-          </a:p>
-        </p:txBody>
-      </p:sp>
-      <p:sp>
-        <p:nvSpPr>
-          <p:cNvPr id="9" name="t227"/>
-          <p:cNvSpPr txBox="1"/>
-          <p:nvPr/>
-        </p:nvSpPr>
-        <p:spPr>
-          <a:xfrm>
-            <a:off x="9875291" y="1783080"/>
-            <a:ext cx="1630604" cy="502920"/>
-          </a:xfrm>
-          <a:prstGeom prst="rect">
-            <a:avLst/>
-          </a:prstGeom>
-          <a:noFill/>
-          <a:ln/>
-        </p:spPr>
-        <p:txBody>
-          <a:bodyPr wrap="square" lIns="0" tIns="0" rIns="0" bIns="0" rtlCol="0" anchor="ctr"/>
-          <a:lstStyle/>
-          <a:p>
-            <a:pPr algn="ctr" indent="0" marL="0">
-              <a:buNone/>
-            </a:pPr>
-            <a:r>
-              <a:rPr lang="en-US" sz="1300" b="1" dirty="0">
-                <a:solidFill>
-                  <a:schemeClr val="tx2"/>
-                </a:solidFill>
-              </a:rPr>
-              <a:t>발표</a:t>
-            </a:r>
-            <a:endParaRPr lang="en-US" sz="1300" dirty="0"/>
-          </a:p>
-        </p:txBody>
-      </p:sp>
-      <p:sp>
-        <p:nvSpPr>
-          <p:cNvPr id="10" name="l228"/>
+          <p:cNvPr id="9" name="l219"/>
           <p:cNvSpPr/>
           <p:nvPr/>
         </p:nvSpPr>
         <p:spPr>
           <a:xfrm>
-            <a:off x="685800" y="2286000"/>
+            <a:off x="685800" y="2240280"/>
             <a:ext cx="10820095" cy="0"/>
           </a:xfrm>
           <a:prstGeom prst="line">
@@ -6642,14 +6777,14 @@
       </p:sp>
       <p:sp>
         <p:nvSpPr>
-          <p:cNvPr id="11" name="t229"/>
-          <p:cNvSpPr txBox="1"/>
-          <p:nvPr/>
-        </p:nvSpPr>
-        <p:spPr>
-          <a:xfrm>
-            <a:off x="685800" y="2286000"/>
-            <a:ext cx="1554480" cy="822960"/>
+          <p:cNvPr id="10" name="t220"/>
+          <p:cNvSpPr txBox="1"/>
+          <p:nvPr/>
+        </p:nvSpPr>
+        <p:spPr>
+          <a:xfrm>
+            <a:off x="685800" y="2240280"/>
+            <a:ext cx="2331720" cy="914400"/>
           </a:xfrm>
           <a:prstGeom prst="rect">
             <a:avLst/>
@@ -6665,27 +6800,27 @@
               <a:buNone/>
             </a:pPr>
             <a:r>
-              <a:rPr lang="en-US" sz="1800" b="1" dirty="0">
+              <a:rPr lang="en-US" sz="1600" b="1" dirty="0">
                 <a:solidFill>
                   <a:schemeClr val="tx1"/>
                 </a:solidFill>
               </a:rPr>
-              <a:t>조원1</a:t>
-            </a:r>
-            <a:endParaRPr lang="en-US" sz="1800" dirty="0"/>
-          </a:p>
-        </p:txBody>
-      </p:sp>
-      <p:sp>
-        <p:nvSpPr>
-          <p:cNvPr id="12" name="t230"/>
-          <p:cNvSpPr txBox="1"/>
-          <p:nvPr/>
-        </p:nvSpPr>
-        <p:spPr>
-          <a:xfrm>
-            <a:off x="2240280" y="2286000"/>
-            <a:ext cx="2743200" cy="822960"/>
+              <a:t>①  위기와 회생</a:t>
+            </a:r>
+            <a:endParaRPr lang="en-US" sz="1600" dirty="0"/>
+          </a:p>
+        </p:txBody>
+      </p:sp>
+      <p:sp>
+        <p:nvSpPr>
+          <p:cNvPr id="11" name="t221"/>
+          <p:cNvSpPr txBox="1"/>
+          <p:nvPr/>
+        </p:nvSpPr>
+        <p:spPr>
+          <a:xfrm>
+            <a:off x="3200400" y="2240280"/>
+            <a:ext cx="4114800" cy="914400"/>
           </a:xfrm>
           <a:prstGeom prst="rect">
             <a:avLst/>
@@ -6698,89 +6833,105 @@
           <a:lstStyle/>
           <a:p>
             <a:pPr indent="0" marL="0">
-              <a:buNone/>
-            </a:pPr>
-            <a:r>
-              <a:rPr lang="en-US" sz="1600" dirty="0">
+              <a:spcAft>
+                <a:spcPts val="300"/>
+              </a:spcAft>
+              <a:buNone/>
+            </a:pPr>
+            <a:r>
+              <a:rPr lang="en-US" sz="1700" b="1" dirty="0">
                 <a:solidFill>
                   <a:schemeClr val="tx1"/>
                 </a:solidFill>
               </a:rPr>
-              <a:t>①  위기와 회생</a:t>
-            </a:r>
-            <a:endParaRPr lang="en-US" sz="1600" dirty="0"/>
-          </a:p>
-        </p:txBody>
-      </p:sp>
-      <p:sp>
-        <p:nvSpPr>
-          <p:cNvPr id="13" name="d231"/>
+              <a:t>지시적</a:t>
+            </a:r>
+            <a:endParaRPr lang="en-US" sz="1700" dirty="0"/>
+          </a:p>
+          <a:p>
+            <a:pPr indent="0" marL="0">
+              <a:spcAft>
+                <a:spcPts val="300"/>
+              </a:spcAft>
+              <a:buNone/>
+            </a:pPr>
+            <a:r>
+              <a:rPr lang="en-US" sz="1400" dirty="0">
+                <a:solidFill>
+                  <a:schemeClr val="tx2"/>
+                </a:solidFill>
+              </a:rPr>
+              <a:t>목표와 방법을 리더가 직접 정해 줌</a:t>
+            </a:r>
+            <a:endParaRPr lang="en-US" sz="1700" dirty="0"/>
+          </a:p>
+        </p:txBody>
+      </p:sp>
+      <p:sp>
+        <p:nvSpPr>
+          <p:cNvPr id="12" name="t222"/>
+          <p:cNvSpPr txBox="1"/>
+          <p:nvPr/>
+        </p:nvSpPr>
+        <p:spPr>
+          <a:xfrm>
+            <a:off x="7498080" y="2240280"/>
+            <a:ext cx="4693615" cy="914400"/>
+          </a:xfrm>
+          <a:prstGeom prst="rect">
+            <a:avLst/>
+          </a:prstGeom>
+          <a:noFill/>
+          <a:ln/>
+        </p:spPr>
+        <p:txBody>
+          <a:bodyPr wrap="square" lIns="0" tIns="0" rIns="0" bIns="0" rtlCol="0" anchor="ctr"/>
+          <a:lstStyle/>
+          <a:p>
+            <a:pPr indent="0" marL="0">
+              <a:spcAft>
+                <a:spcPts val="300"/>
+              </a:spcAft>
+              <a:buNone/>
+            </a:pPr>
+            <a:r>
+              <a:rPr lang="en-US" sz="1700" b="1" dirty="0">
+                <a:solidFill>
+                  <a:schemeClr val="tx1"/>
+                </a:solidFill>
+              </a:rPr>
+              <a:t>윤리 원칙 · GE 제휴</a:t>
+            </a:r>
+            <a:endParaRPr lang="en-US" sz="1700" dirty="0"/>
+          </a:p>
+          <a:p>
+            <a:pPr indent="0" marL="0">
+              <a:spcAft>
+                <a:spcPts val="300"/>
+              </a:spcAft>
+              <a:buNone/>
+            </a:pPr>
+            <a:r>
+              <a:rPr lang="en-US" sz="1400" dirty="0">
+                <a:solidFill>
+                  <a:schemeClr val="tx2"/>
+                </a:solidFill>
+              </a:rPr>
+              <a:t>일의 기준이 분명해지고 리더 권한이 커짐</a:t>
+            </a:r>
+            <a:endParaRPr lang="en-US" sz="1700" dirty="0"/>
+          </a:p>
+        </p:txBody>
+      </p:sp>
+      <p:sp>
+        <p:nvSpPr>
+          <p:cNvPr id="13" name="l223"/>
           <p:cNvSpPr/>
           <p:nvPr/>
         </p:nvSpPr>
         <p:spPr>
           <a:xfrm>
-            <a:off x="5725630" y="2624328"/>
-            <a:ext cx="146304" cy="146304"/>
-          </a:xfrm>
-          <a:prstGeom prst="ellipse">
-            <a:avLst/>
-          </a:prstGeom>
-          <a:solidFill>
-            <a:srgbClr val="BDBDBD"/>
-          </a:solidFill>
-          <a:ln/>
-        </p:spPr>
-      </p:sp>
-      <p:sp>
-        <p:nvSpPr>
-          <p:cNvPr id="14" name="d232"/>
-          <p:cNvSpPr/>
-          <p:nvPr/>
-        </p:nvSpPr>
-        <p:spPr>
-          <a:xfrm>
-            <a:off x="7356234" y="2624328"/>
-            <a:ext cx="146304" cy="146304"/>
-          </a:xfrm>
-          <a:prstGeom prst="ellipse">
-            <a:avLst/>
-          </a:prstGeom>
-          <a:solidFill>
-            <a:srgbClr val="BDBDBD"/>
-          </a:solidFill>
-          <a:ln/>
-        </p:spPr>
-      </p:sp>
-      <p:sp>
-        <p:nvSpPr>
-          <p:cNvPr id="15" name="d233"/>
-          <p:cNvSpPr/>
-          <p:nvPr/>
-        </p:nvSpPr>
-        <p:spPr>
-          <a:xfrm>
-            <a:off x="10571721" y="2578608"/>
-            <a:ext cx="237744" cy="237744"/>
-          </a:xfrm>
-          <a:prstGeom prst="ellipse">
-            <a:avLst/>
-          </a:prstGeom>
-          <a:solidFill>
-            <a:schemeClr val="accent1"/>
-          </a:solidFill>
-          <a:ln/>
-        </p:spPr>
-      </p:sp>
-      <p:sp>
-        <p:nvSpPr>
-          <p:cNvPr id="16" name="l234"/>
-          <p:cNvSpPr/>
-          <p:nvPr/>
-        </p:nvSpPr>
-        <p:spPr>
-          <a:xfrm>
-            <a:off x="685800" y="3108960"/>
+            <a:off x="685800" y="3154680"/>
             <a:ext cx="10820095" cy="0"/>
           </a:xfrm>
           <a:prstGeom prst="line">
@@ -6797,14 +6948,14 @@
       </p:sp>
       <p:sp>
         <p:nvSpPr>
-          <p:cNvPr id="17" name="t235"/>
-          <p:cNvSpPr txBox="1"/>
-          <p:nvPr/>
-        </p:nvSpPr>
-        <p:spPr>
-          <a:xfrm>
-            <a:off x="685800" y="3108960"/>
-            <a:ext cx="1554480" cy="822960"/>
+          <p:cNvPr id="14" name="t224"/>
+          <p:cNvSpPr txBox="1"/>
+          <p:nvPr/>
+        </p:nvSpPr>
+        <p:spPr>
+          <a:xfrm>
+            <a:off x="685800" y="3154680"/>
+            <a:ext cx="2331720" cy="914400"/>
           </a:xfrm>
           <a:prstGeom prst="rect">
             <a:avLst/>
@@ -6820,27 +6971,27 @@
               <a:buNone/>
             </a:pPr>
             <a:r>
-              <a:rPr lang="en-US" sz="1800" b="1" dirty="0">
+              <a:rPr lang="en-US" sz="1600" b="1" dirty="0">
                 <a:solidFill>
                   <a:schemeClr val="tx1"/>
                 </a:solidFill>
               </a:rPr>
-              <a:t>조원2</a:t>
-            </a:r>
-            <a:endParaRPr lang="en-US" sz="1800" dirty="0"/>
-          </a:p>
-        </p:txBody>
-      </p:sp>
-      <p:sp>
-        <p:nvSpPr>
-          <p:cNvPr id="18" name="t236"/>
-          <p:cNvSpPr txBox="1"/>
-          <p:nvPr/>
-        </p:nvSpPr>
-        <p:spPr>
-          <a:xfrm>
-            <a:off x="2240280" y="3108960"/>
-            <a:ext cx="2743200" cy="822960"/>
+              <a:t>②  브랜드 성장</a:t>
+            </a:r>
+            <a:endParaRPr lang="en-US" sz="1600" dirty="0"/>
+          </a:p>
+        </p:txBody>
+      </p:sp>
+      <p:sp>
+        <p:nvSpPr>
+          <p:cNvPr id="15" name="t225"/>
+          <p:cNvSpPr txBox="1"/>
+          <p:nvPr/>
+        </p:nvSpPr>
+        <p:spPr>
+          <a:xfrm>
+            <a:off x="3200400" y="3154680"/>
+            <a:ext cx="4114800" cy="914400"/>
           </a:xfrm>
           <a:prstGeom prst="rect">
             <a:avLst/>
@@ -6853,69 +7004,105 @@
           <a:lstStyle/>
           <a:p>
             <a:pPr indent="0" marL="0">
-              <a:buNone/>
-            </a:pPr>
-            <a:r>
-              <a:rPr lang="en-US" sz="1600" dirty="0">
+              <a:spcAft>
+                <a:spcPts val="300"/>
+              </a:spcAft>
+              <a:buNone/>
+            </a:pPr>
+            <a:r>
+              <a:rPr lang="en-US" sz="1700" b="1" dirty="0">
                 <a:solidFill>
                   <a:schemeClr val="tx1"/>
                 </a:solidFill>
               </a:rPr>
-              <a:t>②  브랜드 성장</a:t>
-            </a:r>
-            <a:endParaRPr lang="en-US" sz="1600" dirty="0"/>
-          </a:p>
-        </p:txBody>
-      </p:sp>
-      <p:sp>
-        <p:nvSpPr>
-          <p:cNvPr id="19" name="d237"/>
+              <a:t>참여적 · 후원적</a:t>
+            </a:r>
+            <a:endParaRPr lang="en-US" sz="1700" dirty="0"/>
+          </a:p>
+          <a:p>
+            <a:pPr indent="0" marL="0">
+              <a:spcAft>
+                <a:spcPts val="300"/>
+              </a:spcAft>
+              <a:buNone/>
+            </a:pPr>
+            <a:r>
+              <a:rPr lang="en-US" sz="1400" dirty="0">
+                <a:solidFill>
+                  <a:schemeClr val="tx2"/>
+                </a:solidFill>
+              </a:rPr>
+              <a:t>직원 자율에 맡기고 아이디어를 받음</a:t>
+            </a:r>
+            <a:endParaRPr lang="en-US" sz="1700" dirty="0"/>
+          </a:p>
+        </p:txBody>
+      </p:sp>
+      <p:sp>
+        <p:nvSpPr>
+          <p:cNvPr id="16" name="t226"/>
+          <p:cNvSpPr txBox="1"/>
+          <p:nvPr/>
+        </p:nvSpPr>
+        <p:spPr>
+          <a:xfrm>
+            <a:off x="7498080" y="3154680"/>
+            <a:ext cx="4693615" cy="914400"/>
+          </a:xfrm>
+          <a:prstGeom prst="rect">
+            <a:avLst/>
+          </a:prstGeom>
+          <a:noFill/>
+          <a:ln/>
+        </p:spPr>
+        <p:txBody>
+          <a:bodyPr wrap="square" lIns="0" tIns="0" rIns="0" bIns="0" rtlCol="0" anchor="ctr"/>
+          <a:lstStyle/>
+          <a:p>
+            <a:pPr indent="0" marL="0">
+              <a:spcAft>
+                <a:spcPts val="300"/>
+              </a:spcAft>
+              <a:buNone/>
+            </a:pPr>
+            <a:r>
+              <a:rPr lang="en-US" sz="1700" b="1" dirty="0">
+                <a:solidFill>
+                  <a:schemeClr val="tx1"/>
+                </a:solidFill>
+              </a:rPr>
+              <a:t>흑자 안정</a:t>
+            </a:r>
+            <a:endParaRPr lang="en-US" sz="1700" dirty="0"/>
+          </a:p>
+          <a:p>
+            <a:pPr indent="0" marL="0">
+              <a:spcAft>
+                <a:spcPts val="300"/>
+              </a:spcAft>
+              <a:buNone/>
+            </a:pPr>
+            <a:r>
+              <a:rPr lang="en-US" sz="1400" dirty="0">
+                <a:solidFill>
+                  <a:schemeClr val="tx2"/>
+                </a:solidFill>
+              </a:rPr>
+              <a:t>리더와 직원의 관계가 좋아짐</a:t>
+            </a:r>
+            <a:endParaRPr lang="en-US" sz="1700" dirty="0"/>
+          </a:p>
+        </p:txBody>
+      </p:sp>
+      <p:sp>
+        <p:nvSpPr>
+          <p:cNvPr id="17" name="l227"/>
           <p:cNvSpPr/>
           <p:nvPr/>
         </p:nvSpPr>
         <p:spPr>
           <a:xfrm>
-            <a:off x="5725630" y="3447288"/>
-            <a:ext cx="146304" cy="146304"/>
-          </a:xfrm>
-          <a:prstGeom prst="ellipse">
-            <a:avLst/>
-          </a:prstGeom>
-          <a:solidFill>
-            <a:srgbClr val="BDBDBD"/>
-          </a:solidFill>
-          <a:ln/>
-        </p:spPr>
-      </p:sp>
-      <p:sp>
-        <p:nvSpPr>
-          <p:cNvPr id="20" name="d238"/>
-          <p:cNvSpPr/>
-          <p:nvPr/>
-        </p:nvSpPr>
-        <p:spPr>
-          <a:xfrm>
-            <a:off x="7356234" y="3447288"/>
-            <a:ext cx="146304" cy="146304"/>
-          </a:xfrm>
-          <a:prstGeom prst="ellipse">
-            <a:avLst/>
-          </a:prstGeom>
-          <a:solidFill>
-            <a:srgbClr val="BDBDBD"/>
-          </a:solidFill>
-          <a:ln/>
-        </p:spPr>
-      </p:sp>
-      <p:sp>
-        <p:nvSpPr>
-          <p:cNvPr id="21" name="l239"/>
-          <p:cNvSpPr/>
-          <p:nvPr/>
-        </p:nvSpPr>
-        <p:spPr>
-          <a:xfrm>
-            <a:off x="685800" y="3931920"/>
+            <a:off x="685800" y="4069080"/>
             <a:ext cx="10820095" cy="0"/>
           </a:xfrm>
           <a:prstGeom prst="line">
@@ -6932,14 +7119,14 @@
       </p:sp>
       <p:sp>
         <p:nvSpPr>
-          <p:cNvPr id="22" name="t240"/>
-          <p:cNvSpPr txBox="1"/>
-          <p:nvPr/>
-        </p:nvSpPr>
-        <p:spPr>
-          <a:xfrm>
-            <a:off x="685800" y="3931920"/>
-            <a:ext cx="1554480" cy="822960"/>
+          <p:cNvPr id="18" name="t228"/>
+          <p:cNvSpPr txBox="1"/>
+          <p:nvPr/>
+        </p:nvSpPr>
+        <p:spPr>
+          <a:xfrm>
+            <a:off x="685800" y="4069080"/>
+            <a:ext cx="2331720" cy="914400"/>
           </a:xfrm>
           <a:prstGeom prst="rect">
             <a:avLst/>
@@ -6955,27 +7142,27 @@
               <a:buNone/>
             </a:pPr>
             <a:r>
-              <a:rPr lang="en-US" sz="1800" b="1" dirty="0">
+              <a:rPr lang="en-US" sz="1600" b="1" dirty="0">
                 <a:solidFill>
                   <a:schemeClr val="tx1"/>
                 </a:solidFill>
               </a:rPr>
-              <a:t>조원3</a:t>
-            </a:r>
-            <a:endParaRPr lang="en-US" sz="1800" dirty="0"/>
-          </a:p>
-        </p:txBody>
-      </p:sp>
-      <p:sp>
-        <p:nvSpPr>
-          <p:cNvPr id="23" name="t241"/>
-          <p:cNvSpPr txBox="1"/>
-          <p:nvPr/>
-        </p:nvSpPr>
-        <p:spPr>
-          <a:xfrm>
-            <a:off x="2240280" y="3931920"/>
-            <a:ext cx="2743200" cy="822960"/>
+              <a:t>③  구조조정</a:t>
+            </a:r>
+            <a:endParaRPr lang="en-US" sz="1600" dirty="0"/>
+          </a:p>
+        </p:txBody>
+      </p:sp>
+      <p:sp>
+        <p:nvSpPr>
+          <p:cNvPr id="19" name="t229"/>
+          <p:cNvSpPr txBox="1"/>
+          <p:nvPr/>
+        </p:nvSpPr>
+        <p:spPr>
+          <a:xfrm>
+            <a:off x="3200400" y="4069080"/>
+            <a:ext cx="4114800" cy="914400"/>
           </a:xfrm>
           <a:prstGeom prst="rect">
             <a:avLst/>
@@ -6988,89 +7175,105 @@
           <a:lstStyle/>
           <a:p>
             <a:pPr indent="0" marL="0">
-              <a:buNone/>
-            </a:pPr>
-            <a:r>
-              <a:rPr lang="en-US" sz="1600" dirty="0">
+              <a:spcAft>
+                <a:spcPts val="300"/>
+              </a:spcAft>
+              <a:buNone/>
+            </a:pPr>
+            <a:r>
+              <a:rPr lang="en-US" sz="1700" b="1" dirty="0">
                 <a:solidFill>
                   <a:schemeClr val="tx1"/>
                 </a:solidFill>
               </a:rPr>
-              <a:t>③  구조조정</a:t>
-            </a:r>
-            <a:endParaRPr lang="en-US" sz="1600" dirty="0"/>
-          </a:p>
-        </p:txBody>
-      </p:sp>
-      <p:sp>
-        <p:nvSpPr>
-          <p:cNvPr id="24" name="d242"/>
+              <a:t>다시 지시적</a:t>
+            </a:r>
+            <a:endParaRPr lang="en-US" sz="1700" dirty="0"/>
+          </a:p>
+          <a:p>
+            <a:pPr indent="0" marL="0">
+              <a:spcAft>
+                <a:spcPts val="300"/>
+              </a:spcAft>
+              <a:buNone/>
+            </a:pPr>
+            <a:r>
+              <a:rPr lang="en-US" sz="1400" dirty="0">
+                <a:solidFill>
+                  <a:schemeClr val="tx2"/>
+                </a:solidFill>
+              </a:rPr>
+              <a:t>희망퇴직 같은 어려운 결정을 직접 주도</a:t>
+            </a:r>
+            <a:endParaRPr lang="en-US" sz="1700" dirty="0"/>
+          </a:p>
+        </p:txBody>
+      </p:sp>
+      <p:sp>
+        <p:nvSpPr>
+          <p:cNvPr id="20" name="t230"/>
+          <p:cNvSpPr txBox="1"/>
+          <p:nvPr/>
+        </p:nvSpPr>
+        <p:spPr>
+          <a:xfrm>
+            <a:off x="7498080" y="4069080"/>
+            <a:ext cx="4693615" cy="914400"/>
+          </a:xfrm>
+          <a:prstGeom prst="rect">
+            <a:avLst/>
+          </a:prstGeom>
+          <a:noFill/>
+          <a:ln/>
+        </p:spPr>
+        <p:txBody>
+          <a:bodyPr wrap="square" lIns="0" tIns="0" rIns="0" bIns="0" rtlCol="0" anchor="ctr"/>
+          <a:lstStyle/>
+          <a:p>
+            <a:pPr indent="0" marL="0">
+              <a:spcAft>
+                <a:spcPts val="300"/>
+              </a:spcAft>
+              <a:buNone/>
+            </a:pPr>
+            <a:r>
+              <a:rPr lang="en-US" sz="1700" b="1" dirty="0">
+                <a:solidFill>
+                  <a:schemeClr val="tx1"/>
+                </a:solidFill>
+              </a:rPr>
+              <a:t>수수료 인하 · 실적 악화</a:t>
+            </a:r>
+            <a:endParaRPr lang="en-US" sz="1700" dirty="0"/>
+          </a:p>
+          <a:p>
+            <a:pPr indent="0" marL="0">
+              <a:spcAft>
+                <a:spcPts val="300"/>
+              </a:spcAft>
+              <a:buNone/>
+            </a:pPr>
+            <a:r>
+              <a:rPr lang="en-US" sz="1400" dirty="0">
+                <a:solidFill>
+                  <a:schemeClr val="tx2"/>
+                </a:solidFill>
+              </a:rPr>
+              <a:t>리더에게 불리한 상황으로 바뀜</a:t>
+            </a:r>
+            <a:endParaRPr lang="en-US" sz="1700" dirty="0"/>
+          </a:p>
+        </p:txBody>
+      </p:sp>
+      <p:sp>
+        <p:nvSpPr>
+          <p:cNvPr id="21" name="l231"/>
           <p:cNvSpPr/>
           <p:nvPr/>
         </p:nvSpPr>
         <p:spPr>
           <a:xfrm>
-            <a:off x="5725630" y="4270248"/>
-            <a:ext cx="146304" cy="146304"/>
-          </a:xfrm>
-          <a:prstGeom prst="ellipse">
-            <a:avLst/>
-          </a:prstGeom>
-          <a:solidFill>
-            <a:srgbClr val="BDBDBD"/>
-          </a:solidFill>
-          <a:ln/>
-        </p:spPr>
-      </p:sp>
-      <p:sp>
-        <p:nvSpPr>
-          <p:cNvPr id="25" name="d243"/>
-          <p:cNvSpPr/>
-          <p:nvPr/>
-        </p:nvSpPr>
-        <p:spPr>
-          <a:xfrm>
-            <a:off x="7356234" y="4270248"/>
-            <a:ext cx="146304" cy="146304"/>
-          </a:xfrm>
-          <a:prstGeom prst="ellipse">
-            <a:avLst/>
-          </a:prstGeom>
-          <a:solidFill>
-            <a:srgbClr val="BDBDBD"/>
-          </a:solidFill>
-          <a:ln/>
-        </p:spPr>
-      </p:sp>
-      <p:sp>
-        <p:nvSpPr>
-          <p:cNvPr id="26" name="d244"/>
-          <p:cNvSpPr/>
-          <p:nvPr/>
-        </p:nvSpPr>
-        <p:spPr>
-          <a:xfrm>
-            <a:off x="8941118" y="4224528"/>
-            <a:ext cx="237744" cy="237744"/>
-          </a:xfrm>
-          <a:prstGeom prst="ellipse">
-            <a:avLst/>
-          </a:prstGeom>
-          <a:solidFill>
-            <a:schemeClr val="accent1"/>
-          </a:solidFill>
-          <a:ln/>
-        </p:spPr>
-      </p:sp>
-      <p:sp>
-        <p:nvSpPr>
-          <p:cNvPr id="27" name="l245"/>
-          <p:cNvSpPr/>
-          <p:nvPr/>
-        </p:nvSpPr>
-        <p:spPr>
-          <a:xfrm>
-            <a:off x="685800" y="4754880"/>
+            <a:off x="685800" y="4983480"/>
             <a:ext cx="10820095" cy="0"/>
           </a:xfrm>
           <a:prstGeom prst="line">
@@ -7087,14 +7290,14 @@
       </p:sp>
       <p:sp>
         <p:nvSpPr>
-          <p:cNvPr id="28" name="t246"/>
-          <p:cNvSpPr txBox="1"/>
-          <p:nvPr/>
-        </p:nvSpPr>
-        <p:spPr>
-          <a:xfrm>
-            <a:off x="685800" y="4754880"/>
-            <a:ext cx="1554480" cy="822960"/>
+          <p:cNvPr id="22" name="t232"/>
+          <p:cNvSpPr txBox="1"/>
+          <p:nvPr/>
+        </p:nvSpPr>
+        <p:spPr>
+          <a:xfrm>
+            <a:off x="685800" y="4983480"/>
+            <a:ext cx="2331720" cy="914400"/>
           </a:xfrm>
           <a:prstGeom prst="rect">
             <a:avLst/>
@@ -7110,27 +7313,27 @@
               <a:buNone/>
             </a:pPr>
             <a:r>
-              <a:rPr lang="en-US" sz="1800" b="1" dirty="0">
+              <a:rPr lang="en-US" sz="1600" b="1" dirty="0">
                 <a:solidFill>
                   <a:schemeClr val="tx1"/>
                 </a:solidFill>
               </a:rPr>
-              <a:t>조원4</a:t>
-            </a:r>
-            <a:endParaRPr lang="en-US" sz="1800" dirty="0"/>
-          </a:p>
-        </p:txBody>
-      </p:sp>
-      <p:sp>
-        <p:nvSpPr>
-          <p:cNvPr id="29" name="t247"/>
-          <p:cNvSpPr txBox="1"/>
-          <p:nvPr/>
-        </p:nvSpPr>
-        <p:spPr>
-          <a:xfrm>
-            <a:off x="2240280" y="4754880"/>
-            <a:ext cx="2743200" cy="822960"/>
+              <a:t>④  디지털 전환</a:t>
+            </a:r>
+            <a:endParaRPr lang="en-US" sz="1600" dirty="0"/>
+          </a:p>
+        </p:txBody>
+      </p:sp>
+      <p:sp>
+        <p:nvSpPr>
+          <p:cNvPr id="23" name="t233"/>
+          <p:cNvSpPr txBox="1"/>
+          <p:nvPr/>
+        </p:nvSpPr>
+        <p:spPr>
+          <a:xfrm>
+            <a:off x="3200400" y="4983480"/>
+            <a:ext cx="4114800" cy="914400"/>
           </a:xfrm>
           <a:prstGeom prst="rect">
             <a:avLst/>
@@ -7143,89 +7346,105 @@
           <a:lstStyle/>
           <a:p>
             <a:pPr indent="0" marL="0">
-              <a:buNone/>
-            </a:pPr>
-            <a:r>
-              <a:rPr lang="en-US" sz="1600" dirty="0">
+              <a:spcAft>
+                <a:spcPts val="300"/>
+              </a:spcAft>
+              <a:buNone/>
+            </a:pPr>
+            <a:r>
+              <a:rPr lang="en-US" sz="1700" b="1" dirty="0">
                 <a:solidFill>
                   <a:schemeClr val="tx1"/>
                 </a:solidFill>
               </a:rPr>
-              <a:t>④  디지털 전환</a:t>
-            </a:r>
-            <a:endParaRPr lang="en-US" sz="1600" dirty="0"/>
-          </a:p>
-        </p:txBody>
-      </p:sp>
-      <p:sp>
-        <p:nvSpPr>
-          <p:cNvPr id="30" name="d248"/>
+              <a:t>성취지향적</a:t>
+            </a:r>
+            <a:endParaRPr lang="en-US" sz="1700" dirty="0"/>
+          </a:p>
+          <a:p>
+            <a:pPr indent="0" marL="0">
+              <a:spcAft>
+                <a:spcPts val="300"/>
+              </a:spcAft>
+              <a:buNone/>
+            </a:pPr>
+            <a:r>
+              <a:rPr lang="en-US" sz="1400" dirty="0">
+                <a:solidFill>
+                  <a:schemeClr val="tx2"/>
+                </a:solidFill>
+              </a:rPr>
+              <a:t>AI 수출처럼 높은 목표를 제시</a:t>
+            </a:r>
+            <a:endParaRPr lang="en-US" sz="1700" dirty="0"/>
+          </a:p>
+        </p:txBody>
+      </p:sp>
+      <p:sp>
+        <p:nvSpPr>
+          <p:cNvPr id="24" name="t234"/>
+          <p:cNvSpPr txBox="1"/>
+          <p:nvPr/>
+        </p:nvSpPr>
+        <p:spPr>
+          <a:xfrm>
+            <a:off x="7498080" y="4983480"/>
+            <a:ext cx="4693615" cy="914400"/>
+          </a:xfrm>
+          <a:prstGeom prst="rect">
+            <a:avLst/>
+          </a:prstGeom>
+          <a:noFill/>
+          <a:ln/>
+        </p:spPr>
+        <p:txBody>
+          <a:bodyPr wrap="square" lIns="0" tIns="0" rIns="0" bIns="0" rtlCol="0" anchor="ctr"/>
+          <a:lstStyle/>
+          <a:p>
+            <a:pPr indent="0" marL="0">
+              <a:spcAft>
+                <a:spcPts val="300"/>
+              </a:spcAft>
+              <a:buNone/>
+            </a:pPr>
+            <a:r>
+              <a:rPr lang="en-US" sz="1700" b="1" dirty="0">
+                <a:solidFill>
+                  <a:schemeClr val="tx1"/>
+                </a:solidFill>
+              </a:rPr>
+              <a:t>빅테크 경쟁 · 고금리</a:t>
+            </a:r>
+            <a:endParaRPr lang="en-US" sz="1700" dirty="0"/>
+          </a:p>
+          <a:p>
+            <a:pPr indent="0" marL="0">
+              <a:spcAft>
+                <a:spcPts val="300"/>
+              </a:spcAft>
+              <a:buNone/>
+            </a:pPr>
+            <a:r>
+              <a:rPr lang="en-US" sz="1400" dirty="0">
+                <a:solidFill>
+                  <a:schemeClr val="tx2"/>
+                </a:solidFill>
+              </a:rPr>
+              <a:t>해 본 적 없는 새로운 과업이 늘어남</a:t>
+            </a:r>
+            <a:endParaRPr lang="en-US" sz="1700" dirty="0"/>
+          </a:p>
+        </p:txBody>
+      </p:sp>
+      <p:sp>
+        <p:nvSpPr>
+          <p:cNvPr id="25" name="l235"/>
           <p:cNvSpPr/>
           <p:nvPr/>
         </p:nvSpPr>
         <p:spPr>
           <a:xfrm>
-            <a:off x="5725630" y="5093208"/>
-            <a:ext cx="146304" cy="146304"/>
-          </a:xfrm>
-          <a:prstGeom prst="ellipse">
-            <a:avLst/>
-          </a:prstGeom>
-          <a:solidFill>
-            <a:srgbClr val="BDBDBD"/>
-          </a:solidFill>
-          <a:ln/>
-        </p:spPr>
-      </p:sp>
-      <p:sp>
-        <p:nvSpPr>
-          <p:cNvPr id="31" name="d249"/>
-          <p:cNvSpPr/>
-          <p:nvPr/>
-        </p:nvSpPr>
-        <p:spPr>
-          <a:xfrm>
-            <a:off x="7356234" y="5093208"/>
-            <a:ext cx="146304" cy="146304"/>
-          </a:xfrm>
-          <a:prstGeom prst="ellipse">
-            <a:avLst/>
-          </a:prstGeom>
-          <a:solidFill>
-            <a:srgbClr val="BDBDBD"/>
-          </a:solidFill>
-          <a:ln/>
-        </p:spPr>
-      </p:sp>
-      <p:sp>
-        <p:nvSpPr>
-          <p:cNvPr id="32" name="d250"/>
-          <p:cNvSpPr/>
-          <p:nvPr/>
-        </p:nvSpPr>
-        <p:spPr>
-          <a:xfrm>
-            <a:off x="10571721" y="5047488"/>
-            <a:ext cx="237744" cy="237744"/>
-          </a:xfrm>
-          <a:prstGeom prst="ellipse">
-            <a:avLst/>
-          </a:prstGeom>
-          <a:solidFill>
-            <a:schemeClr val="accent1"/>
-          </a:solidFill>
-          <a:ln/>
-        </p:spPr>
-      </p:sp>
-      <p:sp>
-        <p:nvSpPr>
-          <p:cNvPr id="33" name="l251"/>
-          <p:cNvSpPr/>
-          <p:nvPr/>
-        </p:nvSpPr>
-        <p:spPr>
-          <a:xfrm>
-            <a:off x="685800" y="5577840"/>
+            <a:off x="685800" y="5897880"/>
             <a:ext cx="10820095" cy="0"/>
           </a:xfrm>
           <a:prstGeom prst="line">
@@ -7239,184 +7458,6 @@
             <a:prstDash val="solid"/>
           </a:ln>
         </p:spPr>
-      </p:sp>
-      <p:sp>
-        <p:nvSpPr>
-          <p:cNvPr id="34" name="d252"/>
-          <p:cNvSpPr/>
-          <p:nvPr/>
-        </p:nvSpPr>
-        <p:spPr>
-          <a:xfrm>
-            <a:off x="685800" y="5870448"/>
-            <a:ext cx="237744" cy="237744"/>
-          </a:xfrm>
-          <a:prstGeom prst="ellipse">
-            <a:avLst/>
-          </a:prstGeom>
-          <a:solidFill>
-            <a:schemeClr val="accent1"/>
-          </a:solidFill>
-          <a:ln/>
-        </p:spPr>
-      </p:sp>
-      <p:sp>
-        <p:nvSpPr>
-          <p:cNvPr id="35" name="t253"/>
-          <p:cNvSpPr txBox="1"/>
-          <p:nvPr/>
-        </p:nvSpPr>
-        <p:spPr>
-          <a:xfrm>
-            <a:off x="1051560" y="5852160"/>
-            <a:ext cx="1097280" cy="274320"/>
-          </a:xfrm>
-          <a:prstGeom prst="rect">
-            <a:avLst/>
-          </a:prstGeom>
-          <a:noFill/>
-          <a:ln/>
-        </p:spPr>
-        <p:txBody>
-          <a:bodyPr wrap="square" lIns="0" tIns="0" rIns="0" bIns="0" rtlCol="0" anchor="ctr"/>
-          <a:lstStyle/>
-          <a:p>
-            <a:pPr indent="0" marL="0">
-              <a:buNone/>
-            </a:pPr>
-            <a:r>
-              <a:rPr lang="en-US" sz="1300" dirty="0">
-                <a:solidFill>
-                  <a:schemeClr val="tx2"/>
-                </a:solidFill>
-              </a:rPr>
-              <a:t>담당자</a:t>
-            </a:r>
-            <a:endParaRPr lang="en-US" sz="1300" dirty="0"/>
-          </a:p>
-        </p:txBody>
-      </p:sp>
-      <p:sp>
-        <p:nvSpPr>
-          <p:cNvPr id="36" name="d254"/>
-          <p:cNvSpPr/>
-          <p:nvPr/>
-        </p:nvSpPr>
-        <p:spPr>
-          <a:xfrm>
-            <a:off x="2194560" y="5916168"/>
-            <a:ext cx="146304" cy="146304"/>
-          </a:xfrm>
-          <a:prstGeom prst="ellipse">
-            <a:avLst/>
-          </a:prstGeom>
-          <a:solidFill>
-            <a:srgbClr val="BDBDBD"/>
-          </a:solidFill>
-          <a:ln/>
-        </p:spPr>
-      </p:sp>
-      <p:sp>
-        <p:nvSpPr>
-          <p:cNvPr id="37" name="t255"/>
-          <p:cNvSpPr txBox="1"/>
-          <p:nvPr/>
-        </p:nvSpPr>
-        <p:spPr>
-          <a:xfrm>
-            <a:off x="2468880" y="5852160"/>
-            <a:ext cx="1828800" cy="274320"/>
-          </a:xfrm>
-          <a:prstGeom prst="rect">
-            <a:avLst/>
-          </a:prstGeom>
-          <a:noFill/>
-          <a:ln/>
-        </p:spPr>
-        <p:txBody>
-          <a:bodyPr wrap="square" lIns="0" tIns="0" rIns="0" bIns="0" rtlCol="0" anchor="ctr"/>
-          <a:lstStyle/>
-          <a:p>
-            <a:pPr indent="0" marL="0">
-              <a:buNone/>
-            </a:pPr>
-            <a:r>
-              <a:rPr lang="en-US" sz="1300" dirty="0">
-                <a:solidFill>
-                  <a:schemeClr val="tx2"/>
-                </a:solidFill>
-              </a:rPr>
-              <a:t>자기 시기 담당</a:t>
-            </a:r>
-            <a:endParaRPr lang="en-US" sz="1300" dirty="0"/>
-          </a:p>
-        </p:txBody>
-      </p:sp>
-      <p:sp>
-        <p:nvSpPr>
-          <p:cNvPr id="38" name="t256"/>
-          <p:cNvSpPr txBox="1"/>
-          <p:nvPr/>
-        </p:nvSpPr>
-        <p:spPr>
-          <a:xfrm>
-            <a:off x="4800600" y="5852160"/>
-            <a:ext cx="6705295" cy="274320"/>
-          </a:xfrm>
-          <a:prstGeom prst="rect">
-            <a:avLst/>
-          </a:prstGeom>
-          <a:noFill/>
-          <a:ln/>
-        </p:spPr>
-        <p:txBody>
-          <a:bodyPr wrap="square" lIns="0" tIns="0" rIns="0" bIns="0" rtlCol="0" anchor="ctr"/>
-          <a:lstStyle/>
-          <a:p>
-            <a:pPr algn="r" indent="0" marL="0">
-              <a:buNone/>
-            </a:pPr>
-            <a:r>
-              <a:rPr lang="en-US" sz="1300" dirty="0">
-                <a:solidFill>
-                  <a:schemeClr val="tx2"/>
-                </a:solidFill>
-              </a:rPr>
-              <a:t>발표자 2명 · 자료와 수치 최종 확인은 전원 교차 검토</a:t>
-            </a:r>
-            <a:endParaRPr lang="en-US" sz="1300" dirty="0"/>
-          </a:p>
-        </p:txBody>
-      </p:sp>
-      <p:sp>
-        <p:nvSpPr>
-          <p:cNvPr id="40" name="Text 0"/>
-          <p:cNvSpPr/>
-          <p:nvPr>
-            <p:ph idx="102" type="body" hasCustomPrompt="1"/>
-          </p:nvPr>
-        </p:nvSpPr>
-        <p:spPr>
-          <a:xfrm>
-            <a:off x="685800" y="6336792"/>
-            <a:ext cx="9692640" cy="256032"/>
-          </a:xfrm>
-          <a:prstGeom prst="rect">
-            <a:avLst/>
-          </a:prstGeom>
-          <a:noFill/>
-          <a:ln/>
-        </p:spPr>
-        <p:txBody>
-          <a:bodyPr wrap="square" lIns="0" tIns="0" rIns="0" bIns="0" rtlCol="0" anchor="ctr"/>
-          <a:lstStyle/>
-          <a:p>
-            <a:pPr indent="0" marL="0">
-              <a:buNone/>
-            </a:pPr>
-            <a:endParaRPr lang="en-US" sz="1000" dirty="0"/>
-          </a:p>
-        </p:txBody>
       </p:sp>
       <p:sp>
         <p:nvSpPr>
@@ -7520,7 +7561,7 @@
                   <a:schemeClr val="tx2"/>
                 </a:solidFill>
               </a:rPr>
-              <a:t>05  팀플 추진 일정</a:t>
+              <a:t>03  팀플 보고서 작성 방법 · 평가 방향</a:t>
             </a:r>
             <a:endParaRPr lang="en-US" sz="1200" dirty="0"/>
           </a:p>
@@ -7558,7 +7599,7 @@
                   <a:schemeClr val="tx1"/>
                 </a:solidFill>
               </a:rPr>
-              <a:t>11월 26일 보고서 제출, 11월 30일 최종 발표</a:t>
+              <a:t>잘한 점만큼 아쉬운 점도 같이 평가</a:t>
             </a:r>
             <a:endParaRPr lang="en-US" sz="2800" dirty="0"/>
           </a:p>
@@ -7566,314 +7607,88 @@
       </p:sp>
       <p:sp>
         <p:nvSpPr>
-          <p:cNvPr id="4" name="t257"/>
-          <p:cNvSpPr txBox="1"/>
-          <p:nvPr/>
-        </p:nvSpPr>
-        <p:spPr>
-          <a:xfrm>
-            <a:off x="3611880" y="1783080"/>
-            <a:ext cx="1239469" cy="548640"/>
-          </a:xfrm>
-          <a:prstGeom prst="rect">
-            <a:avLst/>
-          </a:prstGeom>
-          <a:noFill/>
-          <a:ln/>
-        </p:spPr>
-        <p:txBody>
-          <a:bodyPr wrap="square" lIns="0" tIns="0" rIns="0" bIns="0" rtlCol="0" anchor="t"/>
-          <a:lstStyle/>
-          <a:p>
-            <a:pPr indent="0" marL="0">
-              <a:buNone/>
-            </a:pPr>
-            <a:r>
-              <a:rPr lang="en-US" sz="1400" b="1" dirty="0">
+          <p:cNvPr id="4" name="Text 0"/>
+          <p:cNvSpPr/>
+          <p:nvPr>
+            <p:ph idx="102" type="body" hasCustomPrompt="1"/>
+          </p:nvPr>
+        </p:nvSpPr>
+        <p:spPr>
+          <a:xfrm>
+            <a:off x="685800" y="6336792"/>
+            <a:ext cx="9692640" cy="256032"/>
+          </a:xfrm>
+          <a:prstGeom prst="rect">
+            <a:avLst/>
+          </a:prstGeom>
+          <a:noFill/>
+          <a:ln/>
+        </p:spPr>
+        <p:txBody>
+          <a:bodyPr wrap="square" lIns="0" tIns="0" rIns="0" bIns="0" rtlCol="0" anchor="ctr"/>
+          <a:lstStyle/>
+          <a:p>
+            <a:pPr indent="0" marL="0">
+              <a:buNone/>
+            </a:pPr>
+            <a:r>
+              <a:rPr lang="en-US" sz="1000" dirty="0">
+                <a:solidFill>
+                  <a:schemeClr val="tx2"/>
+                </a:solidFill>
+              </a:rPr>
+              <a:t>출처: 더팩트 「애플페이 도입과 정태영 전략」(2023.3), 한국경제 「현대카드 200여명 희망퇴직」(2019.1), 현대카드 뉴스룸 「금융업계 최초 AI 소프트웨어 수출」</a:t>
+            </a:r>
+            <a:endParaRPr lang="en-US" sz="1000" dirty="0"/>
+          </a:p>
+        </p:txBody>
+      </p:sp>
+      <p:sp>
+        <p:nvSpPr>
+          <p:cNvPr id="5" name="t236"/>
+          <p:cNvSpPr txBox="1"/>
+          <p:nvPr/>
+        </p:nvSpPr>
+        <p:spPr>
+          <a:xfrm>
+            <a:off x="685800" y="1783080"/>
+            <a:ext cx="5135728" cy="411480"/>
+          </a:xfrm>
+          <a:prstGeom prst="rect">
+            <a:avLst/>
+          </a:prstGeom>
+          <a:noFill/>
+          <a:ln/>
+        </p:spPr>
+        <p:txBody>
+          <a:bodyPr wrap="square" lIns="0" tIns="0" rIns="0" bIns="0" rtlCol="0" anchor="ctr"/>
+          <a:lstStyle/>
+          <a:p>
+            <a:pPr indent="0" marL="0">
+              <a:buNone/>
+            </a:pPr>
+            <a:r>
+              <a:rPr lang="en-US" sz="1800" b="1" dirty="0">
                 <a:solidFill>
                   <a:schemeClr val="tx1"/>
                 </a:solidFill>
               </a:rPr>
-              <a:t>1주</a:t>
-            </a:r>
-            <a:endParaRPr lang="en-US" sz="1400" dirty="0"/>
-          </a:p>
-          <a:p>
-            <a:pPr indent="0" marL="0">
-              <a:buNone/>
-            </a:pPr>
-            <a:r>
-              <a:rPr lang="en-US" sz="1200" dirty="0">
-                <a:solidFill>
-                  <a:schemeClr val="tx2"/>
-                </a:solidFill>
-              </a:rPr>
-              <a:t>10.26–11.1</a:t>
-            </a:r>
-            <a:endParaRPr lang="en-US" sz="1400" dirty="0"/>
-          </a:p>
-        </p:txBody>
-      </p:sp>
-      <p:sp>
-        <p:nvSpPr>
-          <p:cNvPr id="5" name="t258"/>
-          <p:cNvSpPr txBox="1"/>
-          <p:nvPr/>
-        </p:nvSpPr>
-        <p:spPr>
-          <a:xfrm>
-            <a:off x="4942789" y="1783080"/>
-            <a:ext cx="1239469" cy="548640"/>
-          </a:xfrm>
-          <a:prstGeom prst="rect">
-            <a:avLst/>
-          </a:prstGeom>
-          <a:noFill/>
-          <a:ln/>
-        </p:spPr>
-        <p:txBody>
-          <a:bodyPr wrap="square" lIns="0" tIns="0" rIns="0" bIns="0" rtlCol="0" anchor="t"/>
-          <a:lstStyle/>
-          <a:p>
-            <a:pPr indent="0" marL="0">
-              <a:buNone/>
-            </a:pPr>
-            <a:r>
-              <a:rPr lang="en-US" sz="1400" b="1" dirty="0">
-                <a:solidFill>
-                  <a:schemeClr val="tx1"/>
-                </a:solidFill>
-              </a:rPr>
-              <a:t>2주</a:t>
-            </a:r>
-            <a:endParaRPr lang="en-US" sz="1400" dirty="0"/>
-          </a:p>
-          <a:p>
-            <a:pPr indent="0" marL="0">
-              <a:buNone/>
-            </a:pPr>
-            <a:r>
-              <a:rPr lang="en-US" sz="1200" dirty="0">
-                <a:solidFill>
-                  <a:schemeClr val="tx2"/>
-                </a:solidFill>
-              </a:rPr>
-              <a:t>11.2–11.8</a:t>
-            </a:r>
-            <a:endParaRPr lang="en-US" sz="1400" dirty="0"/>
-          </a:p>
-        </p:txBody>
-      </p:sp>
-      <p:sp>
-        <p:nvSpPr>
-          <p:cNvPr id="6" name="t259"/>
-          <p:cNvSpPr txBox="1"/>
-          <p:nvPr/>
-        </p:nvSpPr>
-        <p:spPr>
-          <a:xfrm>
-            <a:off x="6273698" y="1783080"/>
-            <a:ext cx="1239469" cy="548640"/>
-          </a:xfrm>
-          <a:prstGeom prst="rect">
-            <a:avLst/>
-          </a:prstGeom>
-          <a:noFill/>
-          <a:ln/>
-        </p:spPr>
-        <p:txBody>
-          <a:bodyPr wrap="square" lIns="0" tIns="0" rIns="0" bIns="0" rtlCol="0" anchor="t"/>
-          <a:lstStyle/>
-          <a:p>
-            <a:pPr indent="0" marL="0">
-              <a:buNone/>
-            </a:pPr>
-            <a:r>
-              <a:rPr lang="en-US" sz="1400" b="1" dirty="0">
-                <a:solidFill>
-                  <a:schemeClr val="tx1"/>
-                </a:solidFill>
-              </a:rPr>
-              <a:t>3주</a:t>
-            </a:r>
-            <a:endParaRPr lang="en-US" sz="1400" dirty="0"/>
-          </a:p>
-          <a:p>
-            <a:pPr indent="0" marL="0">
-              <a:buNone/>
-            </a:pPr>
-            <a:r>
-              <a:rPr lang="en-US" sz="1200" dirty="0">
-                <a:solidFill>
-                  <a:schemeClr val="tx2"/>
-                </a:solidFill>
-              </a:rPr>
-              <a:t>11.9–11.15</a:t>
-            </a:r>
-            <a:endParaRPr lang="en-US" sz="1400" dirty="0"/>
-          </a:p>
-        </p:txBody>
-      </p:sp>
-      <p:sp>
-        <p:nvSpPr>
-          <p:cNvPr id="7" name="t260"/>
-          <p:cNvSpPr txBox="1"/>
-          <p:nvPr/>
-        </p:nvSpPr>
-        <p:spPr>
-          <a:xfrm>
-            <a:off x="7604608" y="1783080"/>
-            <a:ext cx="1239469" cy="548640"/>
-          </a:xfrm>
-          <a:prstGeom prst="rect">
-            <a:avLst/>
-          </a:prstGeom>
-          <a:noFill/>
-          <a:ln/>
-        </p:spPr>
-        <p:txBody>
-          <a:bodyPr wrap="square" lIns="0" tIns="0" rIns="0" bIns="0" rtlCol="0" anchor="t"/>
-          <a:lstStyle/>
-          <a:p>
-            <a:pPr indent="0" marL="0">
-              <a:buNone/>
-            </a:pPr>
-            <a:r>
-              <a:rPr lang="en-US" sz="1400" b="1" dirty="0">
-                <a:solidFill>
-                  <a:schemeClr val="tx1"/>
-                </a:solidFill>
-              </a:rPr>
-              <a:t>4주</a:t>
-            </a:r>
-            <a:endParaRPr lang="en-US" sz="1400" dirty="0"/>
-          </a:p>
-          <a:p>
-            <a:pPr indent="0" marL="0">
-              <a:buNone/>
-            </a:pPr>
-            <a:r>
-              <a:rPr lang="en-US" sz="1200" dirty="0">
-                <a:solidFill>
-                  <a:schemeClr val="tx2"/>
-                </a:solidFill>
-              </a:rPr>
-              <a:t>11.16–11.22</a:t>
-            </a:r>
-            <a:endParaRPr lang="en-US" sz="1400" dirty="0"/>
-          </a:p>
-        </p:txBody>
-      </p:sp>
-      <p:sp>
-        <p:nvSpPr>
-          <p:cNvPr id="8" name="t261"/>
-          <p:cNvSpPr txBox="1"/>
-          <p:nvPr/>
-        </p:nvSpPr>
-        <p:spPr>
-          <a:xfrm>
-            <a:off x="8935517" y="1783080"/>
-            <a:ext cx="1239469" cy="548640"/>
-          </a:xfrm>
-          <a:prstGeom prst="rect">
-            <a:avLst/>
-          </a:prstGeom>
-          <a:noFill/>
-          <a:ln/>
-        </p:spPr>
-        <p:txBody>
-          <a:bodyPr wrap="square" lIns="0" tIns="0" rIns="0" bIns="0" rtlCol="0" anchor="t"/>
-          <a:lstStyle/>
-          <a:p>
-            <a:pPr indent="0" marL="0">
-              <a:buNone/>
-            </a:pPr>
-            <a:r>
-              <a:rPr lang="en-US" sz="1400" b="1" dirty="0">
-                <a:solidFill>
-                  <a:schemeClr val="tx1"/>
-                </a:solidFill>
-              </a:rPr>
-              <a:t>5주</a:t>
-            </a:r>
-            <a:endParaRPr lang="en-US" sz="1400" dirty="0"/>
-          </a:p>
-          <a:p>
-            <a:pPr indent="0" marL="0">
-              <a:buNone/>
-            </a:pPr>
-            <a:r>
-              <a:rPr lang="en-US" sz="1200" dirty="0">
-                <a:solidFill>
-                  <a:schemeClr val="tx2"/>
-                </a:solidFill>
-              </a:rPr>
-              <a:t>11.23–11.29</a:t>
-            </a:r>
-            <a:endParaRPr lang="en-US" sz="1400" dirty="0"/>
-          </a:p>
-        </p:txBody>
-      </p:sp>
-      <p:sp>
-        <p:nvSpPr>
-          <p:cNvPr id="9" name="t262"/>
-          <p:cNvSpPr txBox="1"/>
-          <p:nvPr/>
-        </p:nvSpPr>
-        <p:spPr>
-          <a:xfrm>
-            <a:off x="10266426" y="1783080"/>
-            <a:ext cx="1239469" cy="548640"/>
-          </a:xfrm>
-          <a:prstGeom prst="rect">
-            <a:avLst/>
-          </a:prstGeom>
-          <a:noFill/>
-          <a:ln/>
-        </p:spPr>
-        <p:txBody>
-          <a:bodyPr wrap="square" lIns="0" tIns="0" rIns="0" bIns="0" rtlCol="0" anchor="t"/>
-          <a:lstStyle/>
-          <a:p>
-            <a:pPr indent="0" marL="0">
-              <a:buNone/>
-            </a:pPr>
-            <a:r>
-              <a:rPr lang="en-US" sz="1400" b="1" dirty="0">
-                <a:solidFill>
-                  <a:schemeClr val="tx1"/>
-                </a:solidFill>
-              </a:rPr>
-              <a:t>발표</a:t>
-            </a:r>
-            <a:endParaRPr lang="en-US" sz="1400" dirty="0"/>
-          </a:p>
-          <a:p>
-            <a:pPr indent="0" marL="0">
-              <a:buNone/>
-            </a:pPr>
-            <a:r>
-              <a:rPr lang="en-US" sz="1200" dirty="0">
-                <a:solidFill>
-                  <a:schemeClr val="tx2"/>
-                </a:solidFill>
-              </a:rPr>
-              <a:t>11.30</a:t>
-            </a:r>
-            <a:endParaRPr lang="en-US" sz="1400" dirty="0"/>
-          </a:p>
-        </p:txBody>
-      </p:sp>
-      <p:sp>
-        <p:nvSpPr>
-          <p:cNvPr id="10" name="l263"/>
+              <a:t>성과</a:t>
+            </a:r>
+            <a:endParaRPr lang="en-US" sz="1800" dirty="0"/>
+          </a:p>
+        </p:txBody>
+      </p:sp>
+      <p:sp>
+        <p:nvSpPr>
+          <p:cNvPr id="6" name="l237"/>
           <p:cNvSpPr/>
           <p:nvPr/>
         </p:nvSpPr>
         <p:spPr>
           <a:xfrm>
-            <a:off x="685800" y="2377440"/>
-            <a:ext cx="10820095" cy="0"/>
+            <a:off x="685800" y="2286000"/>
+            <a:ext cx="5135728" cy="0"/>
           </a:xfrm>
           <a:prstGeom prst="line">
             <a:avLst/>
@@ -7889,517 +7704,70 @@
       </p:sp>
       <p:sp>
         <p:nvSpPr>
-          <p:cNvPr id="11" name="l264"/>
+          <p:cNvPr id="7" name="t238"/>
+          <p:cNvSpPr txBox="1"/>
+          <p:nvPr/>
+        </p:nvSpPr>
+        <p:spPr>
+          <a:xfrm>
+            <a:off x="685800" y="2286000"/>
+            <a:ext cx="5135728" cy="868680"/>
+          </a:xfrm>
+          <a:prstGeom prst="rect">
+            <a:avLst/>
+          </a:prstGeom>
+          <a:noFill/>
+          <a:ln/>
+        </p:spPr>
+        <p:txBody>
+          <a:bodyPr wrap="square" lIns="0" tIns="0" rIns="0" bIns="0" rtlCol="0" anchor="ctr"/>
+          <a:lstStyle/>
+          <a:p>
+            <a:pPr indent="0" marL="0">
+              <a:spcAft>
+                <a:spcPts val="300"/>
+              </a:spcAft>
+              <a:buNone/>
+            </a:pPr>
+            <a:r>
+              <a:rPr lang="en-US" sz="1700" b="1" dirty="0">
+                <a:solidFill>
+                  <a:schemeClr val="tx1"/>
+                </a:solidFill>
+              </a:rPr>
+              <a:t>업계 하위권에서 이용실적 2위로</a:t>
+            </a:r>
+            <a:endParaRPr lang="en-US" sz="1700" dirty="0"/>
+          </a:p>
+          <a:p>
+            <a:pPr indent="0" marL="0">
+              <a:spcAft>
+                <a:spcPts val="300"/>
+              </a:spcAft>
+              <a:buNone/>
+            </a:pPr>
+            <a:r>
+              <a:rPr lang="en-US" sz="1400" dirty="0">
+                <a:solidFill>
+                  <a:schemeClr val="tx2"/>
+                </a:solidFill>
+              </a:rPr>
+              <a:t>2025년 신용카드 이용실적 점유율 19.3%</a:t>
+            </a:r>
+            <a:endParaRPr lang="en-US" sz="1700" dirty="0"/>
+          </a:p>
+        </p:txBody>
+      </p:sp>
+      <p:sp>
+        <p:nvSpPr>
+          <p:cNvPr id="8" name="l239"/>
           <p:cNvSpPr/>
           <p:nvPr/>
         </p:nvSpPr>
         <p:spPr>
           <a:xfrm>
-            <a:off x="4851349" y="2468880"/>
-            <a:ext cx="0" cy="3017520"/>
-          </a:xfrm>
-          <a:prstGeom prst="line">
-            <a:avLst/>
-          </a:prstGeom>
-          <a:noFill/>
-          <a:ln w="9525">
-            <a:solidFill>
-              <a:srgbClr val="ECECEC"/>
-            </a:solidFill>
-            <a:prstDash val="solid"/>
-          </a:ln>
-        </p:spPr>
-      </p:sp>
-      <p:sp>
-        <p:nvSpPr>
-          <p:cNvPr id="12" name="l265"/>
-          <p:cNvSpPr/>
-          <p:nvPr/>
-        </p:nvSpPr>
-        <p:spPr>
-          <a:xfrm>
-            <a:off x="6182258" y="2468880"/>
-            <a:ext cx="0" cy="3017520"/>
-          </a:xfrm>
-          <a:prstGeom prst="line">
-            <a:avLst/>
-          </a:prstGeom>
-          <a:noFill/>
-          <a:ln w="9525">
-            <a:solidFill>
-              <a:srgbClr val="ECECEC"/>
-            </a:solidFill>
-            <a:prstDash val="solid"/>
-          </a:ln>
-        </p:spPr>
-      </p:sp>
-      <p:sp>
-        <p:nvSpPr>
-          <p:cNvPr id="13" name="l266"/>
-          <p:cNvSpPr/>
-          <p:nvPr/>
-        </p:nvSpPr>
-        <p:spPr>
-          <a:xfrm>
-            <a:off x="7513168" y="2468880"/>
-            <a:ext cx="0" cy="3017520"/>
-          </a:xfrm>
-          <a:prstGeom prst="line">
-            <a:avLst/>
-          </a:prstGeom>
-          <a:noFill/>
-          <a:ln w="9525">
-            <a:solidFill>
-              <a:srgbClr val="ECECEC"/>
-            </a:solidFill>
-            <a:prstDash val="solid"/>
-          </a:ln>
-        </p:spPr>
-      </p:sp>
-      <p:sp>
-        <p:nvSpPr>
-          <p:cNvPr id="14" name="l267"/>
-          <p:cNvSpPr/>
-          <p:nvPr/>
-        </p:nvSpPr>
-        <p:spPr>
-          <a:xfrm>
-            <a:off x="8844077" y="2468880"/>
-            <a:ext cx="0" cy="3017520"/>
-          </a:xfrm>
-          <a:prstGeom prst="line">
-            <a:avLst/>
-          </a:prstGeom>
-          <a:noFill/>
-          <a:ln w="9525">
-            <a:solidFill>
-              <a:srgbClr val="ECECEC"/>
-            </a:solidFill>
-            <a:prstDash val="solid"/>
-          </a:ln>
-        </p:spPr>
-      </p:sp>
-      <p:sp>
-        <p:nvSpPr>
-          <p:cNvPr id="15" name="l268"/>
-          <p:cNvSpPr/>
-          <p:nvPr/>
-        </p:nvSpPr>
-        <p:spPr>
-          <a:xfrm>
-            <a:off x="10174986" y="2468880"/>
-            <a:ext cx="0" cy="3017520"/>
-          </a:xfrm>
-          <a:prstGeom prst="line">
-            <a:avLst/>
-          </a:prstGeom>
-          <a:noFill/>
-          <a:ln w="9525">
-            <a:solidFill>
-              <a:srgbClr val="ECECEC"/>
-            </a:solidFill>
-            <a:prstDash val="solid"/>
-          </a:ln>
-        </p:spPr>
-      </p:sp>
-      <p:sp>
-        <p:nvSpPr>
-          <p:cNvPr id="16" name="t269"/>
-          <p:cNvSpPr txBox="1"/>
-          <p:nvPr/>
-        </p:nvSpPr>
-        <p:spPr>
-          <a:xfrm>
-            <a:off x="685800" y="2468880"/>
-            <a:ext cx="2651760" cy="502920"/>
-          </a:xfrm>
-          <a:prstGeom prst="rect">
-            <a:avLst/>
-          </a:prstGeom>
-          <a:noFill/>
-          <a:ln/>
-        </p:spPr>
-        <p:txBody>
-          <a:bodyPr wrap="square" lIns="0" tIns="0" rIns="0" bIns="0" rtlCol="0" anchor="ctr"/>
-          <a:lstStyle/>
-          <a:p>
-            <a:pPr indent="0" marL="0">
-              <a:buNone/>
-            </a:pPr>
-            <a:r>
-              <a:rPr lang="en-US" sz="1500" dirty="0">
-                <a:solidFill>
-                  <a:schemeClr val="tx1"/>
-                </a:solidFill>
-              </a:rPr>
-              <a:t>계획 발표 · 피드백 반영</a:t>
-            </a:r>
-            <a:endParaRPr lang="en-US" sz="1500" dirty="0"/>
-          </a:p>
-        </p:txBody>
-      </p:sp>
-      <p:sp>
-        <p:nvSpPr>
-          <p:cNvPr id="17" name="rr270"/>
-          <p:cNvSpPr/>
-          <p:nvPr/>
-        </p:nvSpPr>
-        <p:spPr>
-          <a:xfrm>
-            <a:off x="3593592" y="2610612"/>
-            <a:ext cx="1184605" cy="219456"/>
-          </a:xfrm>
-          <a:prstGeom prst="roundRect">
-            <a:avLst>
-              <a:gd name="adj" fmla="val 20833"/>
-            </a:avLst>
-          </a:prstGeom>
-          <a:solidFill>
-            <a:srgbClr val="BDBDBD"/>
-          </a:solidFill>
-          <a:ln/>
-        </p:spPr>
-      </p:sp>
-      <p:sp>
-        <p:nvSpPr>
-          <p:cNvPr id="18" name="t271"/>
-          <p:cNvSpPr txBox="1"/>
-          <p:nvPr/>
-        </p:nvSpPr>
-        <p:spPr>
-          <a:xfrm>
-            <a:off x="685800" y="2971800"/>
-            <a:ext cx="2651760" cy="502920"/>
-          </a:xfrm>
-          <a:prstGeom prst="rect">
-            <a:avLst/>
-          </a:prstGeom>
-          <a:noFill/>
-          <a:ln/>
-        </p:spPr>
-        <p:txBody>
-          <a:bodyPr wrap="square" lIns="0" tIns="0" rIns="0" bIns="0" rtlCol="0" anchor="ctr"/>
-          <a:lstStyle/>
-          <a:p>
-            <a:pPr indent="0" marL="0">
-              <a:buNone/>
-            </a:pPr>
-            <a:r>
-              <a:rPr lang="en-US" sz="1500" dirty="0">
-                <a:solidFill>
-                  <a:schemeClr val="tx1"/>
-                </a:solidFill>
-              </a:rPr>
-              <a:t>자료 수집</a:t>
-            </a:r>
-            <a:endParaRPr lang="en-US" sz="1500" dirty="0"/>
-          </a:p>
-        </p:txBody>
-      </p:sp>
-      <p:sp>
-        <p:nvSpPr>
-          <p:cNvPr id="19" name="rr272"/>
-          <p:cNvSpPr/>
-          <p:nvPr/>
-        </p:nvSpPr>
-        <p:spPr>
-          <a:xfrm>
-            <a:off x="3593592" y="3113532"/>
-            <a:ext cx="2515514" cy="219456"/>
-          </a:xfrm>
-          <a:prstGeom prst="roundRect">
-            <a:avLst>
-              <a:gd name="adj" fmla="val 20833"/>
-            </a:avLst>
-          </a:prstGeom>
-          <a:solidFill>
-            <a:srgbClr val="BDBDBD"/>
-          </a:solidFill>
-          <a:ln/>
-        </p:spPr>
-      </p:sp>
-      <p:sp>
-        <p:nvSpPr>
-          <p:cNvPr id="20" name="t273"/>
-          <p:cNvSpPr txBox="1"/>
-          <p:nvPr/>
-        </p:nvSpPr>
-        <p:spPr>
-          <a:xfrm>
-            <a:off x="685800" y="3474720"/>
-            <a:ext cx="2651760" cy="502920"/>
-          </a:xfrm>
-          <a:prstGeom prst="rect">
-            <a:avLst/>
-          </a:prstGeom>
-          <a:noFill/>
-          <a:ln/>
-        </p:spPr>
-        <p:txBody>
-          <a:bodyPr wrap="square" lIns="0" tIns="0" rIns="0" bIns="0" rtlCol="0" anchor="ctr"/>
-          <a:lstStyle/>
-          <a:p>
-            <a:pPr indent="0" marL="0">
-              <a:buNone/>
-            </a:pPr>
-            <a:r>
-              <a:rPr lang="en-US" sz="1500" dirty="0">
-                <a:solidFill>
-                  <a:schemeClr val="tx1"/>
-                </a:solidFill>
-              </a:rPr>
-              <a:t>시기별 사례 분석</a:t>
-            </a:r>
-            <a:endParaRPr lang="en-US" sz="1500" dirty="0"/>
-          </a:p>
-        </p:txBody>
-      </p:sp>
-      <p:sp>
-        <p:nvSpPr>
-          <p:cNvPr id="21" name="rr274"/>
-          <p:cNvSpPr/>
-          <p:nvPr/>
-        </p:nvSpPr>
-        <p:spPr>
-          <a:xfrm>
-            <a:off x="4924501" y="3616452"/>
-            <a:ext cx="2515514" cy="219456"/>
-          </a:xfrm>
-          <a:prstGeom prst="roundRect">
-            <a:avLst>
-              <a:gd name="adj" fmla="val 20833"/>
-            </a:avLst>
-          </a:prstGeom>
-          <a:solidFill>
-            <a:srgbClr val="BDBDBD"/>
-          </a:solidFill>
-          <a:ln/>
-        </p:spPr>
-      </p:sp>
-      <p:sp>
-        <p:nvSpPr>
-          <p:cNvPr id="22" name="t275"/>
-          <p:cNvSpPr txBox="1"/>
-          <p:nvPr/>
-        </p:nvSpPr>
-        <p:spPr>
-          <a:xfrm>
-            <a:off x="685800" y="3977640"/>
-            <a:ext cx="2651760" cy="502920"/>
-          </a:xfrm>
-          <a:prstGeom prst="rect">
-            <a:avLst/>
-          </a:prstGeom>
-          <a:noFill/>
-          <a:ln/>
-        </p:spPr>
-        <p:txBody>
-          <a:bodyPr wrap="square" lIns="0" tIns="0" rIns="0" bIns="0" rtlCol="0" anchor="ctr"/>
-          <a:lstStyle/>
-          <a:p>
-            <a:pPr indent="0" marL="0">
-              <a:buNone/>
-            </a:pPr>
-            <a:r>
-              <a:rPr lang="en-US" sz="1500" dirty="0">
-                <a:solidFill>
-                  <a:schemeClr val="tx1"/>
-                </a:solidFill>
-              </a:rPr>
-              <a:t>이론 연계 · 평가</a:t>
-            </a:r>
-            <a:endParaRPr lang="en-US" sz="1500" dirty="0"/>
-          </a:p>
-        </p:txBody>
-      </p:sp>
-      <p:sp>
-        <p:nvSpPr>
-          <p:cNvPr id="23" name="rr276"/>
-          <p:cNvSpPr/>
-          <p:nvPr/>
-        </p:nvSpPr>
-        <p:spPr>
-          <a:xfrm>
-            <a:off x="6255410" y="4119372"/>
-            <a:ext cx="2515514" cy="219456"/>
-          </a:xfrm>
-          <a:prstGeom prst="roundRect">
-            <a:avLst>
-              <a:gd name="adj" fmla="val 20833"/>
-            </a:avLst>
-          </a:prstGeom>
-          <a:solidFill>
-            <a:srgbClr val="BDBDBD"/>
-          </a:solidFill>
-          <a:ln/>
-        </p:spPr>
-      </p:sp>
-      <p:sp>
-        <p:nvSpPr>
-          <p:cNvPr id="24" name="t277"/>
-          <p:cNvSpPr txBox="1"/>
-          <p:nvPr/>
-        </p:nvSpPr>
-        <p:spPr>
-          <a:xfrm>
-            <a:off x="685800" y="4480560"/>
-            <a:ext cx="2651760" cy="502920"/>
-          </a:xfrm>
-          <a:prstGeom prst="rect">
-            <a:avLst/>
-          </a:prstGeom>
-          <a:noFill/>
-          <a:ln/>
-        </p:spPr>
-        <p:txBody>
-          <a:bodyPr wrap="square" lIns="0" tIns="0" rIns="0" bIns="0" rtlCol="0" anchor="ctr"/>
-          <a:lstStyle/>
-          <a:p>
-            <a:pPr indent="0" marL="0">
-              <a:buNone/>
-            </a:pPr>
-            <a:r>
-              <a:rPr lang="en-US" sz="1500" dirty="0">
-                <a:solidFill>
-                  <a:schemeClr val="tx1"/>
-                </a:solidFill>
-              </a:rPr>
-              <a:t>보고서 작성 · 검토</a:t>
-            </a:r>
-            <a:endParaRPr lang="en-US" sz="1500" dirty="0"/>
-          </a:p>
-        </p:txBody>
-      </p:sp>
-      <p:sp>
-        <p:nvSpPr>
-          <p:cNvPr id="25" name="rr278"/>
-          <p:cNvSpPr/>
-          <p:nvPr/>
-        </p:nvSpPr>
-        <p:spPr>
-          <a:xfrm>
-            <a:off x="7586320" y="4622292"/>
-            <a:ext cx="1945125" cy="219456"/>
-          </a:xfrm>
-          <a:prstGeom prst="roundRect">
-            <a:avLst>
-              <a:gd name="adj" fmla="val 20833"/>
-            </a:avLst>
-          </a:prstGeom>
-          <a:solidFill>
-            <a:schemeClr val="tx1"/>
-          </a:solidFill>
-          <a:ln/>
-        </p:spPr>
-      </p:sp>
-      <p:sp>
-        <p:nvSpPr>
-          <p:cNvPr id="26" name="t279"/>
-          <p:cNvSpPr txBox="1"/>
-          <p:nvPr/>
-        </p:nvSpPr>
-        <p:spPr>
-          <a:xfrm>
-            <a:off x="685800" y="4983480"/>
-            <a:ext cx="2651760" cy="502920"/>
-          </a:xfrm>
-          <a:prstGeom prst="rect">
-            <a:avLst/>
-          </a:prstGeom>
-          <a:noFill/>
-          <a:ln/>
-        </p:spPr>
-        <p:txBody>
-          <a:bodyPr wrap="square" lIns="0" tIns="0" rIns="0" bIns="0" rtlCol="0" anchor="ctr"/>
-          <a:lstStyle/>
-          <a:p>
-            <a:pPr indent="0" marL="0">
-              <a:buNone/>
-            </a:pPr>
-            <a:r>
-              <a:rPr lang="en-US" sz="1500" dirty="0">
-                <a:solidFill>
-                  <a:schemeClr val="tx1"/>
-                </a:solidFill>
-              </a:rPr>
-              <a:t>발표 자료 · 리허설</a:t>
-            </a:r>
-            <a:endParaRPr lang="en-US" sz="1500" dirty="0"/>
-          </a:p>
-        </p:txBody>
-      </p:sp>
-      <p:sp>
-        <p:nvSpPr>
-          <p:cNvPr id="27" name="rr280"/>
-          <p:cNvSpPr/>
-          <p:nvPr/>
-        </p:nvSpPr>
-        <p:spPr>
-          <a:xfrm>
-            <a:off x="8917229" y="5125212"/>
-            <a:ext cx="1850060" cy="219456"/>
-          </a:xfrm>
-          <a:prstGeom prst="roundRect">
-            <a:avLst>
-              <a:gd name="adj" fmla="val 20833"/>
-            </a:avLst>
-          </a:prstGeom>
-          <a:solidFill>
-            <a:schemeClr val="tx1"/>
-          </a:solidFill>
-          <a:ln/>
-        </p:spPr>
-      </p:sp>
-      <p:sp>
-        <p:nvSpPr>
-          <p:cNvPr id="28" name="ms-4"/>
-          <p:cNvSpPr/>
-          <p:nvPr/>
-        </p:nvSpPr>
-        <p:spPr>
-          <a:xfrm>
-            <a:off x="9467436" y="4594860"/>
-            <a:ext cx="274320" cy="274320"/>
-          </a:xfrm>
-          <a:prstGeom prst="diamond">
-            <a:avLst/>
-          </a:prstGeom>
-          <a:solidFill>
-            <a:schemeClr val="accent1"/>
-          </a:solidFill>
-          <a:ln/>
-        </p:spPr>
-      </p:sp>
-      <p:sp>
-        <p:nvSpPr>
-          <p:cNvPr id="29" name="ms-5"/>
-          <p:cNvSpPr/>
-          <p:nvPr/>
-        </p:nvSpPr>
-        <p:spPr>
-          <a:xfrm>
-            <a:off x="10703281" y="5097780"/>
-            <a:ext cx="274320" cy="274320"/>
-          </a:xfrm>
-          <a:prstGeom prst="diamond">
-            <a:avLst/>
-          </a:prstGeom>
-          <a:solidFill>
-            <a:schemeClr val="accent1"/>
-          </a:solidFill>
-          <a:ln/>
-        </p:spPr>
-      </p:sp>
-      <p:sp>
-        <p:nvSpPr>
-          <p:cNvPr id="30" name="l281"/>
-          <p:cNvSpPr/>
-          <p:nvPr/>
-        </p:nvSpPr>
-        <p:spPr>
-          <a:xfrm>
-            <a:off x="685800" y="5623560"/>
-            <a:ext cx="10820095" cy="0"/>
+            <a:off x="685800" y="3154680"/>
+            <a:ext cx="5135728" cy="0"/>
           </a:xfrm>
           <a:prstGeom prst="line">
             <a:avLst/>
@@ -8415,34 +7783,442 @@
       </p:sp>
       <p:sp>
         <p:nvSpPr>
-          <p:cNvPr id="31" name="ms-legend"/>
+          <p:cNvPr id="9" name="t240"/>
+          <p:cNvSpPr txBox="1"/>
+          <p:nvPr/>
+        </p:nvSpPr>
+        <p:spPr>
+          <a:xfrm>
+            <a:off x="685800" y="3154680"/>
+            <a:ext cx="5135728" cy="868680"/>
+          </a:xfrm>
+          <a:prstGeom prst="rect">
+            <a:avLst/>
+          </a:prstGeom>
+          <a:noFill/>
+          <a:ln/>
+        </p:spPr>
+        <p:txBody>
+          <a:bodyPr wrap="square" lIns="0" tIns="0" rIns="0" bIns="0" rtlCol="0" anchor="ctr"/>
+          <a:lstStyle/>
+          <a:p>
+            <a:pPr indent="0" marL="0">
+              <a:spcAft>
+                <a:spcPts val="300"/>
+              </a:spcAft>
+              <a:buNone/>
+            </a:pPr>
+            <a:r>
+              <a:rPr lang="en-US" sz="1700" b="1" dirty="0">
+                <a:solidFill>
+                  <a:schemeClr val="tx1"/>
+                </a:solidFill>
+              </a:rPr>
+              <a:t>디자인과 문화로 브랜드 차별화</a:t>
+            </a:r>
+            <a:endParaRPr lang="en-US" sz="1700" dirty="0"/>
+          </a:p>
+          <a:p>
+            <a:pPr indent="0" marL="0">
+              <a:spcAft>
+                <a:spcPts val="300"/>
+              </a:spcAft>
+              <a:buNone/>
+            </a:pPr>
+            <a:r>
+              <a:rPr lang="en-US" sz="1400" dirty="0">
+                <a:solidFill>
+                  <a:schemeClr val="tx2"/>
+                </a:solidFill>
+              </a:rPr>
+              <a:t>the Black, 슈퍼콘서트, 라이브러리</a:t>
+            </a:r>
+            <a:endParaRPr lang="en-US" sz="1700" dirty="0"/>
+          </a:p>
+        </p:txBody>
+      </p:sp>
+      <p:sp>
+        <p:nvSpPr>
+          <p:cNvPr id="10" name="l241"/>
           <p:cNvSpPr/>
           <p:nvPr/>
         </p:nvSpPr>
         <p:spPr>
           <a:xfrm>
-            <a:off x="685800" y="5897880"/>
-            <a:ext cx="219456" cy="219456"/>
-          </a:xfrm>
-          <a:prstGeom prst="diamond">
+            <a:off x="685800" y="4023360"/>
+            <a:ext cx="5135728" cy="0"/>
+          </a:xfrm>
+          <a:prstGeom prst="line">
+            <a:avLst/>
+          </a:prstGeom>
+          <a:noFill/>
+          <a:ln w="9525">
+            <a:solidFill>
+              <a:srgbClr val="D9D9D9"/>
+            </a:solidFill>
+            <a:prstDash val="solid"/>
+          </a:ln>
+        </p:spPr>
+      </p:sp>
+      <p:sp>
+        <p:nvSpPr>
+          <p:cNvPr id="11" name="t242"/>
+          <p:cNvSpPr txBox="1"/>
+          <p:nvPr/>
+        </p:nvSpPr>
+        <p:spPr>
+          <a:xfrm>
+            <a:off x="685800" y="4023360"/>
+            <a:ext cx="5135728" cy="868680"/>
+          </a:xfrm>
+          <a:prstGeom prst="rect">
+            <a:avLst/>
+          </a:prstGeom>
+          <a:noFill/>
+          <a:ln/>
+        </p:spPr>
+        <p:txBody>
+          <a:bodyPr wrap="square" lIns="0" tIns="0" rIns="0" bIns="0" rtlCol="0" anchor="ctr"/>
+          <a:lstStyle/>
+          <a:p>
+            <a:pPr indent="0" marL="0">
+              <a:spcAft>
+                <a:spcPts val="300"/>
+              </a:spcAft>
+              <a:buNone/>
+            </a:pPr>
+            <a:r>
+              <a:rPr lang="en-US" sz="1700" b="1" dirty="0">
+                <a:solidFill>
+                  <a:schemeClr val="tx1"/>
+                </a:solidFill>
+              </a:rPr>
+              <a:t>금융권 첫 AI 소프트웨어 수출</a:t>
+            </a:r>
+            <a:endParaRPr lang="en-US" sz="1700" dirty="0"/>
+          </a:p>
+          <a:p>
+            <a:pPr indent="0" marL="0">
+              <a:spcAft>
+                <a:spcPts val="300"/>
+              </a:spcAft>
+              <a:buNone/>
+            </a:pPr>
+            <a:r>
+              <a:rPr lang="en-US" sz="1400" dirty="0">
+                <a:solidFill>
+                  <a:schemeClr val="tx2"/>
+                </a:solidFill>
+              </a:rPr>
+              <a:t>AI 플랫폼 ‘유니버스’, 일본 카드사</a:t>
+            </a:r>
+            <a:endParaRPr lang="en-US" sz="1700" dirty="0"/>
+          </a:p>
+        </p:txBody>
+      </p:sp>
+      <p:sp>
+        <p:nvSpPr>
+          <p:cNvPr id="12" name="t243"/>
+          <p:cNvSpPr txBox="1"/>
+          <p:nvPr/>
+        </p:nvSpPr>
+        <p:spPr>
+          <a:xfrm>
+            <a:off x="6370168" y="1783080"/>
+            <a:ext cx="5135728" cy="411480"/>
+          </a:xfrm>
+          <a:prstGeom prst="rect">
+            <a:avLst/>
+          </a:prstGeom>
+          <a:noFill/>
+          <a:ln/>
+        </p:spPr>
+        <p:txBody>
+          <a:bodyPr wrap="square" lIns="0" tIns="0" rIns="0" bIns="0" rtlCol="0" anchor="ctr"/>
+          <a:lstStyle/>
+          <a:p>
+            <a:pPr indent="0" marL="0">
+              <a:buNone/>
+            </a:pPr>
+            <a:r>
+              <a:rPr lang="en-US" sz="1800" b="1" dirty="0">
+                <a:solidFill>
+                  <a:schemeClr val="accent1"/>
+                </a:solidFill>
+              </a:rPr>
+              <a:t>한계 · 논란</a:t>
+            </a:r>
+            <a:endParaRPr lang="en-US" sz="1800" dirty="0"/>
+          </a:p>
+        </p:txBody>
+      </p:sp>
+      <p:sp>
+        <p:nvSpPr>
+          <p:cNvPr id="13" name="l244"/>
+          <p:cNvSpPr/>
+          <p:nvPr/>
+        </p:nvSpPr>
+        <p:spPr>
+          <a:xfrm>
+            <a:off x="6370168" y="2286000"/>
+            <a:ext cx="5135728" cy="0"/>
+          </a:xfrm>
+          <a:prstGeom prst="line">
+            <a:avLst/>
+          </a:prstGeom>
+          <a:noFill/>
+          <a:ln w="15875">
+            <a:solidFill>
+              <a:srgbClr val="141414"/>
+            </a:solidFill>
+            <a:prstDash val="solid"/>
+          </a:ln>
+        </p:spPr>
+      </p:sp>
+      <p:sp>
+        <p:nvSpPr>
+          <p:cNvPr id="14" name="t245"/>
+          <p:cNvSpPr txBox="1"/>
+          <p:nvPr/>
+        </p:nvSpPr>
+        <p:spPr>
+          <a:xfrm>
+            <a:off x="6370168" y="2286000"/>
+            <a:ext cx="5135728" cy="868680"/>
+          </a:xfrm>
+          <a:prstGeom prst="rect">
+            <a:avLst/>
+          </a:prstGeom>
+          <a:noFill/>
+          <a:ln/>
+        </p:spPr>
+        <p:txBody>
+          <a:bodyPr wrap="square" lIns="0" tIns="0" rIns="0" bIns="0" rtlCol="0" anchor="ctr"/>
+          <a:lstStyle/>
+          <a:p>
+            <a:pPr indent="0" marL="0">
+              <a:spcAft>
+                <a:spcPts val="300"/>
+              </a:spcAft>
+              <a:buNone/>
+            </a:pPr>
+            <a:r>
+              <a:rPr lang="en-US" sz="1700" b="1" dirty="0">
+                <a:solidFill>
+                  <a:schemeClr val="tx1"/>
+                </a:solidFill>
+              </a:rPr>
+              <a:t>창사 첫 희망퇴직</a:t>
+            </a:r>
+            <a:endParaRPr lang="en-US" sz="1700" dirty="0"/>
+          </a:p>
+          <a:p>
+            <a:pPr indent="0" marL="0">
+              <a:spcAft>
+                <a:spcPts val="300"/>
+              </a:spcAft>
+              <a:buNone/>
+            </a:pPr>
+            <a:r>
+              <a:rPr lang="en-US" sz="1400" dirty="0">
+                <a:solidFill>
+                  <a:schemeClr val="tx2"/>
+                </a:solidFill>
+              </a:rPr>
+              <a:t>2018년 수수료 인하 뒤 실적 악화</a:t>
+            </a:r>
+            <a:endParaRPr lang="en-US" sz="1700" dirty="0"/>
+          </a:p>
+        </p:txBody>
+      </p:sp>
+      <p:sp>
+        <p:nvSpPr>
+          <p:cNvPr id="15" name="l246"/>
+          <p:cNvSpPr/>
+          <p:nvPr/>
+        </p:nvSpPr>
+        <p:spPr>
+          <a:xfrm>
+            <a:off x="6370168" y="3154680"/>
+            <a:ext cx="5135728" cy="0"/>
+          </a:xfrm>
+          <a:prstGeom prst="line">
+            <a:avLst/>
+          </a:prstGeom>
+          <a:noFill/>
+          <a:ln w="9525">
+            <a:solidFill>
+              <a:srgbClr val="D9D9D9"/>
+            </a:solidFill>
+            <a:prstDash val="solid"/>
+          </a:ln>
+        </p:spPr>
+      </p:sp>
+      <p:sp>
+        <p:nvSpPr>
+          <p:cNvPr id="16" name="t247"/>
+          <p:cNvSpPr txBox="1"/>
+          <p:nvPr/>
+        </p:nvSpPr>
+        <p:spPr>
+          <a:xfrm>
+            <a:off x="6370168" y="3154680"/>
+            <a:ext cx="5135728" cy="868680"/>
+          </a:xfrm>
+          <a:prstGeom prst="rect">
+            <a:avLst/>
+          </a:prstGeom>
+          <a:noFill/>
+          <a:ln/>
+        </p:spPr>
+        <p:txBody>
+          <a:bodyPr wrap="square" lIns="0" tIns="0" rIns="0" bIns="0" rtlCol="0" anchor="ctr"/>
+          <a:lstStyle/>
+          <a:p>
+            <a:pPr indent="0" marL="0">
+              <a:spcAft>
+                <a:spcPts val="300"/>
+              </a:spcAft>
+              <a:buNone/>
+            </a:pPr>
+            <a:r>
+              <a:rPr lang="en-US" sz="1700" b="1" dirty="0">
+                <a:solidFill>
+                  <a:schemeClr val="tx1"/>
+                </a:solidFill>
+              </a:rPr>
+              <a:t>애플페이 수수료 부담 논란</a:t>
+            </a:r>
+            <a:endParaRPr lang="en-US" sz="1700" dirty="0"/>
+          </a:p>
+          <a:p>
+            <a:pPr indent="0" marL="0">
+              <a:spcAft>
+                <a:spcPts val="300"/>
+              </a:spcAft>
+              <a:buNone/>
+            </a:pPr>
+            <a:r>
+              <a:rPr lang="en-US" sz="1400" dirty="0">
+                <a:solidFill>
+                  <a:schemeClr val="tx2"/>
+                </a:solidFill>
+              </a:rPr>
+              <a:t>2023년 국내 첫 도입 당시</a:t>
+            </a:r>
+            <a:endParaRPr lang="en-US" sz="1700" dirty="0"/>
+          </a:p>
+        </p:txBody>
+      </p:sp>
+      <p:sp>
+        <p:nvSpPr>
+          <p:cNvPr id="17" name="l248"/>
+          <p:cNvSpPr/>
+          <p:nvPr/>
+        </p:nvSpPr>
+        <p:spPr>
+          <a:xfrm>
+            <a:off x="6370168" y="4023360"/>
+            <a:ext cx="5135728" cy="0"/>
+          </a:xfrm>
+          <a:prstGeom prst="line">
+            <a:avLst/>
+          </a:prstGeom>
+          <a:noFill/>
+          <a:ln w="9525">
+            <a:solidFill>
+              <a:srgbClr val="D9D9D9"/>
+            </a:solidFill>
+            <a:prstDash val="solid"/>
+          </a:ln>
+        </p:spPr>
+      </p:sp>
+      <p:sp>
+        <p:nvSpPr>
+          <p:cNvPr id="18" name="t249"/>
+          <p:cNvSpPr txBox="1"/>
+          <p:nvPr/>
+        </p:nvSpPr>
+        <p:spPr>
+          <a:xfrm>
+            <a:off x="6370168" y="4023360"/>
+            <a:ext cx="5135728" cy="868680"/>
+          </a:xfrm>
+          <a:prstGeom prst="rect">
+            <a:avLst/>
+          </a:prstGeom>
+          <a:noFill/>
+          <a:ln/>
+        </p:spPr>
+        <p:txBody>
+          <a:bodyPr wrap="square" lIns="0" tIns="0" rIns="0" bIns="0" rtlCol="0" anchor="ctr"/>
+          <a:lstStyle/>
+          <a:p>
+            <a:pPr indent="0" marL="0">
+              <a:spcAft>
+                <a:spcPts val="300"/>
+              </a:spcAft>
+              <a:buNone/>
+            </a:pPr>
+            <a:r>
+              <a:rPr lang="en-US" sz="1700" b="1" dirty="0">
+                <a:solidFill>
+                  <a:schemeClr val="tx1"/>
+                </a:solidFill>
+              </a:rPr>
+              <a:t>리더 한 사람에게 기대는 구조</a:t>
+            </a:r>
+            <a:endParaRPr lang="en-US" sz="1700" dirty="0"/>
+          </a:p>
+          <a:p>
+            <a:pPr indent="0" marL="0">
+              <a:spcAft>
+                <a:spcPts val="300"/>
+              </a:spcAft>
+              <a:buNone/>
+            </a:pPr>
+            <a:r>
+              <a:rPr lang="en-US" sz="1400" dirty="0">
+                <a:solidFill>
+                  <a:schemeClr val="tx2"/>
+                </a:solidFill>
+              </a:rPr>
+              <a:t>오너 일가 출신, 23년 장기 재임</a:t>
+            </a:r>
+            <a:endParaRPr lang="en-US" sz="1700" dirty="0"/>
+          </a:p>
+        </p:txBody>
+      </p:sp>
+      <p:sp>
+        <p:nvSpPr>
+          <p:cNvPr id="19" name="r250"/>
+          <p:cNvSpPr/>
+          <p:nvPr/>
+        </p:nvSpPr>
+        <p:spPr>
+          <a:xfrm>
+            <a:off x="685800" y="5120640"/>
+            <a:ext cx="10820095" cy="777240"/>
+          </a:xfrm>
+          <a:prstGeom prst="rect">
             <a:avLst/>
           </a:prstGeom>
           <a:solidFill>
-            <a:schemeClr val="accent1"/>
+            <a:schemeClr val="bg2"/>
           </a:solidFill>
           <a:ln/>
         </p:spPr>
       </p:sp>
       <p:sp>
         <p:nvSpPr>
-          <p:cNvPr id="32" name="t282"/>
-          <p:cNvSpPr txBox="1"/>
-          <p:nvPr/>
-        </p:nvSpPr>
-        <p:spPr>
-          <a:xfrm>
-            <a:off x="1051560" y="5852160"/>
-            <a:ext cx="6400800" cy="310896"/>
+          <p:cNvPr id="20" name="t251"/>
+          <p:cNvSpPr txBox="1"/>
+          <p:nvPr/>
+        </p:nvSpPr>
+        <p:spPr>
+          <a:xfrm>
+            <a:off x="1005840" y="5120640"/>
+            <a:ext cx="10180015" cy="777240"/>
           </a:xfrm>
           <a:prstGeom prst="rect">
             <a:avLst/>
@@ -8458,80 +8234,25 @@
               <a:buNone/>
             </a:pPr>
             <a:r>
-              <a:rPr lang="en-US" sz="1400" b="1" dirty="0">
+              <a:rPr lang="en-US" sz="1600" b="1" dirty="0">
                 <a:solidFill>
                   <a:schemeClr val="tx1"/>
                 </a:solidFill>
               </a:rPr>
-              <a:t>11.26(목) 최종보고서 제출   ·   11.30(월) 최종 발표</a:t>
-            </a:r>
-            <a:endParaRPr lang="en-US" sz="1400" dirty="0"/>
-          </a:p>
-        </p:txBody>
-      </p:sp>
-      <p:sp>
-        <p:nvSpPr>
-          <p:cNvPr id="33" name="t283"/>
-          <p:cNvSpPr txBox="1"/>
-          <p:nvPr/>
-        </p:nvSpPr>
-        <p:spPr>
-          <a:xfrm>
-            <a:off x="7086600" y="5852160"/>
-            <a:ext cx="3687775" cy="310896"/>
-          </a:xfrm>
-          <a:prstGeom prst="rect">
-            <a:avLst/>
-          </a:prstGeom>
-          <a:noFill/>
-          <a:ln/>
-        </p:spPr>
-        <p:txBody>
-          <a:bodyPr wrap="square" lIns="0" tIns="0" rIns="0" bIns="0" rtlCol="0" anchor="ctr"/>
-          <a:lstStyle/>
-          <a:p>
-            <a:pPr algn="r" indent="0" marL="0">
-              <a:buNone/>
-            </a:pPr>
-            <a:r>
-              <a:rPr lang="en-US" sz="1300" dirty="0">
-                <a:solidFill>
-                  <a:schemeClr val="tx2"/>
-                </a:solidFill>
-              </a:rPr>
-              <a:t>매주 1회 정기 회의로 진행 상황 점검</a:t>
-            </a:r>
-            <a:endParaRPr lang="en-US" sz="1300" dirty="0"/>
-          </a:p>
-        </p:txBody>
-      </p:sp>
-      <p:sp>
-        <p:nvSpPr>
-          <p:cNvPr id="35" name="Text 0"/>
-          <p:cNvSpPr/>
-          <p:nvPr>
-            <p:ph idx="102" type="body" hasCustomPrompt="1"/>
-          </p:nvPr>
-        </p:nvSpPr>
-        <p:spPr>
-          <a:xfrm>
-            <a:off x="685800" y="6336792"/>
-            <a:ext cx="9692640" cy="256032"/>
-          </a:xfrm>
-          <a:prstGeom prst="rect">
-            <a:avLst/>
-          </a:prstGeom>
-          <a:noFill/>
-          <a:ln/>
-        </p:spPr>
-        <p:txBody>
-          <a:bodyPr wrap="square" lIns="0" tIns="0" rIns="0" bIns="0" rtlCol="0" anchor="ctr"/>
-          <a:lstStyle/>
-          <a:p>
-            <a:pPr indent="0" marL="0">
-              <a:buNone/>
-            </a:pPr>
-            <a:endParaRPr lang="en-US" sz="1000" dirty="0"/>
+              <a:t>결론에서는  </a:t>
+            </a:r>
+            <a:pPr indent="0" marL="0">
+              <a:buNone/>
+            </a:pPr>
+            <a:r>
+              <a:rPr lang="en-US" sz="1600" dirty="0">
+                <a:solidFill>
+                  <a:schemeClr val="tx1"/>
+                </a:solidFill>
+              </a:rPr>
+              <a:t>두 관점 중 어느 쪽이 정태영의 23년을 더 잘 설명하는지 판단</a:t>
+            </a:r>
+            <a:endParaRPr lang="en-US" sz="1600" dirty="0"/>
           </a:p>
         </p:txBody>
       </p:sp>
@@ -8683,7 +8404,7 @@
       </p:sp>
       <p:sp>
         <p:nvSpPr>
-          <p:cNvPr id="4" name="t284"/>
+          <p:cNvPr id="4" name="t252"/>
           <p:cNvSpPr txBox="1"/>
           <p:nvPr/>
         </p:nvSpPr>
@@ -8931,7 +8652,7 @@
       </p:sp>
       <p:sp>
         <p:nvSpPr>
-          <p:cNvPr id="5" name="t285"/>
+          <p:cNvPr id="5" name="t253"/>
           <p:cNvSpPr txBox="1"/>
           <p:nvPr/>
         </p:nvSpPr>
@@ -9109,11 +8830,74 @@
             </a:r>
             <a:endParaRPr lang="en-US" sz="1200" dirty="0"/>
           </a:p>
-        </p:txBody>
-      </p:sp>
-      <p:sp>
-        <p:nvSpPr>
-          <p:cNvPr id="6" name="Text 0"/>
+          <a:p>
+            <a:pPr indent="0" marL="0">
+              <a:lnSpc>
+                <a:spcPct val="110000"/>
+              </a:lnSpc>
+              <a:spcAft>
+                <a:spcPts val="400"/>
+              </a:spcAft>
+              <a:buNone/>
+            </a:pPr>
+            <a:r>
+              <a:rPr lang="en-US" sz="1200" dirty="0">
+                <a:solidFill>
+                  <a:schemeClr val="tx2"/>
+                </a:solidFill>
+              </a:rPr>
+              <a:t>현대카드 뉴스룸, 현대카드, 금융업계 최초 AI 소프트웨어 수출</a:t>
+            </a:r>
+            <a:endParaRPr lang="en-US" sz="1200" dirty="0"/>
+          </a:p>
+          <a:p>
+            <a:pPr indent="0" marL="0">
+              <a:lnSpc>
+                <a:spcPct val="110000"/>
+              </a:lnSpc>
+              <a:spcBef>
+                <a:spcPts val="1000"/>
+              </a:spcBef>
+              <a:spcAft>
+                <a:spcPts val="400"/>
+              </a:spcAft>
+              <a:buNone/>
+            </a:pPr>
+            <a:r>
+              <a:rPr lang="en-US" sz="1300" b="1" dirty="0">
+                <a:solidFill>
+                  <a:schemeClr val="tx1"/>
+                </a:solidFill>
+              </a:rPr>
+              <a:t>이론</a:t>
+            </a:r>
+            <a:endParaRPr lang="en-US" sz="1200" dirty="0"/>
+          </a:p>
+          <a:p>
+            <a:pPr indent="0" marL="0">
+              <a:lnSpc>
+                <a:spcPct val="110000"/>
+              </a:lnSpc>
+              <a:spcAft>
+                <a:spcPts val="400"/>
+              </a:spcAft>
+              <a:buNone/>
+            </a:pPr>
+            <a:r>
+              <a:rPr lang="en-US" sz="1200" dirty="0">
+                <a:solidFill>
+                  <a:schemeClr val="tx2"/>
+                </a:solidFill>
+              </a:rPr>
+              <a:t>리더십 강의자료 2장 – 6장</a:t>
+            </a:r>
+            <a:endParaRPr lang="en-US" sz="1200" dirty="0"/>
+          </a:p>
+        </p:txBody>
+      </p:sp>
+      <p:sp>
+        <p:nvSpPr>
+          <p:cNvPr id="7" name="Text 0"/>
           <p:cNvSpPr/>
           <p:nvPr>
             <p:ph idx="102" type="body" hasCustomPrompt="1"/>
@@ -9213,7 +8997,7 @@
       </p:grpSpPr>
       <p:sp>
         <p:nvSpPr>
-          <p:cNvPr id="2" name="t286"/>
+          <p:cNvPr id="2" name="t254"/>
           <p:cNvSpPr txBox="1"/>
           <p:nvPr/>
         </p:nvSpPr>
@@ -9249,7 +9033,7 @@
       </p:sp>
       <p:sp>
         <p:nvSpPr>
-          <p:cNvPr id="3" name="t287"/>
+          <p:cNvPr id="3" name="t255"/>
           <p:cNvSpPr txBox="1"/>
           <p:nvPr/>
         </p:nvSpPr>
@@ -9277,7 +9061,7 @@
                   <a:srgbClr val="A8A8A8"/>
                 </a:solidFill>
               </a:rPr>
-              <a:t>질의응답</a:t>
+              <a:t>질문 받겠습니다</a:t>
             </a:r>
             <a:endParaRPr lang="en-US" sz="2000" dirty="0"/>
           </a:p>
@@ -9285,7 +9069,7 @@
       </p:sp>
       <p:sp>
         <p:nvSpPr>
-          <p:cNvPr id="4" name="t288"/>
+          <p:cNvPr id="4" name="t256"/>
           <p:cNvSpPr txBox="1"/>
           <p:nvPr/>
         </p:nvSpPr>
@@ -9341,7 +9125,7 @@
       </p:sp>
       <p:sp>
         <p:nvSpPr>
-          <p:cNvPr id="5" name="rr289"/>
+          <p:cNvPr id="5" name="rr257"/>
           <p:cNvSpPr/>
           <p:nvPr/>
         </p:nvSpPr>
@@ -9363,7 +9147,7 @@
       </p:sp>
       <p:sp>
         <p:nvSpPr>
-          <p:cNvPr id="6" name="rr290"/>
+          <p:cNvPr id="6" name="rr258"/>
           <p:cNvSpPr/>
           <p:nvPr/>
         </p:nvSpPr>
@@ -9518,8 +9302,8 @@
         </p:nvSpPr>
         <p:spPr>
           <a:xfrm>
-            <a:off x="4572000" y="1088136"/>
-            <a:ext cx="731520" cy="365760"/>
+            <a:off x="4572000" y="1490472"/>
+            <a:ext cx="731520" cy="411480"/>
           </a:xfrm>
           <a:prstGeom prst="rect">
             <a:avLst/>
@@ -9535,14 +9319,14 @@
               <a:buNone/>
             </a:pPr>
             <a:r>
-              <a:rPr lang="en-US" sz="1600" b="1" dirty="0">
+              <a:rPr lang="en-US" sz="1800" b="1" dirty="0">
                 <a:solidFill>
                   <a:schemeClr val="accent1"/>
                 </a:solidFill>
               </a:rPr>
               <a:t>01</a:t>
             </a:r>
-            <a:endParaRPr lang="en-US" sz="1600" dirty="0"/>
+            <a:endParaRPr lang="en-US" sz="1800" dirty="0"/>
           </a:p>
         </p:txBody>
       </p:sp>
@@ -9554,8 +9338,8 @@
         </p:nvSpPr>
         <p:spPr>
           <a:xfrm>
-            <a:off x="5349240" y="1051560"/>
-            <a:ext cx="6156655" cy="411480"/>
+            <a:off x="5394960" y="1435608"/>
+            <a:ext cx="6110935" cy="502920"/>
           </a:xfrm>
           <a:prstGeom prst="rect">
             <a:avLst/>
@@ -9571,14 +9355,14 @@
               <a:buNone/>
             </a:pPr>
             <a:r>
-              <a:rPr lang="en-US" sz="2200" b="1" dirty="0">
+              <a:rPr lang="en-US" sz="2600" b="1" dirty="0">
                 <a:solidFill>
                   <a:schemeClr val="tx1"/>
                 </a:solidFill>
               </a:rPr>
               <a:t>리더 및 선정 배경</a:t>
             </a:r>
-            <a:endParaRPr lang="en-US" sz="2200" dirty="0"/>
+            <a:endParaRPr lang="en-US" sz="2600" dirty="0"/>
           </a:p>
         </p:txBody>
       </p:sp>
@@ -9590,8 +9374,8 @@
         </p:nvSpPr>
         <p:spPr>
           <a:xfrm>
-            <a:off x="5349240" y="1453896"/>
-            <a:ext cx="6156655" cy="274320"/>
+            <a:off x="5394960" y="1965960"/>
+            <a:ext cx="6110935" cy="320040"/>
           </a:xfrm>
           <a:prstGeom prst="rect">
             <a:avLst/>
@@ -9607,14 +9391,14 @@
               <a:buNone/>
             </a:pPr>
             <a:r>
-              <a:rPr lang="en-US" sz="1300" dirty="0">
+              <a:rPr lang="en-US" sz="1500" dirty="0">
                 <a:solidFill>
                   <a:schemeClr val="tx2"/>
                 </a:solidFill>
               </a:rPr>
-              <a:t>History · 선정 이유</a:t>
-            </a:r>
-            <a:endParaRPr lang="en-US" sz="1300" dirty="0"/>
+              <a:t>어떤 사람인지, 왜 골랐는지</a:t>
+            </a:r>
+            <a:endParaRPr lang="en-US" sz="1500" dirty="0"/>
           </a:p>
         </p:txBody>
       </p:sp>
@@ -9626,7 +9410,7 @@
         </p:nvSpPr>
         <p:spPr>
           <a:xfrm>
-            <a:off x="4572000" y="1856232"/>
+            <a:off x="4572000" y="2560320"/>
             <a:ext cx="6933895" cy="0"/>
           </a:xfrm>
           <a:prstGeom prst="line">
@@ -9649,8 +9433,8 @@
         </p:nvSpPr>
         <p:spPr>
           <a:xfrm>
-            <a:off x="4572000" y="2075688"/>
-            <a:ext cx="731520" cy="365760"/>
+            <a:off x="4572000" y="2907792"/>
+            <a:ext cx="731520" cy="411480"/>
           </a:xfrm>
           <a:prstGeom prst="rect">
             <a:avLst/>
@@ -9666,14 +9450,14 @@
               <a:buNone/>
             </a:pPr>
             <a:r>
-              <a:rPr lang="en-US" sz="1600" b="1" dirty="0">
+              <a:rPr lang="en-US" sz="1800" b="1" dirty="0">
                 <a:solidFill>
                   <a:schemeClr val="accent1"/>
                 </a:solidFill>
               </a:rPr>
               <a:t>02</a:t>
             </a:r>
-            <a:endParaRPr lang="en-US" sz="1600" dirty="0"/>
+            <a:endParaRPr lang="en-US" sz="1800" dirty="0"/>
           </a:p>
         </p:txBody>
       </p:sp>
@@ -9685,8 +9469,8 @@
         </p:nvSpPr>
         <p:spPr>
           <a:xfrm>
-            <a:off x="5349240" y="2039112"/>
-            <a:ext cx="6156655" cy="411480"/>
+            <a:off x="5394960" y="2852928"/>
+            <a:ext cx="6110935" cy="502920"/>
           </a:xfrm>
           <a:prstGeom prst="rect">
             <a:avLst/>
@@ -9702,14 +9486,14 @@
               <a:buNone/>
             </a:pPr>
             <a:r>
-              <a:rPr lang="en-US" sz="2200" b="1" dirty="0">
+              <a:rPr lang="en-US" sz="2600" b="1" dirty="0">
                 <a:solidFill>
                   <a:schemeClr val="tx1"/>
                 </a:solidFill>
               </a:rPr>
               <a:t>대상 리더 간략 소개</a:t>
             </a:r>
-            <a:endParaRPr lang="en-US" sz="2200" dirty="0"/>
+            <a:endParaRPr lang="en-US" sz="2600" dirty="0"/>
           </a:p>
         </p:txBody>
       </p:sp>
@@ -9721,8 +9505,8 @@
         </p:nvSpPr>
         <p:spPr>
           <a:xfrm>
-            <a:off x="5349240" y="2441448"/>
-            <a:ext cx="6156655" cy="274320"/>
+            <a:off x="5394960" y="3383280"/>
+            <a:ext cx="6110935" cy="320040"/>
           </a:xfrm>
           <a:prstGeom prst="rect">
             <a:avLst/>
@@ -9738,14 +9522,14 @@
               <a:buNone/>
             </a:pPr>
             <a:r>
-              <a:rPr lang="en-US" sz="1300" dirty="0">
+              <a:rPr lang="en-US" sz="1500" dirty="0">
                 <a:solidFill>
                   <a:schemeClr val="tx2"/>
                 </a:solidFill>
               </a:rPr>
               <a:t>프로필 · 회사 현황 · 재무 · 주주 구성</a:t>
             </a:r>
-            <a:endParaRPr lang="en-US" sz="1300" dirty="0"/>
+            <a:endParaRPr lang="en-US" sz="1500" dirty="0"/>
           </a:p>
         </p:txBody>
       </p:sp>
@@ -9757,7 +9541,7 @@
         </p:nvSpPr>
         <p:spPr>
           <a:xfrm>
-            <a:off x="4572000" y="2843784"/>
+            <a:off x="4572000" y="3977640"/>
             <a:ext cx="6933895" cy="0"/>
           </a:xfrm>
           <a:prstGeom prst="line">
@@ -9780,8 +9564,8 @@
         </p:nvSpPr>
         <p:spPr>
           <a:xfrm>
-            <a:off x="4572000" y="3063240"/>
-            <a:ext cx="731520" cy="365760"/>
+            <a:off x="4572000" y="4325112"/>
+            <a:ext cx="731520" cy="411480"/>
           </a:xfrm>
           <a:prstGeom prst="rect">
             <a:avLst/>
@@ -9797,14 +9581,14 @@
               <a:buNone/>
             </a:pPr>
             <a:r>
-              <a:rPr lang="en-US" sz="1600" b="1" dirty="0">
+              <a:rPr lang="en-US" sz="1800" b="1" dirty="0">
                 <a:solidFill>
                   <a:schemeClr val="accent1"/>
                 </a:solidFill>
               </a:rPr>
               <a:t>03</a:t>
             </a:r>
-            <a:endParaRPr lang="en-US" sz="1600" dirty="0"/>
+            <a:endParaRPr lang="en-US" sz="1800" dirty="0"/>
           </a:p>
         </p:txBody>
       </p:sp>
@@ -9816,8 +9600,8 @@
         </p:nvSpPr>
         <p:spPr>
           <a:xfrm>
-            <a:off x="5349240" y="3026664"/>
-            <a:ext cx="6156655" cy="411480"/>
+            <a:off x="5394960" y="4270248"/>
+            <a:ext cx="6110935" cy="502920"/>
           </a:xfrm>
           <a:prstGeom prst="rect">
             <a:avLst/>
@@ -9833,14 +9617,14 @@
               <a:buNone/>
             </a:pPr>
             <a:r>
-              <a:rPr lang="en-US" sz="2200" b="1" dirty="0">
+              <a:rPr lang="en-US" sz="2600" b="1" dirty="0">
                 <a:solidFill>
                   <a:schemeClr val="tx1"/>
                 </a:solidFill>
               </a:rPr>
               <a:t>팀플 보고서 작성 방법</a:t>
             </a:r>
-            <a:endParaRPr lang="en-US" sz="2200" dirty="0"/>
+            <a:endParaRPr lang="en-US" sz="2600" dirty="0"/>
           </a:p>
         </p:txBody>
       </p:sp>
@@ -9852,8 +9636,8 @@
         </p:nvSpPr>
         <p:spPr>
           <a:xfrm>
-            <a:off x="5349240" y="3429000"/>
-            <a:ext cx="6156655" cy="274320"/>
+            <a:off x="5394960" y="4800600"/>
+            <a:ext cx="6110935" cy="320040"/>
           </a:xfrm>
           <a:prstGeom prst="rect">
             <a:avLst/>
@@ -9869,282 +9653,20 @@
               <a:buNone/>
             </a:pPr>
             <a:r>
-              <a:rPr lang="en-US" sz="1300" dirty="0">
+              <a:rPr lang="en-US" sz="1500" dirty="0">
                 <a:solidFill>
                   <a:schemeClr val="tx2"/>
                 </a:solidFill>
               </a:rPr>
-              <a:t>자료 조사 · 사례분석 프레임워크 · 이론 연계</a:t>
-            </a:r>
-            <a:endParaRPr lang="en-US" sz="1300" dirty="0"/>
-          </a:p>
-        </p:txBody>
-      </p:sp>
-      <p:sp>
-        <p:nvSpPr>
-          <p:cNvPr id="15" name="l20"/>
-          <p:cNvSpPr/>
-          <p:nvPr/>
-        </p:nvSpPr>
-        <p:spPr>
-          <a:xfrm>
-            <a:off x="4572000" y="3831336"/>
-            <a:ext cx="6933895" cy="0"/>
-          </a:xfrm>
-          <a:prstGeom prst="line">
-            <a:avLst/>
-          </a:prstGeom>
-          <a:noFill/>
-          <a:ln w="9525">
-            <a:solidFill>
-              <a:srgbClr val="D9D9D9"/>
-            </a:solidFill>
-            <a:prstDash val="solid"/>
-          </a:ln>
-        </p:spPr>
-      </p:sp>
-      <p:sp>
-        <p:nvSpPr>
-          <p:cNvPr id="16" name="t21"/>
-          <p:cNvSpPr txBox="1"/>
-          <p:nvPr/>
-        </p:nvSpPr>
-        <p:spPr>
-          <a:xfrm>
-            <a:off x="4572000" y="4050792"/>
-            <a:ext cx="731520" cy="365760"/>
-          </a:xfrm>
-          <a:prstGeom prst="rect">
-            <a:avLst/>
-          </a:prstGeom>
-          <a:noFill/>
-          <a:ln/>
-        </p:spPr>
-        <p:txBody>
-          <a:bodyPr wrap="square" lIns="0" tIns="0" rIns="0" bIns="0" rtlCol="0" anchor="ctr"/>
-          <a:lstStyle/>
-          <a:p>
-            <a:pPr indent="0" marL="0">
-              <a:buNone/>
-            </a:pPr>
-            <a:r>
-              <a:rPr lang="en-US" sz="1600" b="1" dirty="0">
-                <a:solidFill>
-                  <a:schemeClr val="accent1"/>
-                </a:solidFill>
-              </a:rPr>
-              <a:t>04</a:t>
-            </a:r>
-            <a:endParaRPr lang="en-US" sz="1600" dirty="0"/>
-          </a:p>
-        </p:txBody>
-      </p:sp>
-      <p:sp>
-        <p:nvSpPr>
-          <p:cNvPr id="17" name="t22"/>
-          <p:cNvSpPr txBox="1"/>
-          <p:nvPr/>
-        </p:nvSpPr>
-        <p:spPr>
-          <a:xfrm>
-            <a:off x="5349240" y="4014216"/>
-            <a:ext cx="6156655" cy="411480"/>
-          </a:xfrm>
-          <a:prstGeom prst="rect">
-            <a:avLst/>
-          </a:prstGeom>
-          <a:noFill/>
-          <a:ln/>
-        </p:spPr>
-        <p:txBody>
-          <a:bodyPr wrap="square" lIns="0" tIns="0" rIns="0" bIns="0" rtlCol="0" anchor="ctr"/>
-          <a:lstStyle/>
-          <a:p>
-            <a:pPr indent="0" marL="0">
-              <a:buNone/>
-            </a:pPr>
-            <a:r>
-              <a:rPr lang="en-US" sz="2200" b="1" dirty="0">
-                <a:solidFill>
-                  <a:schemeClr val="tx1"/>
-                </a:solidFill>
-              </a:rPr>
-              <a:t>조원 현황 및 역할 배분</a:t>
-            </a:r>
-            <a:endParaRPr lang="en-US" sz="2200" dirty="0"/>
-          </a:p>
-        </p:txBody>
-      </p:sp>
-      <p:sp>
-        <p:nvSpPr>
-          <p:cNvPr id="18" name="t23"/>
-          <p:cNvSpPr txBox="1"/>
-          <p:nvPr/>
-        </p:nvSpPr>
-        <p:spPr>
-          <a:xfrm>
-            <a:off x="5349240" y="4416552"/>
-            <a:ext cx="6156655" cy="274320"/>
-          </a:xfrm>
-          <a:prstGeom prst="rect">
-            <a:avLst/>
-          </a:prstGeom>
-          <a:noFill/>
-          <a:ln/>
-        </p:spPr>
-        <p:txBody>
-          <a:bodyPr wrap="square" lIns="0" tIns="0" rIns="0" bIns="0" rtlCol="0" anchor="ctr"/>
-          <a:lstStyle/>
-          <a:p>
-            <a:pPr indent="0" marL="0">
-              <a:buNone/>
-            </a:pPr>
-            <a:r>
-              <a:rPr lang="en-US" sz="1300" dirty="0">
-                <a:solidFill>
-                  <a:schemeClr val="tx2"/>
-                </a:solidFill>
-              </a:rPr>
-              <a:t>조원별 R&amp;R</a:t>
-            </a:r>
-            <a:endParaRPr lang="en-US" sz="1300" dirty="0"/>
-          </a:p>
-        </p:txBody>
-      </p:sp>
-      <p:sp>
-        <p:nvSpPr>
-          <p:cNvPr id="19" name="l24"/>
-          <p:cNvSpPr/>
-          <p:nvPr/>
-        </p:nvSpPr>
-        <p:spPr>
-          <a:xfrm>
-            <a:off x="4572000" y="4818888"/>
-            <a:ext cx="6933895" cy="0"/>
-          </a:xfrm>
-          <a:prstGeom prst="line">
-            <a:avLst/>
-          </a:prstGeom>
-          <a:noFill/>
-          <a:ln w="9525">
-            <a:solidFill>
-              <a:srgbClr val="D9D9D9"/>
-            </a:solidFill>
-            <a:prstDash val="solid"/>
-          </a:ln>
-        </p:spPr>
-      </p:sp>
-      <p:sp>
-        <p:nvSpPr>
-          <p:cNvPr id="20" name="t25"/>
-          <p:cNvSpPr txBox="1"/>
-          <p:nvPr/>
-        </p:nvSpPr>
-        <p:spPr>
-          <a:xfrm>
-            <a:off x="4572000" y="5038344"/>
-            <a:ext cx="731520" cy="365760"/>
-          </a:xfrm>
-          <a:prstGeom prst="rect">
-            <a:avLst/>
-          </a:prstGeom>
-          <a:noFill/>
-          <a:ln/>
-        </p:spPr>
-        <p:txBody>
-          <a:bodyPr wrap="square" lIns="0" tIns="0" rIns="0" bIns="0" rtlCol="0" anchor="ctr"/>
-          <a:lstStyle/>
-          <a:p>
-            <a:pPr indent="0" marL="0">
-              <a:buNone/>
-            </a:pPr>
-            <a:r>
-              <a:rPr lang="en-US" sz="1600" b="1" dirty="0">
-                <a:solidFill>
-                  <a:schemeClr val="accent1"/>
-                </a:solidFill>
-              </a:rPr>
-              <a:t>05</a:t>
-            </a:r>
-            <a:endParaRPr lang="en-US" sz="1600" dirty="0"/>
-          </a:p>
-        </p:txBody>
-      </p:sp>
-      <p:sp>
-        <p:nvSpPr>
-          <p:cNvPr id="21" name="t26"/>
-          <p:cNvSpPr txBox="1"/>
-          <p:nvPr/>
-        </p:nvSpPr>
-        <p:spPr>
-          <a:xfrm>
-            <a:off x="5349240" y="5001768"/>
-            <a:ext cx="6156655" cy="411480"/>
-          </a:xfrm>
-          <a:prstGeom prst="rect">
-            <a:avLst/>
-          </a:prstGeom>
-          <a:noFill/>
-          <a:ln/>
-        </p:spPr>
-        <p:txBody>
-          <a:bodyPr wrap="square" lIns="0" tIns="0" rIns="0" bIns="0" rtlCol="0" anchor="ctr"/>
-          <a:lstStyle/>
-          <a:p>
-            <a:pPr indent="0" marL="0">
-              <a:buNone/>
-            </a:pPr>
-            <a:r>
-              <a:rPr lang="en-US" sz="2200" b="1" dirty="0">
-                <a:solidFill>
-                  <a:schemeClr val="tx1"/>
-                </a:solidFill>
-              </a:rPr>
-              <a:t>팀플 추진 일정</a:t>
-            </a:r>
-            <a:endParaRPr lang="en-US" sz="2200" dirty="0"/>
-          </a:p>
-        </p:txBody>
-      </p:sp>
-      <p:sp>
-        <p:nvSpPr>
-          <p:cNvPr id="22" name="t27"/>
-          <p:cNvSpPr txBox="1"/>
-          <p:nvPr/>
-        </p:nvSpPr>
-        <p:spPr>
-          <a:xfrm>
-            <a:off x="5349240" y="5404104"/>
-            <a:ext cx="6156655" cy="274320"/>
-          </a:xfrm>
-          <a:prstGeom prst="rect">
-            <a:avLst/>
-          </a:prstGeom>
-          <a:noFill/>
-          <a:ln/>
-        </p:spPr>
-        <p:txBody>
-          <a:bodyPr wrap="square" lIns="0" tIns="0" rIns="0" bIns="0" rtlCol="0" anchor="ctr"/>
-          <a:lstStyle/>
-          <a:p>
-            <a:pPr indent="0" marL="0">
-              <a:buNone/>
-            </a:pPr>
-            <a:r>
-              <a:rPr lang="en-US" sz="1300" dirty="0">
-                <a:solidFill>
-                  <a:schemeClr val="tx2"/>
-                </a:solidFill>
-              </a:rPr>
-              <a:t>11월 30일 최종 발표까지 주차별 계획</a:t>
-            </a:r>
-            <a:endParaRPr lang="en-US" sz="1300" dirty="0"/>
-          </a:p>
-        </p:txBody>
-      </p:sp>
-      <p:sp>
-        <p:nvSpPr>
-          <p:cNvPr id="24" name="Text 0"/>
+              <a:t>자료 조사 · 사례분석 틀 · 이론 연계 · 평가 방향</a:t>
+            </a:r>
+            <a:endParaRPr lang="en-US" sz="1500" dirty="0"/>
+          </a:p>
+        </p:txBody>
+      </p:sp>
+      <p:sp>
+        <p:nvSpPr>
+          <p:cNvPr id="16" name="Text 0"/>
           <p:cNvSpPr/>
           <p:nvPr>
             <p:ph idx="100" type="body" hasCustomPrompt="1"/>
@@ -10174,7 +9696,7 @@
       </p:sp>
       <p:sp>
         <p:nvSpPr>
-          <p:cNvPr id="25" name="Text 0"/>
+          <p:cNvPr id="17" name="Text 0"/>
           <p:cNvSpPr/>
           <p:nvPr>
             <p:ph idx="101" type="title" hasCustomPrompt="1"/>
@@ -10204,7 +9726,7 @@
       </p:sp>
       <p:sp>
         <p:nvSpPr>
-          <p:cNvPr id="26" name="Text 0"/>
+          <p:cNvPr id="18" name="Text 0"/>
           <p:cNvSpPr/>
           <p:nvPr>
             <p:ph idx="102" type="body" hasCustomPrompt="1"/>
@@ -10334,7 +9856,7 @@
                   <a:srgbClr val="A8A8A8"/>
                 </a:solidFill>
               </a:rPr>
-              <a:t>핵심 분석 질문</a:t>
+              <a:t>저희가 답하려는 질문</a:t>
             </a:r>
             <a:endParaRPr lang="en-US" sz="1200" dirty="0"/>
           </a:p>
@@ -10342,7 +9864,7 @@
       </p:sp>
       <p:sp>
         <p:nvSpPr>
-          <p:cNvPr id="3" name="t28"/>
+          <p:cNvPr id="3" name="t20"/>
           <p:cNvSpPr txBox="1"/>
           <p:nvPr/>
         </p:nvSpPr>
@@ -10390,7 +9912,7 @@
                   <a:schemeClr val="bg1"/>
                 </a:solidFill>
               </a:rPr>
-              <a:t>자신의 행동을 바꾼 리더인가,</a:t>
+              <a:t>자기 행동을 바꾼 리더일까,</a:t>
             </a:r>
             <a:endParaRPr lang="en-US" sz="3600" dirty="0"/>
           </a:p>
@@ -10407,7 +9929,7 @@
                   <a:schemeClr val="bg1"/>
                 </a:solidFill>
               </a:rPr>
-              <a:t>조직의 상황을 바꾼 리더인가?</a:t>
+              <a:t>아니면 상황 자체를 바꾼 리더일까?</a:t>
             </a:r>
             <a:endParaRPr lang="en-US" sz="3600" dirty="0"/>
           </a:p>
@@ -10415,7 +9937,7 @@
       </p:sp>
       <p:sp>
         <p:nvSpPr>
-          <p:cNvPr id="4" name="l29"/>
+          <p:cNvPr id="4" name="l21"/>
           <p:cNvSpPr/>
           <p:nvPr/>
         </p:nvSpPr>
@@ -10438,7 +9960,7 @@
       </p:sp>
       <p:sp>
         <p:nvSpPr>
-          <p:cNvPr id="5" name="t30"/>
+          <p:cNvPr id="5" name="t22"/>
           <p:cNvSpPr txBox="1"/>
           <p:nvPr/>
         </p:nvSpPr>
@@ -10466,7 +9988,7 @@
                   <a:schemeClr val="accent1"/>
                 </a:solidFill>
               </a:rPr>
-              <a:t>관점 1 · 리더의 행동</a:t>
+              <a:t>리더가 바뀌었다면</a:t>
             </a:r>
             <a:endParaRPr lang="en-US" sz="1400" dirty="0"/>
           </a:p>
@@ -10474,7 +9996,7 @@
       </p:sp>
       <p:sp>
         <p:nvSpPr>
-          <p:cNvPr id="6" name="t31"/>
+          <p:cNvPr id="6" name="t23"/>
           <p:cNvSpPr txBox="1"/>
           <p:nvPr/>
         </p:nvSpPr>
@@ -10510,7 +10032,7 @@
       </p:sp>
       <p:sp>
         <p:nvSpPr>
-          <p:cNvPr id="7" name="t32"/>
+          <p:cNvPr id="7" name="t24"/>
           <p:cNvSpPr txBox="1"/>
           <p:nvPr/>
         </p:nvSpPr>
@@ -10538,7 +10060,7 @@
                   <a:srgbClr val="A8A8A8"/>
                 </a:solidFill>
               </a:rPr>
-              <a:t>위기와 전환기마다 리더의 행동 유형이 달라졌는가</a:t>
+              <a:t>위기 때와 전환기에 리더 행동이 어떻게 달랐는지 본다</a:t>
             </a:r>
             <a:endParaRPr lang="en-US" sz="1500" dirty="0"/>
           </a:p>
@@ -10546,7 +10068,7 @@
       </p:sp>
       <p:sp>
         <p:nvSpPr>
-          <p:cNvPr id="8" name="l33"/>
+          <p:cNvPr id="8" name="l25"/>
           <p:cNvSpPr/>
           <p:nvPr/>
         </p:nvSpPr>
@@ -10569,7 +10091,7 @@
       </p:sp>
       <p:sp>
         <p:nvSpPr>
-          <p:cNvPr id="9" name="t34"/>
+          <p:cNvPr id="9" name="t26"/>
           <p:cNvSpPr txBox="1"/>
           <p:nvPr/>
         </p:nvSpPr>
@@ -10597,7 +10119,7 @@
                   <a:schemeClr val="accent1"/>
                 </a:solidFill>
               </a:rPr>
-              <a:t>관점 2 · 조직의 상황</a:t>
+              <a:t>상황을 바꿨다면</a:t>
             </a:r>
             <a:endParaRPr lang="en-US" sz="1400" dirty="0"/>
           </a:p>
@@ -10605,7 +10127,7 @@
       </p:sp>
       <p:sp>
         <p:nvSpPr>
-          <p:cNvPr id="10" name="t35"/>
+          <p:cNvPr id="10" name="t27"/>
           <p:cNvSpPr txBox="1"/>
           <p:nvPr/>
         </p:nvSpPr>
@@ -10641,7 +10163,7 @@
       </p:sp>
       <p:sp>
         <p:nvSpPr>
-          <p:cNvPr id="11" name="t36"/>
+          <p:cNvPr id="11" name="t28"/>
           <p:cNvSpPr txBox="1"/>
           <p:nvPr/>
         </p:nvSpPr>
@@ -10669,7 +10191,7 @@
                   <a:srgbClr val="A8A8A8"/>
                 </a:solidFill>
               </a:rPr>
-              <a:t>제휴와 원칙으로 리더에게 유리한 상황을 만들었는가</a:t>
+              <a:t>제휴와 원칙으로 일하기 좋은 판을 만들었는지 본다</a:t>
             </a:r>
             <a:endParaRPr lang="en-US" sz="1500" dirty="0"/>
           </a:p>
@@ -10770,7 +10292,7 @@
                   <a:schemeClr val="tx1"/>
                 </a:solidFill>
               </a:rPr>
-              <a:t>카드대란 속 적자 회사를 맡아 23년째 이끄는 중</a:t>
+              <a:t>카드대란 한복판에 적자 회사를 맡아 23년째 경영</a:t>
             </a:r>
             <a:endParaRPr lang="en-US" sz="2800" dirty="0"/>
           </a:p>
@@ -10816,7 +10338,7 @@
       </p:sp>
       <p:sp>
         <p:nvSpPr>
-          <p:cNvPr id="5" name="t37"/>
+          <p:cNvPr id="5" name="t29"/>
           <p:cNvSpPr txBox="1"/>
           <p:nvPr/>
         </p:nvSpPr>
@@ -10863,7 +10385,7 @@
       </p:sp>
       <p:sp>
         <p:nvSpPr>
-          <p:cNvPr id="6" name="l38"/>
+          <p:cNvPr id="6" name="l30"/>
           <p:cNvSpPr/>
           <p:nvPr/>
         </p:nvSpPr>
@@ -10886,7 +10408,7 @@
       </p:sp>
       <p:sp>
         <p:nvSpPr>
-          <p:cNvPr id="7" name="t39"/>
+          <p:cNvPr id="7" name="t31"/>
           <p:cNvSpPr txBox="1"/>
           <p:nvPr/>
         </p:nvSpPr>
@@ -10922,7 +10444,7 @@
       </p:sp>
       <p:sp>
         <p:nvSpPr>
-          <p:cNvPr id="8" name="d40"/>
+          <p:cNvPr id="8" name="d32"/>
           <p:cNvSpPr/>
           <p:nvPr/>
         </p:nvSpPr>
@@ -10942,7 +10464,7 @@
       </p:sp>
       <p:sp>
         <p:nvSpPr>
-          <p:cNvPr id="9" name="t41"/>
+          <p:cNvPr id="9" name="t33"/>
           <p:cNvSpPr txBox="1"/>
           <p:nvPr/>
         </p:nvSpPr>
@@ -11015,7 +10537,7 @@
       </p:sp>
       <p:sp>
         <p:nvSpPr>
-          <p:cNvPr id="10" name="t42"/>
+          <p:cNvPr id="10" name="t34"/>
           <p:cNvSpPr txBox="1"/>
           <p:nvPr/>
         </p:nvSpPr>
@@ -11051,7 +10573,7 @@
       </p:sp>
       <p:sp>
         <p:nvSpPr>
-          <p:cNvPr id="11" name="d43"/>
+          <p:cNvPr id="11" name="d35"/>
           <p:cNvSpPr/>
           <p:nvPr/>
         </p:nvSpPr>
@@ -11071,7 +10593,7 @@
       </p:sp>
       <p:sp>
         <p:nvSpPr>
-          <p:cNvPr id="12" name="t44"/>
+          <p:cNvPr id="12" name="t36"/>
           <p:cNvSpPr txBox="1"/>
           <p:nvPr/>
         </p:nvSpPr>
@@ -11144,7 +10666,7 @@
       </p:sp>
       <p:sp>
         <p:nvSpPr>
-          <p:cNvPr id="13" name="t45"/>
+          <p:cNvPr id="13" name="t37"/>
           <p:cNvSpPr txBox="1"/>
           <p:nvPr/>
         </p:nvSpPr>
@@ -11180,7 +10702,7 @@
       </p:sp>
       <p:sp>
         <p:nvSpPr>
-          <p:cNvPr id="14" name="d46"/>
+          <p:cNvPr id="14" name="d38"/>
           <p:cNvSpPr/>
           <p:nvPr/>
         </p:nvSpPr>
@@ -11200,7 +10722,7 @@
       </p:sp>
       <p:sp>
         <p:nvSpPr>
-          <p:cNvPr id="15" name="t47"/>
+          <p:cNvPr id="15" name="t39"/>
           <p:cNvSpPr txBox="1"/>
           <p:nvPr/>
         </p:nvSpPr>
@@ -11273,7 +10795,7 @@
       </p:sp>
       <p:sp>
         <p:nvSpPr>
-          <p:cNvPr id="16" name="t48"/>
+          <p:cNvPr id="16" name="t40"/>
           <p:cNvSpPr txBox="1"/>
           <p:nvPr/>
         </p:nvSpPr>
@@ -11309,7 +10831,7 @@
       </p:sp>
       <p:sp>
         <p:nvSpPr>
-          <p:cNvPr id="17" name="d49"/>
+          <p:cNvPr id="17" name="d41"/>
           <p:cNvSpPr/>
           <p:nvPr/>
         </p:nvSpPr>
@@ -11329,7 +10851,7 @@
       </p:sp>
       <p:sp>
         <p:nvSpPr>
-          <p:cNvPr id="18" name="t50"/>
+          <p:cNvPr id="18" name="t42"/>
           <p:cNvSpPr txBox="1"/>
           <p:nvPr/>
         </p:nvSpPr>
@@ -11402,7 +10924,7 @@
       </p:sp>
       <p:sp>
         <p:nvSpPr>
-          <p:cNvPr id="19" name="t51"/>
+          <p:cNvPr id="19" name="t43"/>
           <p:cNvSpPr txBox="1"/>
           <p:nvPr/>
         </p:nvSpPr>
@@ -11438,7 +10960,7 @@
       </p:sp>
       <p:sp>
         <p:nvSpPr>
-          <p:cNvPr id="20" name="d52"/>
+          <p:cNvPr id="20" name="d44"/>
           <p:cNvSpPr/>
           <p:nvPr/>
         </p:nvSpPr>
@@ -11458,7 +10980,7 @@
       </p:sp>
       <p:sp>
         <p:nvSpPr>
-          <p:cNvPr id="21" name="t53"/>
+          <p:cNvPr id="21" name="t45"/>
           <p:cNvSpPr txBox="1"/>
           <p:nvPr/>
         </p:nvSpPr>
@@ -11531,7 +11053,7 @@
       </p:sp>
       <p:sp>
         <p:nvSpPr>
-          <p:cNvPr id="22" name="t54"/>
+          <p:cNvPr id="22" name="t46"/>
           <p:cNvSpPr txBox="1"/>
           <p:nvPr/>
         </p:nvSpPr>
@@ -11567,7 +11089,7 @@
       </p:sp>
       <p:sp>
         <p:nvSpPr>
-          <p:cNvPr id="23" name="d55"/>
+          <p:cNvPr id="23" name="d47"/>
           <p:cNvSpPr/>
           <p:nvPr/>
         </p:nvSpPr>
@@ -11587,7 +11109,7 @@
       </p:sp>
       <p:sp>
         <p:nvSpPr>
-          <p:cNvPr id="24" name="t56"/>
+          <p:cNvPr id="24" name="t48"/>
           <p:cNvSpPr txBox="1"/>
           <p:nvPr/>
         </p:nvSpPr>
@@ -11660,7 +11182,7 @@
       </p:sp>
       <p:sp>
         <p:nvSpPr>
-          <p:cNvPr id="25" name="t57"/>
+          <p:cNvPr id="25" name="t49"/>
           <p:cNvSpPr txBox="1"/>
           <p:nvPr/>
         </p:nvSpPr>
@@ -11688,7 +11210,7 @@
                   <a:schemeClr val="tx2"/>
                 </a:solidFill>
               </a:rPr>
-              <a:t>보고서에서 나눠 볼 네 시기</a:t>
+              <a:t>분석은 네 시기로 나눠서</a:t>
             </a:r>
             <a:endParaRPr lang="en-US" sz="1200" dirty="0"/>
           </a:p>
@@ -11696,7 +11218,7 @@
       </p:sp>
       <p:sp>
         <p:nvSpPr>
-          <p:cNvPr id="26" name="r58"/>
+          <p:cNvPr id="26" name="r50"/>
           <p:cNvSpPr/>
           <p:nvPr/>
         </p:nvSpPr>
@@ -11716,7 +11238,7 @@
       </p:sp>
       <p:sp>
         <p:nvSpPr>
-          <p:cNvPr id="27" name="t59"/>
+          <p:cNvPr id="27" name="t51"/>
           <p:cNvSpPr txBox="1"/>
           <p:nvPr/>
         </p:nvSpPr>
@@ -11752,7 +11274,7 @@
       </p:sp>
       <p:sp>
         <p:nvSpPr>
-          <p:cNvPr id="28" name="r60"/>
+          <p:cNvPr id="28" name="r52"/>
           <p:cNvSpPr/>
           <p:nvPr/>
         </p:nvSpPr>
@@ -11772,7 +11294,7 @@
       </p:sp>
       <p:sp>
         <p:nvSpPr>
-          <p:cNvPr id="29" name="t61"/>
+          <p:cNvPr id="29" name="t53"/>
           <p:cNvSpPr txBox="1"/>
           <p:nvPr/>
         </p:nvSpPr>
@@ -11808,7 +11330,7 @@
       </p:sp>
       <p:sp>
         <p:nvSpPr>
-          <p:cNvPr id="30" name="r62"/>
+          <p:cNvPr id="30" name="r54"/>
           <p:cNvSpPr/>
           <p:nvPr/>
         </p:nvSpPr>
@@ -11828,7 +11350,7 @@
       </p:sp>
       <p:sp>
         <p:nvSpPr>
-          <p:cNvPr id="31" name="t63"/>
+          <p:cNvPr id="31" name="t55"/>
           <p:cNvSpPr txBox="1"/>
           <p:nvPr/>
         </p:nvSpPr>
@@ -11864,7 +11386,7 @@
       </p:sp>
       <p:sp>
         <p:nvSpPr>
-          <p:cNvPr id="32" name="r64"/>
+          <p:cNvPr id="32" name="r56"/>
           <p:cNvSpPr/>
           <p:nvPr/>
         </p:nvSpPr>
@@ -11884,7 +11406,7 @@
       </p:sp>
       <p:sp>
         <p:nvSpPr>
-          <p:cNvPr id="33" name="t65"/>
+          <p:cNvPr id="33" name="t57"/>
           <p:cNvSpPr txBox="1"/>
           <p:nvPr/>
         </p:nvSpPr>
@@ -12058,7 +11580,7 @@
                   <a:schemeClr val="tx1"/>
                 </a:solidFill>
               </a:rPr>
-              <a:t>상황별 리더십을 비교하기에 좋은 대상이라 선정</a:t>
+              <a:t>상황에 따라 리더십이 어떻게 달라지는지 보기 좋은 사례</a:t>
             </a:r>
             <a:endParaRPr lang="en-US" sz="2800" dirty="0"/>
           </a:p>
@@ -12066,7 +11588,7 @@
       </p:sp>
       <p:sp>
         <p:nvSpPr>
-          <p:cNvPr id="4" name="t66"/>
+          <p:cNvPr id="4" name="t58"/>
           <p:cNvSpPr txBox="1"/>
           <p:nvPr/>
         </p:nvSpPr>
@@ -12102,7 +11624,7 @@
       </p:sp>
       <p:sp>
         <p:nvSpPr>
-          <p:cNvPr id="5" name="t67"/>
+          <p:cNvPr id="5" name="t59"/>
           <p:cNvSpPr txBox="1"/>
           <p:nvPr/>
         </p:nvSpPr>
@@ -12133,7 +11655,7 @@
                   <a:schemeClr val="tx1"/>
                 </a:solidFill>
               </a:rPr>
-              <a:t>성격이 다른 네 국면을</a:t>
+              <a:t>성격이 전혀 다른 네 시기를</a:t>
             </a:r>
             <a:endParaRPr lang="en-US" sz="3000" dirty="0"/>
           </a:p>
@@ -12158,7 +11680,7 @@
       </p:sp>
       <p:sp>
         <p:nvSpPr>
-          <p:cNvPr id="6" name="t68"/>
+          <p:cNvPr id="6" name="t60"/>
           <p:cNvSpPr txBox="1"/>
           <p:nvPr/>
         </p:nvSpPr>
@@ -12189,7 +11711,7 @@
                   <a:schemeClr val="tx2"/>
                 </a:solidFill>
               </a:rPr>
-              <a:t>23년 동안 한 리더가 겪은 서로 다른 상황을 비교하면</a:t>
+              <a:t>위기부터 디지털 전환까지 한 CEO가 다 겪었기 때문에</a:t>
             </a:r>
             <a:endParaRPr lang="en-US" sz="1500" dirty="0"/>
           </a:p>
@@ -12206,7 +11728,7 @@
                   <a:schemeClr val="tx2"/>
                 </a:solidFill>
               </a:rPr>
-              <a:t>상황에 따라 리더십이 어떻게 달라지는지 볼 수 있음</a:t>
+              <a:t>시기별로 리더십을 나란히 놓고 비교할 수 있다</a:t>
             </a:r>
             <a:endParaRPr lang="en-US" sz="1500" dirty="0"/>
           </a:p>
@@ -12214,7 +11736,7 @@
       </p:sp>
       <p:sp>
         <p:nvSpPr>
-          <p:cNvPr id="7" name="r69"/>
+          <p:cNvPr id="7" name="r61"/>
           <p:cNvSpPr/>
           <p:nvPr/>
         </p:nvSpPr>
@@ -12234,7 +11756,7 @@
       </p:sp>
       <p:sp>
         <p:nvSpPr>
-          <p:cNvPr id="8" name="t70"/>
+          <p:cNvPr id="8" name="t62"/>
           <p:cNvSpPr txBox="1"/>
           <p:nvPr/>
         </p:nvSpPr>
@@ -12270,7 +11792,7 @@
       </p:sp>
       <p:sp>
         <p:nvSpPr>
-          <p:cNvPr id="9" name="r71"/>
+          <p:cNvPr id="9" name="r63"/>
           <p:cNvSpPr/>
           <p:nvPr/>
         </p:nvSpPr>
@@ -12290,7 +11812,7 @@
       </p:sp>
       <p:sp>
         <p:nvSpPr>
-          <p:cNvPr id="10" name="t72"/>
+          <p:cNvPr id="10" name="t64"/>
           <p:cNvSpPr txBox="1"/>
           <p:nvPr/>
         </p:nvSpPr>
@@ -12326,7 +11848,7 @@
       </p:sp>
       <p:sp>
         <p:nvSpPr>
-          <p:cNvPr id="11" name="r73"/>
+          <p:cNvPr id="11" name="r65"/>
           <p:cNvSpPr/>
           <p:nvPr/>
         </p:nvSpPr>
@@ -12346,7 +11868,7 @@
       </p:sp>
       <p:sp>
         <p:nvSpPr>
-          <p:cNvPr id="12" name="t74"/>
+          <p:cNvPr id="12" name="t66"/>
           <p:cNvSpPr txBox="1"/>
           <p:nvPr/>
         </p:nvSpPr>
@@ -12382,7 +11904,7 @@
       </p:sp>
       <p:sp>
         <p:nvSpPr>
-          <p:cNvPr id="13" name="r75"/>
+          <p:cNvPr id="13" name="r67"/>
           <p:cNvSpPr/>
           <p:nvPr/>
         </p:nvSpPr>
@@ -12402,7 +11924,7 @@
       </p:sp>
       <p:sp>
         <p:nvSpPr>
-          <p:cNvPr id="14" name="t76"/>
+          <p:cNvPr id="14" name="t68"/>
           <p:cNvSpPr txBox="1"/>
           <p:nvPr/>
         </p:nvSpPr>
@@ -12438,7 +11960,7 @@
       </p:sp>
       <p:sp>
         <p:nvSpPr>
-          <p:cNvPr id="15" name="l77"/>
+          <p:cNvPr id="15" name="l69"/>
           <p:cNvSpPr/>
           <p:nvPr/>
         </p:nvSpPr>
@@ -12461,7 +11983,7 @@
       </p:sp>
       <p:sp>
         <p:nvSpPr>
-          <p:cNvPr id="16" name="t78"/>
+          <p:cNvPr id="16" name="t70"/>
           <p:cNvSpPr txBox="1"/>
           <p:nvPr/>
         </p:nvSpPr>
@@ -12497,7 +12019,7 @@
       </p:sp>
       <p:sp>
         <p:nvSpPr>
-          <p:cNvPr id="17" name="t79"/>
+          <p:cNvPr id="17" name="t71"/>
           <p:cNvSpPr txBox="1"/>
           <p:nvPr/>
         </p:nvSpPr>
@@ -12525,7 +12047,7 @@
                   <a:schemeClr val="tx1"/>
                 </a:solidFill>
               </a:rPr>
-              <a:t>리더 본인의 말로 확인할 수 있다</a:t>
+              <a:t>본인이 직접 한 말이 많다</a:t>
             </a:r>
             <a:endParaRPr lang="en-US" sz="2000" dirty="0"/>
           </a:p>
@@ -12533,7 +12055,7 @@
       </p:sp>
       <p:sp>
         <p:nvSpPr>
-          <p:cNvPr id="18" name="t80"/>
+          <p:cNvPr id="18" name="t72"/>
           <p:cNvSpPr txBox="1"/>
           <p:nvPr/>
         </p:nvSpPr>
@@ -12564,7 +12086,7 @@
                   <a:schemeClr val="tx2"/>
                 </a:solidFill>
               </a:rPr>
-              <a:t>SNS와 국내외 인터뷰가 많아 기사와</a:t>
+              <a:t>SNS와 인터뷰가 많아서 기사 내용과</a:t>
             </a:r>
             <a:endParaRPr lang="en-US" sz="1400" dirty="0"/>
           </a:p>
@@ -12581,7 +12103,7 @@
                   <a:schemeClr val="tx2"/>
                 </a:solidFill>
               </a:rPr>
-              <a:t>본인의 설명을 함께 검토할 수 있음</a:t>
+              <a:t>본인 설명을 서로 맞춰 볼 수 있다</a:t>
             </a:r>
             <a:endParaRPr lang="en-US" sz="1400" dirty="0"/>
           </a:p>
@@ -12589,7 +12111,7 @@
       </p:sp>
       <p:sp>
         <p:nvSpPr>
-          <p:cNvPr id="19" name="l81"/>
+          <p:cNvPr id="19" name="l73"/>
           <p:cNvSpPr/>
           <p:nvPr/>
         </p:nvSpPr>
@@ -12612,7 +12134,7 @@
       </p:sp>
       <p:sp>
         <p:nvSpPr>
-          <p:cNvPr id="20" name="t82"/>
+          <p:cNvPr id="20" name="t74"/>
           <p:cNvSpPr txBox="1"/>
           <p:nvPr/>
         </p:nvSpPr>
@@ -12648,7 +12170,7 @@
       </p:sp>
       <p:sp>
         <p:nvSpPr>
-          <p:cNvPr id="21" name="t83"/>
+          <p:cNvPr id="21" name="t75"/>
           <p:cNvSpPr txBox="1"/>
           <p:nvPr/>
         </p:nvSpPr>
@@ -12676,7 +12198,7 @@
                   <a:schemeClr val="tx1"/>
                 </a:solidFill>
               </a:rPr>
-              <a:t>성과와 논란이 함께 있다</a:t>
+              <a:t>성과만큼 논란도 있다</a:t>
             </a:r>
             <a:endParaRPr lang="en-US" sz="2000" dirty="0"/>
           </a:p>
@@ -12684,7 +12206,7 @@
       </p:sp>
       <p:sp>
         <p:nvSpPr>
-          <p:cNvPr id="22" name="t84"/>
+          <p:cNvPr id="22" name="t76"/>
           <p:cNvSpPr txBox="1"/>
           <p:nvPr/>
         </p:nvSpPr>
@@ -12715,7 +12237,7 @@
                   <a:schemeClr val="tx2"/>
                 </a:solidFill>
               </a:rPr>
-              <a:t>업계 2위로 성장했지만 희망퇴직, 애플페이</a:t>
+              <a:t>업계 2위까지 키웠지만 희망퇴직, 애플페이</a:t>
             </a:r>
             <a:endParaRPr lang="en-US" sz="1400" dirty="0"/>
           </a:p>
@@ -12732,7 +12254,7 @@
                   <a:schemeClr val="tx2"/>
                 </a:solidFill>
               </a:rPr>
-              <a:t>수수료 논란도 있어 균형 있는 평가가 가능함</a:t>
+              <a:t>수수료 논란도 있어 한쪽으로 치우치지 않는다</a:t>
             </a:r>
             <a:endParaRPr lang="en-US" sz="1400" dirty="0"/>
           </a:p>
@@ -12908,7 +12430,7 @@
                   <a:schemeClr val="tx1"/>
                 </a:solidFill>
               </a:rPr>
-              <a:t>전문경영인이면서 오너 일가인 독특한 위치</a:t>
+              <a:t>전문경영인이자 오너 일가의 사위</a:t>
             </a:r>
             <a:endParaRPr lang="en-US" sz="2800" dirty="0"/>
           </a:p>
@@ -12954,7 +12476,7 @@
       </p:sp>
       <p:sp>
         <p:nvSpPr>
-          <p:cNvPr id="5" name="rr85"/>
+          <p:cNvPr id="5" name="rr77"/>
           <p:cNvSpPr/>
           <p:nvPr/>
         </p:nvSpPr>
@@ -12976,7 +12498,7 @@
       </p:sp>
       <p:sp>
         <p:nvSpPr>
-          <p:cNvPr id="6" name="rr86"/>
+          <p:cNvPr id="6" name="rr78"/>
           <p:cNvSpPr/>
           <p:nvPr/>
         </p:nvSpPr>
@@ -12998,7 +12520,7 @@
       </p:sp>
       <p:sp>
         <p:nvSpPr>
-          <p:cNvPr id="7" name="t87"/>
+          <p:cNvPr id="7" name="t79"/>
           <p:cNvSpPr txBox="1"/>
           <p:nvPr/>
         </p:nvSpPr>
@@ -13048,7 +12570,7 @@
       </p:sp>
       <p:sp>
         <p:nvSpPr>
-          <p:cNvPr id="8" name="t88"/>
+          <p:cNvPr id="8" name="t80"/>
           <p:cNvSpPr txBox="1"/>
           <p:nvPr/>
         </p:nvSpPr>
@@ -13084,7 +12606,7 @@
       </p:sp>
       <p:sp>
         <p:nvSpPr>
-          <p:cNvPr id="9" name="t89"/>
+          <p:cNvPr id="9" name="t81"/>
           <p:cNvSpPr txBox="1"/>
           <p:nvPr/>
         </p:nvSpPr>
@@ -13120,7 +12642,7 @@
       </p:sp>
       <p:sp>
         <p:nvSpPr>
-          <p:cNvPr id="10" name="l90"/>
+          <p:cNvPr id="10" name="l82"/>
           <p:cNvSpPr/>
           <p:nvPr/>
         </p:nvSpPr>
@@ -13143,7 +12665,7 @@
       </p:sp>
       <p:sp>
         <p:nvSpPr>
-          <p:cNvPr id="11" name="t91"/>
+          <p:cNvPr id="11" name="t83"/>
           <p:cNvSpPr txBox="1"/>
           <p:nvPr/>
         </p:nvSpPr>
@@ -13179,7 +12701,7 @@
       </p:sp>
       <p:sp>
         <p:nvSpPr>
-          <p:cNvPr id="12" name="t92"/>
+          <p:cNvPr id="12" name="t84"/>
           <p:cNvSpPr txBox="1"/>
           <p:nvPr/>
         </p:nvSpPr>
@@ -13215,7 +12737,7 @@
       </p:sp>
       <p:sp>
         <p:nvSpPr>
-          <p:cNvPr id="13" name="l93"/>
+          <p:cNvPr id="13" name="l85"/>
           <p:cNvSpPr/>
           <p:nvPr/>
         </p:nvSpPr>
@@ -13238,7 +12760,7 @@
       </p:sp>
       <p:sp>
         <p:nvSpPr>
-          <p:cNvPr id="14" name="t94"/>
+          <p:cNvPr id="14" name="t86"/>
           <p:cNvSpPr txBox="1"/>
           <p:nvPr/>
         </p:nvSpPr>
@@ -13274,7 +12796,7 @@
       </p:sp>
       <p:sp>
         <p:nvSpPr>
-          <p:cNvPr id="15" name="t95"/>
+          <p:cNvPr id="15" name="t87"/>
           <p:cNvSpPr txBox="1"/>
           <p:nvPr/>
         </p:nvSpPr>
@@ -13302,7 +12824,7 @@
                   <a:schemeClr val="tx1"/>
                 </a:solidFill>
               </a:rPr>
-              <a:t>2003년 취임 이후 23년째 (현 임기 2027년 3월까지)</a:t>
+              <a:t>2003년 취임, 23년째 (임기 2027년 3월까지)</a:t>
             </a:r>
             <a:endParaRPr lang="en-US" sz="1700" dirty="0"/>
           </a:p>
@@ -13310,7 +12832,7 @@
       </p:sp>
       <p:sp>
         <p:nvSpPr>
-          <p:cNvPr id="16" name="l96"/>
+          <p:cNvPr id="16" name="l88"/>
           <p:cNvSpPr/>
           <p:nvPr/>
         </p:nvSpPr>
@@ -13333,7 +12855,7 @@
       </p:sp>
       <p:sp>
         <p:nvSpPr>
-          <p:cNvPr id="17" name="t97"/>
+          <p:cNvPr id="17" name="t89"/>
           <p:cNvSpPr txBox="1"/>
           <p:nvPr/>
         </p:nvSpPr>
@@ -13369,7 +12891,7 @@
       </p:sp>
       <p:sp>
         <p:nvSpPr>
-          <p:cNvPr id="18" name="t98"/>
+          <p:cNvPr id="18" name="t90"/>
           <p:cNvSpPr txBox="1"/>
           <p:nvPr/>
         </p:nvSpPr>
@@ -13405,7 +12927,7 @@
       </p:sp>
       <p:sp>
         <p:nvSpPr>
-          <p:cNvPr id="19" name="l99"/>
+          <p:cNvPr id="19" name="l91"/>
           <p:cNvSpPr/>
           <p:nvPr/>
         </p:nvSpPr>
@@ -13428,7 +12950,7 @@
       </p:sp>
       <p:sp>
         <p:nvSpPr>
-          <p:cNvPr id="20" name="t100"/>
+          <p:cNvPr id="20" name="t92"/>
           <p:cNvSpPr txBox="1"/>
           <p:nvPr/>
         </p:nvSpPr>
@@ -13456,7 +12978,7 @@
                   <a:schemeClr val="tx2"/>
                 </a:solidFill>
               </a:rPr>
-              <a:t>별칭</a:t>
+              <a:t>별명</a:t>
             </a:r>
             <a:endParaRPr lang="en-US" sz="1400" dirty="0"/>
           </a:p>
@@ -13464,7 +12986,7 @@
       </p:sp>
       <p:sp>
         <p:nvSpPr>
-          <p:cNvPr id="21" name="t101"/>
+          <p:cNvPr id="21" name="t93"/>
           <p:cNvSpPr txBox="1"/>
           <p:nvPr/>
         </p:nvSpPr>
@@ -13638,7 +13160,7 @@
                   <a:schemeClr val="tx1"/>
                 </a:solidFill>
               </a:rPr>
-              <a:t>현대차그룹 계열의 비상장 카드사, 회원 1,311만 명</a:t>
+              <a:t>현대차그룹 계열 카드사, 회원 1,311만 명</a:t>
             </a:r>
             <a:endParaRPr lang="en-US" sz="2800" dirty="0"/>
           </a:p>
@@ -13684,7 +13206,7 @@
       </p:sp>
       <p:sp>
         <p:nvSpPr>
-          <p:cNvPr id="5" name="t102"/>
+          <p:cNvPr id="5" name="t94"/>
           <p:cNvSpPr txBox="1"/>
           <p:nvPr/>
         </p:nvSpPr>
@@ -13720,7 +13242,7 @@
       </p:sp>
       <p:sp>
         <p:nvSpPr>
-          <p:cNvPr id="6" name="t103"/>
+          <p:cNvPr id="6" name="t95"/>
           <p:cNvSpPr txBox="1"/>
           <p:nvPr/>
         </p:nvSpPr>
@@ -13756,7 +13278,7 @@
       </p:sp>
       <p:sp>
         <p:nvSpPr>
-          <p:cNvPr id="7" name="t104"/>
+          <p:cNvPr id="7" name="t96"/>
           <p:cNvSpPr txBox="1"/>
           <p:nvPr/>
         </p:nvSpPr>
@@ -13792,7 +13314,7 @@
       </p:sp>
       <p:sp>
         <p:nvSpPr>
-          <p:cNvPr id="8" name="t105"/>
+          <p:cNvPr id="8" name="t97"/>
           <p:cNvSpPr txBox="1"/>
           <p:nvPr/>
         </p:nvSpPr>
@@ -13820,7 +13342,7 @@
                   <a:schemeClr val="tx2"/>
                 </a:solidFill>
               </a:rPr>
-              <a:t>신용카드 회원 수</a:t>
+              <a:t>신용카드 회원</a:t>
             </a:r>
             <a:endParaRPr lang="en-US" sz="1400" dirty="0"/>
           </a:p>
@@ -13828,7 +13350,7 @@
       </p:sp>
       <p:sp>
         <p:nvSpPr>
-          <p:cNvPr id="9" name="t106"/>
+          <p:cNvPr id="9" name="t98"/>
           <p:cNvSpPr txBox="1"/>
           <p:nvPr/>
         </p:nvSpPr>
@@ -13864,7 +13386,7 @@
       </p:sp>
       <p:sp>
         <p:nvSpPr>
-          <p:cNvPr id="10" name="t107"/>
+          <p:cNvPr id="10" name="t99"/>
           <p:cNvSpPr txBox="1"/>
           <p:nvPr/>
         </p:nvSpPr>
@@ -13892,7 +13414,7 @@
                   <a:schemeClr val="tx2"/>
                 </a:solidFill>
               </a:rPr>
-              <a:t>직원 수 · 본사 서울 여의도</a:t>
+              <a:t>직원 · 본사 서울 여의도</a:t>
             </a:r>
             <a:endParaRPr lang="en-US" sz="1400" dirty="0"/>
           </a:p>
@@ -13900,7 +13422,7 @@
       </p:sp>
       <p:sp>
         <p:nvSpPr>
-          <p:cNvPr id="11" name="l108"/>
+          <p:cNvPr id="11" name="l100"/>
           <p:cNvSpPr/>
           <p:nvPr/>
         </p:nvSpPr>
@@ -13923,7 +13445,7 @@
       </p:sp>
       <p:sp>
         <p:nvSpPr>
-          <p:cNvPr id="12" name="t109"/>
+          <p:cNvPr id="12" name="t101"/>
           <p:cNvSpPr txBox="1"/>
           <p:nvPr/>
         </p:nvSpPr>
@@ -13959,7 +13481,7 @@
       </p:sp>
       <p:sp>
         <p:nvSpPr>
-          <p:cNvPr id="13" name="t110"/>
+          <p:cNvPr id="13" name="t102"/>
           <p:cNvSpPr txBox="1"/>
           <p:nvPr/>
         </p:nvSpPr>
@@ -13995,7 +13517,7 @@
       </p:sp>
       <p:sp>
         <p:nvSpPr>
-          <p:cNvPr id="14" name="t111"/>
+          <p:cNvPr id="14" name="t103"/>
           <p:cNvSpPr txBox="1"/>
           <p:nvPr/>
         </p:nvSpPr>
@@ -14051,7 +13573,7 @@
       </p:sp>
       <p:sp>
         <p:nvSpPr>
-          <p:cNvPr id="15" name="t112"/>
+          <p:cNvPr id="15" name="t104"/>
           <p:cNvSpPr txBox="1"/>
           <p:nvPr/>
         </p:nvSpPr>
@@ -14087,7 +13609,7 @@
       </p:sp>
       <p:sp>
         <p:nvSpPr>
-          <p:cNvPr id="16" name="t113"/>
+          <p:cNvPr id="16" name="t105"/>
           <p:cNvSpPr txBox="1"/>
           <p:nvPr/>
         </p:nvSpPr>
@@ -14143,7 +13665,7 @@
       </p:sp>
       <p:sp>
         <p:nvSpPr>
-          <p:cNvPr id="17" name="t114"/>
+          <p:cNvPr id="17" name="t106"/>
           <p:cNvSpPr txBox="1"/>
           <p:nvPr/>
         </p:nvSpPr>
@@ -14179,7 +13701,7 @@
       </p:sp>
       <p:sp>
         <p:nvSpPr>
-          <p:cNvPr id="18" name="t115"/>
+          <p:cNvPr id="18" name="t107"/>
           <p:cNvSpPr txBox="1"/>
           <p:nvPr/>
         </p:nvSpPr>
@@ -14218,7 +13740,7 @@
       </p:sp>
       <p:sp>
         <p:nvSpPr>
-          <p:cNvPr id="19" name="t116"/>
+          <p:cNvPr id="19" name="t108"/>
           <p:cNvSpPr txBox="1"/>
           <p:nvPr/>
         </p:nvSpPr>
@@ -14254,7 +13776,7 @@
       </p:sp>
       <p:sp>
         <p:nvSpPr>
-          <p:cNvPr id="20" name="t117"/>
+          <p:cNvPr id="20" name="t109"/>
           <p:cNvSpPr txBox="1"/>
           <p:nvPr/>
         </p:nvSpPr>
@@ -14448,7 +13970,7 @@
                   <a:schemeClr val="tx1"/>
                 </a:solidFill>
               </a:rPr>
-              <a:t>영업이익·순이익 모두 늘었고, 이용실적 점유율은 업계 2위</a:t>
+              <a:t>이익은 늘었고, 이용실적 점유율은 업계 2위</a:t>
             </a:r>
             <a:endParaRPr lang="en-US" sz="2800" dirty="0"/>
           </a:p>
@@ -14494,7 +14016,7 @@
       </p:sp>
       <p:sp>
         <p:nvSpPr>
-          <p:cNvPr id="5" name="t118"/>
+          <p:cNvPr id="5" name="t110"/>
           <p:cNvSpPr txBox="1"/>
           <p:nvPr/>
         </p:nvSpPr>
@@ -14530,14 +14052,14 @@
       </p:sp>
       <p:sp>
         <p:nvSpPr>
-          <p:cNvPr id="6" name="t119"/>
+          <p:cNvPr id="6" name="t111"/>
           <p:cNvSpPr txBox="1"/>
           <p:nvPr/>
         </p:nvSpPr>
         <p:spPr>
           <a:xfrm>
             <a:off x="685800" y="2514600"/>
-            <a:ext cx="4206240" cy="320040"/>
+            <a:ext cx="4389120" cy="320040"/>
           </a:xfrm>
           <a:prstGeom prst="rect">
             <a:avLst/>
@@ -14566,7 +14088,7 @@
       </p:sp>
       <p:sp>
         <p:nvSpPr>
-          <p:cNvPr id="7" name="t120"/>
+          <p:cNvPr id="7" name="t112"/>
           <p:cNvSpPr txBox="1"/>
           <p:nvPr/>
         </p:nvSpPr>
@@ -14602,14 +14124,14 @@
       </p:sp>
       <p:sp>
         <p:nvSpPr>
-          <p:cNvPr id="8" name="t121"/>
+          <p:cNvPr id="8" name="t113"/>
           <p:cNvSpPr txBox="1"/>
           <p:nvPr/>
         </p:nvSpPr>
         <p:spPr>
           <a:xfrm>
             <a:off x="685800" y="3886200"/>
-            <a:ext cx="4206240" cy="320040"/>
+            <a:ext cx="4389120" cy="320040"/>
           </a:xfrm>
           <a:prstGeom prst="rect">
             <a:avLst/>
@@ -14630,7 +14152,7 @@
                   <a:schemeClr val="tx2"/>
                 </a:solidFill>
               </a:rPr>
-              <a:t>2025년 당기순이익 · 전년 대비 +10.7%</a:t>
+              <a:t>2025년 당기순이익 · 1년 전보다 10.7% 증가</a:t>
             </a:r>
             <a:endParaRPr lang="en-US" sz="1400" dirty="0"/>
           </a:p>
@@ -14638,7 +14160,7 @@
       </p:sp>
       <p:sp>
         <p:nvSpPr>
-          <p:cNvPr id="9" name="t122"/>
+          <p:cNvPr id="9" name="t114"/>
           <p:cNvSpPr txBox="1"/>
           <p:nvPr/>
         </p:nvSpPr>
@@ -14674,14 +14196,14 @@
       </p:sp>
       <p:sp>
         <p:nvSpPr>
-          <p:cNvPr id="10" name="t123"/>
+          <p:cNvPr id="10" name="t115"/>
           <p:cNvSpPr txBox="1"/>
           <p:nvPr/>
         </p:nvSpPr>
         <p:spPr>
           <a:xfrm>
             <a:off x="685800" y="5257800"/>
-            <a:ext cx="4206240" cy="320040"/>
+            <a:ext cx="4389120" cy="320040"/>
           </a:xfrm>
           <a:prstGeom prst="rect">
             <a:avLst/>
@@ -14710,7 +14232,7 @@
       </p:sp>
       <p:sp>
         <p:nvSpPr>
-          <p:cNvPr id="11" name="t124"/>
+          <p:cNvPr id="11" name="t116"/>
           <p:cNvSpPr txBox="1"/>
           <p:nvPr/>
         </p:nvSpPr>
@@ -14762,7 +14284,7 @@
       </p:graphicFrame>
       <p:sp>
         <p:nvSpPr>
-          <p:cNvPr id="13" name="r125"/>
+          <p:cNvPr id="13" name="r117"/>
           <p:cNvSpPr/>
           <p:nvPr/>
         </p:nvSpPr>
@@ -14782,7 +14304,7 @@
       </p:sp>
       <p:sp>
         <p:nvSpPr>
-          <p:cNvPr id="14" name="t126"/>
+          <p:cNvPr id="14" name="t118"/>
           <p:cNvSpPr txBox="1"/>
           <p:nvPr/>
         </p:nvSpPr>
@@ -14976,7 +14498,7 @@
                   <a:schemeClr val="tx1"/>
                 </a:solidFill>
               </a:rPr>
-              <a:t>정 부회장의 직접 지분은 없고, 현대커머셜을 통해 영향력 행사</a:t>
+              <a:t>정 부회장 개인 지분은 0%, 영향력은 현대커머셜에서</a:t>
             </a:r>
             <a:endParaRPr lang="en-US" sz="2800" dirty="0"/>
           </a:p>
@@ -15022,7 +14544,7 @@
       </p:sp>
       <p:sp>
         <p:nvSpPr>
-          <p:cNvPr id="5" name="r127"/>
+          <p:cNvPr id="5" name="r119"/>
           <p:cNvSpPr/>
           <p:nvPr/>
         </p:nvSpPr>
@@ -15042,7 +14564,7 @@
       </p:sp>
       <p:sp>
         <p:nvSpPr>
-          <p:cNvPr id="6" name="t128"/>
+          <p:cNvPr id="6" name="t120"/>
           <p:cNvSpPr txBox="1"/>
           <p:nvPr/>
         </p:nvSpPr>
@@ -15078,7 +14600,7 @@
       </p:sp>
       <p:sp>
         <p:nvSpPr>
-          <p:cNvPr id="7" name="r129"/>
+          <p:cNvPr id="7" name="r121"/>
           <p:cNvSpPr/>
           <p:nvPr/>
         </p:nvSpPr>
@@ -15098,7 +14620,7 @@
       </p:sp>
       <p:sp>
         <p:nvSpPr>
-          <p:cNvPr id="8" name="t130"/>
+          <p:cNvPr id="8" name="t122"/>
           <p:cNvSpPr txBox="1"/>
           <p:nvPr/>
         </p:nvSpPr>
@@ -15134,7 +14656,7 @@
       </p:sp>
       <p:sp>
         <p:nvSpPr>
-          <p:cNvPr id="9" name="r131"/>
+          <p:cNvPr id="9" name="r123"/>
           <p:cNvSpPr/>
           <p:nvPr/>
         </p:nvSpPr>
@@ -15154,7 +14676,7 @@
       </p:sp>
       <p:sp>
         <p:nvSpPr>
-          <p:cNvPr id="10" name="t132"/>
+          <p:cNvPr id="10" name="t124"/>
           <p:cNvSpPr txBox="1"/>
           <p:nvPr/>
         </p:nvSpPr>
@@ -15190,7 +14712,7 @@
       </p:sp>
       <p:sp>
         <p:nvSpPr>
-          <p:cNvPr id="11" name="r133"/>
+          <p:cNvPr id="11" name="r125"/>
           <p:cNvSpPr/>
           <p:nvPr/>
         </p:nvSpPr>
@@ -15210,7 +14732,7 @@
       </p:sp>
       <p:sp>
         <p:nvSpPr>
-          <p:cNvPr id="12" name="r134"/>
+          <p:cNvPr id="12" name="r126"/>
           <p:cNvSpPr/>
           <p:nvPr/>
         </p:nvSpPr>
@@ -15230,7 +14752,7 @@
       </p:sp>
       <p:sp>
         <p:nvSpPr>
-          <p:cNvPr id="13" name="r135"/>
+          <p:cNvPr id="13" name="r127"/>
           <p:cNvSpPr/>
           <p:nvPr/>
         </p:nvSpPr>
@@ -15250,7 +14772,7 @@
       </p:sp>
       <p:sp>
         <p:nvSpPr>
-          <p:cNvPr id="14" name="t136"/>
+          <p:cNvPr id="14" name="t128"/>
           <p:cNvSpPr txBox="1"/>
           <p:nvPr/>
         </p:nvSpPr>
@@ -15306,7 +14828,7 @@
       </p:sp>
       <p:sp>
         <p:nvSpPr>
-          <p:cNvPr id="15" name="r137"/>
+          <p:cNvPr id="15" name="r129"/>
           <p:cNvSpPr/>
           <p:nvPr/>
         </p:nvSpPr>
@@ -15326,7 +14848,7 @@
       </p:sp>
       <p:sp>
         <p:nvSpPr>
-          <p:cNvPr id="16" name="t138"/>
+          <p:cNvPr id="16" name="t130"/>
           <p:cNvSpPr txBox="1"/>
           <p:nvPr/>
         </p:nvSpPr>
@@ -15382,7 +14904,7 @@
       </p:sp>
       <p:sp>
         <p:nvSpPr>
-          <p:cNvPr id="17" name="r139"/>
+          <p:cNvPr id="17" name="r131"/>
           <p:cNvSpPr/>
           <p:nvPr/>
         </p:nvSpPr>
@@ -15402,7 +14924,7 @@
       </p:sp>
       <p:sp>
         <p:nvSpPr>
-          <p:cNvPr id="18" name="t140"/>
+          <p:cNvPr id="18" name="t132"/>
           <p:cNvSpPr txBox="1"/>
           <p:nvPr/>
         </p:nvSpPr>
@@ -15458,7 +14980,7 @@
       </p:sp>
       <p:sp>
         <p:nvSpPr>
-          <p:cNvPr id="19" name="r141"/>
+          <p:cNvPr id="19" name="r133"/>
           <p:cNvSpPr/>
           <p:nvPr/>
         </p:nvSpPr>
@@ -15478,7 +15000,7 @@
       </p:sp>
       <p:sp>
         <p:nvSpPr>
-          <p:cNvPr id="20" name="t142"/>
+          <p:cNvPr id="20" name="t134"/>
           <p:cNvSpPr txBox="1"/>
           <p:nvPr/>
         </p:nvSpPr>
@@ -15534,7 +15056,7 @@
       </p:sp>
       <p:sp>
         <p:nvSpPr>
-          <p:cNvPr id="21" name="r143"/>
+          <p:cNvPr id="21" name="r135"/>
           <p:cNvSpPr/>
           <p:nvPr/>
         </p:nvSpPr>
@@ -15554,7 +15076,7 @@
       </p:sp>
       <p:sp>
         <p:nvSpPr>
-          <p:cNvPr id="22" name="t144"/>
+          <p:cNvPr id="22" name="t136"/>
           <p:cNvSpPr txBox="1"/>
           <p:nvPr/>
         </p:nvSpPr>
@@ -15610,7 +15132,7 @@
       </p:sp>
       <p:sp>
         <p:nvSpPr>
-          <p:cNvPr id="23" name="l145"/>
+          <p:cNvPr id="23" name="l137"/>
           <p:cNvSpPr/>
           <p:nvPr/>
         </p:nvSpPr>
@@ -15633,7 +15155,7 @@
       </p:sp>
       <p:sp>
         <p:nvSpPr>
-          <p:cNvPr id="24" name="r146"/>
+          <p:cNvPr id="24" name="r138"/>
           <p:cNvSpPr/>
           <p:nvPr/>
         </p:nvSpPr>
@@ -15653,7 +15175,7 @@
       </p:sp>
       <p:sp>
         <p:nvSpPr>
-          <p:cNvPr id="25" name="t147"/>
+          <p:cNvPr id="25" name="t139"/>
           <p:cNvSpPr txBox="1"/>
           <p:nvPr/>
         </p:nvSpPr>
@@ -15676,14 +15198,14 @@
               <a:buNone/>
             </a:pPr>
             <a:r>
-              <a:rPr lang="en-US" sz="1700" b="1" dirty="0">
+              <a:rPr lang="en-US" sz="1600" b="1" dirty="0">
                 <a:solidFill>
                   <a:schemeClr val="tx1"/>
                 </a:solidFill>
               </a:rPr>
               <a:t>정태영 · 정명이 부부</a:t>
             </a:r>
-            <a:endParaRPr lang="en-US" sz="1700" dirty="0"/>
+            <a:endParaRPr lang="en-US" sz="1600" dirty="0"/>
           </a:p>
         </p:txBody>
       </p:sp>
@@ -15713,7 +15235,7 @@
       </p:sp>
       <p:sp>
         <p:nvSpPr>
-          <p:cNvPr id="27" name="t148"/>
+          <p:cNvPr id="27" name="t140"/>
           <p:cNvSpPr txBox="1"/>
           <p:nvPr/>
         </p:nvSpPr>
@@ -15749,7 +15271,7 @@
       </p:sp>
       <p:sp>
         <p:nvSpPr>
-          <p:cNvPr id="28" name="r149"/>
+          <p:cNvPr id="28" name="r141"/>
           <p:cNvSpPr/>
           <p:nvPr/>
         </p:nvSpPr>
@@ -15769,7 +15291,7 @@
       </p:sp>
       <p:sp>
         <p:nvSpPr>
-          <p:cNvPr id="29" name="t150"/>
+          <p:cNvPr id="29" name="t142"/>
           <p:cNvSpPr txBox="1"/>
           <p:nvPr/>
         </p:nvSpPr>
@@ -15792,14 +15314,14 @@
               <a:buNone/>
             </a:pPr>
             <a:r>
-              <a:rPr lang="en-US" sz="1700" b="1" dirty="0">
+              <a:rPr lang="en-US" sz="1600" b="1" dirty="0">
                 <a:solidFill>
                   <a:schemeClr val="bg1"/>
                 </a:solidFill>
               </a:rPr>
               <a:t>현대커머셜</a:t>
             </a:r>
-            <a:endParaRPr lang="en-US" sz="1700" dirty="0"/>
+            <a:endParaRPr lang="en-US" sz="1600" dirty="0"/>
           </a:p>
         </p:txBody>
       </p:sp>
@@ -15829,7 +15351,7 @@
       </p:sp>
       <p:sp>
         <p:nvSpPr>
-          <p:cNvPr id="31" name="t151"/>
+          <p:cNvPr id="31" name="t143"/>
           <p:cNvSpPr txBox="1"/>
           <p:nvPr/>
         </p:nvSpPr>
@@ -15865,7 +15387,7 @@
       </p:sp>
       <p:sp>
         <p:nvSpPr>
-          <p:cNvPr id="32" name="r152"/>
+          <p:cNvPr id="32" name="r144"/>
           <p:cNvSpPr/>
           <p:nvPr/>
         </p:nvSpPr>
@@ -15885,7 +15407,7 @@
       </p:sp>
       <p:sp>
         <p:nvSpPr>
-          <p:cNvPr id="33" name="t153"/>
+          <p:cNvPr id="33" name="t145"/>
           <p:cNvSpPr txBox="1"/>
           <p:nvPr/>
         </p:nvSpPr>
@@ -15908,20 +15430,20 @@
               <a:buNone/>
             </a:pPr>
             <a:r>
-              <a:rPr lang="en-US" sz="1700" b="1" dirty="0">
+              <a:rPr lang="en-US" sz="1600" b="1" dirty="0">
                 <a:solidFill>
                   <a:schemeClr val="bg1"/>
                 </a:solidFill>
               </a:rPr>
               <a:t>현대카드</a:t>
             </a:r>
-            <a:endParaRPr lang="en-US" sz="1700" dirty="0"/>
-          </a:p>
-        </p:txBody>
-      </p:sp>
-      <p:sp>
-        <p:nvSpPr>
-          <p:cNvPr id="34" name="t154"/>
+            <a:endParaRPr lang="en-US" sz="1600" dirty="0"/>
+          </a:p>
+        </p:txBody>
+      </p:sp>
+      <p:sp>
+        <p:nvSpPr>
+          <p:cNvPr id="34" name="t146"/>
           <p:cNvSpPr txBox="1"/>
           <p:nvPr/>
         </p:nvSpPr>
